--- a/docs-src/slides/conteudoDadosDigitais.pptx
+++ b/docs-src/slides/conteudoDadosDigitais.pptx
@@ -16,14 +16,14 @@
     <p:sldId id="464" r:id="rId4"/>
     <p:sldId id="383" r:id="rId5"/>
     <p:sldId id="327" r:id="rId6"/>
-    <p:sldId id="337" r:id="rId7"/>
-    <p:sldId id="388" r:id="rId8"/>
-    <p:sldId id="344" r:id="rId9"/>
-    <p:sldId id="340" r:id="rId10"/>
-    <p:sldId id="465" r:id="rId11"/>
-    <p:sldId id="314" r:id="rId12"/>
-    <p:sldId id="315" r:id="rId13"/>
-    <p:sldId id="393" r:id="rId14"/>
+    <p:sldId id="388" r:id="rId7"/>
+    <p:sldId id="344" r:id="rId8"/>
+    <p:sldId id="340" r:id="rId9"/>
+    <p:sldId id="465" r:id="rId10"/>
+    <p:sldId id="314" r:id="rId11"/>
+    <p:sldId id="315" r:id="rId12"/>
+    <p:sldId id="393" r:id="rId13"/>
+    <p:sldId id="467" r:id="rId14"/>
     <p:sldId id="341" r:id="rId15"/>
     <p:sldId id="415" r:id="rId16"/>
     <p:sldId id="374" r:id="rId17"/>
@@ -252,7 +252,7 @@
           <a:p>
             <a:fld id="{17B2933F-D0FD-7240-A363-4A10A64C6792}" type="datetimeFigureOut">
               <a:rPr lang="en-US" smtClean="0"/>
-              <a:t>8/16/26</a:t>
+              <a:t>8/17/26</a:t>
             </a:fld>
             <a:endParaRPr lang="en-US"/>
           </a:p>
@@ -498,7 +498,7 @@
           <a:p>
             <a:fld id="{8E9F3387-6852-4167-A065-1B417E5289FE}" type="datetimeFigureOut">
               <a:rPr lang="pt-BR" smtClean="0"/>
-              <a:t>16/08/2026</a:t>
+              <a:t>17/08/2026</a:t>
             </a:fld>
             <a:endParaRPr lang="pt-BR"/>
           </a:p>
@@ -896,54 +896,6 @@
           <a:bodyPr/>
           <a:lstStyle/>
           <a:p>
-            <a:r>
-              <a:rPr lang="pt-BR" dirty="0"/>
-              <a:t>duas casas 4 possibilidades, 3 casas 8 possibilidades,</a:t>
-            </a:r>
-            <a:r>
-              <a:rPr lang="pt-BR" baseline="0" dirty="0"/>
-              <a:t> ou seja dois elevado ao número de </a:t>
-            </a:r>
-            <a:r>
-              <a:rPr lang="pt-BR" baseline="0" dirty="0" err="1"/>
-              <a:t>digitos</a:t>
-            </a:r>
-            <a:r>
-              <a:rPr lang="pt-BR" dirty="0"/>
-              <a:t>.</a:t>
-            </a:r>
-          </a:p>
-          <a:p>
-            <a:r>
-              <a:rPr lang="pt-BR" dirty="0"/>
-              <a:t>Dessa forma em 8 bits podemos colocar dados entre:</a:t>
-            </a:r>
-          </a:p>
-          <a:p>
-            <a:r>
-              <a:rPr lang="pt-BR" dirty="0"/>
-              <a:t>00000000 à 11111111</a:t>
-            </a:r>
-          </a:p>
-          <a:p>
-            <a:endParaRPr lang="pt-BR" dirty="0"/>
-          </a:p>
-          <a:p>
-            <a:r>
-              <a:rPr lang="pt-BR" dirty="0"/>
-              <a:t>Estudar:</a:t>
-            </a:r>
-          </a:p>
-          <a:p>
-            <a:r>
-              <a:rPr lang="pt-BR" dirty="0">
-                <a:hlinkClick r:id="rId3"/>
-              </a:rPr>
-              <a:t>http://homepage.cs.uiowa.edu/~jones/assem/notes/02data.shtml</a:t>
-            </a:r>
-            <a:endParaRPr lang="pt-BR" dirty="0"/>
-          </a:p>
-          <a:p>
             <a:endParaRPr lang="pt-BR" dirty="0"/>
           </a:p>
         </p:txBody>
@@ -974,7 +926,7 @@
     </p:spTree>
     <p:extLst>
       <p:ext uri="{BB962C8B-B14F-4D97-AF65-F5344CB8AC3E}">
-        <p14:creationId xmlns:p14="http://schemas.microsoft.com/office/powerpoint/2010/main" val="530051757"/>
+        <p14:creationId xmlns:p14="http://schemas.microsoft.com/office/powerpoint/2010/main" val="656737715"/>
       </p:ext>
     </p:extLst>
   </p:cSld>
@@ -1142,7 +1094,7 @@
     </p:spTree>
     <p:extLst>
       <p:ext uri="{BB962C8B-B14F-4D97-AF65-F5344CB8AC3E}">
-        <p14:creationId xmlns:p14="http://schemas.microsoft.com/office/powerpoint/2010/main" val="656737715"/>
+        <p14:creationId xmlns:p14="http://schemas.microsoft.com/office/powerpoint/2010/main" val="1090617290"/>
       </p:ext>
     </p:extLst>
   </p:cSld>
@@ -1157,7 +1109,13 @@
   <p:cSld>
     <p:spTree>
       <p:nvGrpSpPr>
-        <p:cNvPr id="1" name=""/>
+        <p:cNvPr id="1" name="">
+          <a:extLst>
+            <a:ext uri="{FF2B5EF4-FFF2-40B4-BE49-F238E27FC236}">
+              <a16:creationId xmlns:a16="http://schemas.microsoft.com/office/drawing/2014/main" id="{3F905267-4550-9E1D-82A3-2F72F915970E}"/>
+            </a:ext>
+          </a:extLst>
+        </p:cNvPr>
         <p:cNvGrpSpPr/>
         <p:nvPr/>
       </p:nvGrpSpPr>
@@ -1171,7 +1129,13 @@
       </p:grpSpPr>
       <p:sp>
         <p:nvSpPr>
-          <p:cNvPr id="2" name="Slide Image Placeholder 1"/>
+          <p:cNvPr id="2" name="Slide Image Placeholder 1">
+            <a:extLst>
+              <a:ext uri="{FF2B5EF4-FFF2-40B4-BE49-F238E27FC236}">
+                <a16:creationId xmlns:a16="http://schemas.microsoft.com/office/drawing/2014/main" id="{0BE7A6F1-89D6-A47C-1E52-B10AF865660D}"/>
+              </a:ext>
+            </a:extLst>
+          </p:cNvPr>
           <p:cNvSpPr>
             <a:spLocks noGrp="1" noRot="1" noChangeAspect="1"/>
           </p:cNvSpPr>
@@ -1183,7 +1147,13 @@
       </p:sp>
       <p:sp>
         <p:nvSpPr>
-          <p:cNvPr id="3" name="Notes Placeholder 2"/>
+          <p:cNvPr id="3" name="Notes Placeholder 2">
+            <a:extLst>
+              <a:ext uri="{FF2B5EF4-FFF2-40B4-BE49-F238E27FC236}">
+                <a16:creationId xmlns:a16="http://schemas.microsoft.com/office/drawing/2014/main" id="{E5F5714D-DA6B-660A-35F5-D48EBAE33897}"/>
+              </a:ext>
+            </a:extLst>
+          </p:cNvPr>
           <p:cNvSpPr>
             <a:spLocks noGrp="1"/>
           </p:cNvSpPr>
@@ -1202,7 +1172,13 @@
       </p:sp>
       <p:sp>
         <p:nvSpPr>
-          <p:cNvPr id="4" name="Slide Number Placeholder 3"/>
+          <p:cNvPr id="4" name="Slide Number Placeholder 3">
+            <a:extLst>
+              <a:ext uri="{FF2B5EF4-FFF2-40B4-BE49-F238E27FC236}">
+                <a16:creationId xmlns:a16="http://schemas.microsoft.com/office/drawing/2014/main" id="{8A45B230-9AAE-50CE-C713-231D432D6DE1}"/>
+              </a:ext>
+            </a:extLst>
+          </p:cNvPr>
           <p:cNvSpPr>
             <a:spLocks noGrp="1"/>
           </p:cNvSpPr>
@@ -1226,7 +1202,7 @@
     </p:spTree>
     <p:extLst>
       <p:ext uri="{BB962C8B-B14F-4D97-AF65-F5344CB8AC3E}">
-        <p14:creationId xmlns:p14="http://schemas.microsoft.com/office/powerpoint/2010/main" val="1090617290"/>
+        <p14:creationId xmlns:p14="http://schemas.microsoft.com/office/powerpoint/2010/main" val="2120996283"/>
       </p:ext>
     </p:extLst>
   </p:cSld>
@@ -1419,12 +1395,8 @@
           </a:p>
           <a:p>
             <a:r>
-              <a:rPr lang="pt-BR" dirty="0" err="1"/>
-              <a:t>http</a:t>
-            </a:r>
-            <a:r>
               <a:rPr lang="pt-BR" dirty="0"/>
-              <a:t>://</a:t>
+              <a:t>http://</a:t>
             </a:r>
             <a:r>
               <a:rPr lang="pt-BR" dirty="0" err="1"/>
@@ -1435,7 +1407,7 @@
               <a:t>/</a:t>
             </a:r>
             <a:r>
-              <a:rPr lang="pt-BR"/>
+              <a:rPr lang="pt-BR" dirty="0" err="1"/>
               <a:t>clipart-happy-smiling-face.html</a:t>
             </a:r>
             <a:endParaRPr lang="pt-BR" dirty="0"/>
@@ -1866,12 +1838,8 @@
           <a:lstStyle/>
           <a:p>
             <a:r>
-              <a:rPr lang="pt-BR" dirty="0" err="1"/>
-              <a:t>https</a:t>
-            </a:r>
-            <a:r>
               <a:rPr lang="pt-BR" dirty="0"/>
-              <a:t>://</a:t>
+              <a:t>https://</a:t>
             </a:r>
             <a:r>
               <a:rPr lang="pt-BR" dirty="0" err="1"/>
@@ -1894,7 +1862,7 @@
               <a:t>components</a:t>
             </a:r>
             <a:r>
-              <a:rPr lang="pt-BR"/>
+              <a:rPr lang="pt-BR" dirty="0"/>
               <a:t>/7-segment-display/7-segment-displays.jpg</a:t>
             </a:r>
           </a:p>
@@ -2030,7 +1998,7 @@
             </a:pPr>
             <a:fld id="{3A7F20AB-37B1-478F-A742-7A1AA2173FAD}" type="datetime1">
               <a:rPr lang="pt-BR" smtClean="0"/>
-              <a:t>16/08/2026</a:t>
+              <a:t>17/08/2026</a:t>
             </a:fld>
             <a:endParaRPr lang="en-US"/>
           </a:p>
@@ -5600,6 +5568,64 @@
           <a:bodyPr/>
           <a:lstStyle/>
           <a:p>
+            <a:pPr marL="0" marR="0" indent="0" algn="l" defTabSz="914400" rtl="0" eaLnBrk="1" fontAlgn="auto" latinLnBrk="0" hangingPunct="1">
+              <a:lnSpc>
+                <a:spcPct val="100000"/>
+              </a:lnSpc>
+              <a:spcBef>
+                <a:spcPts val="0"/>
+              </a:spcBef>
+              <a:spcAft>
+                <a:spcPts val="0"/>
+              </a:spcAft>
+              <a:buClrTx/>
+              <a:buSzTx/>
+              <a:buFontTx/>
+              <a:buNone/>
+              <a:tabLst/>
+              <a:defRPr/>
+            </a:pPr>
+            <a:r>
+              <a:rPr lang="pt-PT" sz="1200" b="0" i="0" kern="1200" dirty="0">
+                <a:solidFill>
+                  <a:schemeClr val="tx1"/>
+                </a:solidFill>
+                <a:effectLst/>
+                <a:latin typeface="+mn-lt"/>
+                <a:ea typeface="+mn-ea"/>
+                <a:cs typeface="+mn-cs"/>
+              </a:rPr>
+              <a:t>Sequência de </a:t>
+            </a:r>
+            <a:r>
+              <a:rPr lang="pt-PT" sz="1200" b="0" i="0" kern="1200" dirty="0" err="1">
+                <a:solidFill>
+                  <a:schemeClr val="tx1"/>
+                </a:solidFill>
+                <a:effectLst/>
+                <a:latin typeface="+mn-lt"/>
+                <a:ea typeface="+mn-ea"/>
+                <a:cs typeface="+mn-cs"/>
+              </a:rPr>
+              <a:t>Fibonacci</a:t>
+            </a:r>
+            <a:endParaRPr lang="pt-PT" sz="1200" b="0" i="0" kern="1200" dirty="0">
+              <a:solidFill>
+                <a:schemeClr val="tx1"/>
+              </a:solidFill>
+              <a:effectLst/>
+              <a:latin typeface="+mn-lt"/>
+              <a:ea typeface="+mn-ea"/>
+              <a:cs typeface="+mn-cs"/>
+            </a:endParaRPr>
+          </a:p>
+          <a:p>
+            <a:endParaRPr lang="pt-BR" dirty="0"/>
+          </a:p>
+          <a:p>
+            <a:endParaRPr lang="pt-BR" dirty="0"/>
+          </a:p>
+          <a:p>
             <a:r>
               <a:rPr lang="pt-BR" dirty="0" err="1"/>
               <a:t>http</a:t>
@@ -5610,7 +5636,7 @@
             </a:r>
             <a:r>
               <a:rPr lang="pt-BR" dirty="0" err="1"/>
-              <a:t>www.math.chalmers.se</a:t>
+              <a:t>www.stephanieylin.com</a:t>
             </a:r>
             <a:r>
               <a:rPr lang="pt-BR" dirty="0"/>
@@ -5618,12 +5644,49 @@
             </a:r>
             <a:r>
               <a:rPr lang="pt-BR" dirty="0" err="1"/>
-              <a:t>Math</a:t>
+              <a:t>humanbeing</a:t>
             </a:r>
             <a:r>
               <a:rPr lang="pt-BR" dirty="0"/>
               <a:t>/</a:t>
             </a:r>
+          </a:p>
+          <a:p>
+            <a:endParaRPr lang="pt-BR" dirty="0"/>
+          </a:p>
+          <a:p>
+            <a:r>
+              <a:rPr lang="pt-BR" dirty="0" err="1"/>
+              <a:t>doc</a:t>
+            </a:r>
+            <a:r>
+              <a:rPr lang="pt-BR" dirty="0"/>
+              <a:t>: </a:t>
+            </a:r>
+            <a:r>
+              <a:rPr lang="pt-BR" dirty="0" err="1"/>
+              <a:t>http</a:t>
+            </a:r>
+            <a:r>
+              <a:rPr lang="pt-BR" dirty="0"/>
+              <a:t>://</a:t>
+            </a:r>
+            <a:r>
+              <a:rPr lang="pt-BR" dirty="0" err="1"/>
+              <a:t>www.math.chalmers.se</a:t>
+            </a:r>
+            <a:r>
+              <a:rPr lang="pt-BR" dirty="0"/>
+              <a:t>/</a:t>
+            </a:r>
+            <a:r>
+              <a:rPr lang="pt-BR" dirty="0" err="1"/>
+              <a:t>Math</a:t>
+            </a:r>
+            <a:r>
+              <a:rPr lang="pt-BR" dirty="0"/>
+              <a:t>/</a:t>
+            </a:r>
             <a:r>
               <a:rPr lang="pt-BR" dirty="0" err="1"/>
               <a:t>Grundutb</a:t>
@@ -5641,7 +5704,7 @@
           <a:p>
             <a:r>
               <a:rPr lang="pt-BR" dirty="0" err="1"/>
-              <a:t>http</a:t>
+              <a:t>https</a:t>
             </a:r>
             <a:r>
               <a:rPr lang="pt-BR" dirty="0"/>
@@ -5649,7 +5712,7 @@
             </a:r>
             <a:r>
               <a:rPr lang="pt-BR" dirty="0" err="1"/>
-              <a:t>kids.britannica.com</a:t>
+              <a:t>en.wikipedia.org</a:t>
             </a:r>
             <a:r>
               <a:rPr lang="pt-BR" dirty="0"/>
@@ -5657,56 +5720,19 @@
             </a:r>
             <a:r>
               <a:rPr lang="pt-BR" dirty="0" err="1"/>
-              <a:t>elementary</a:t>
+              <a:t>wiki</a:t>
             </a:r>
             <a:r>
               <a:rPr lang="pt-BR" dirty="0"/>
-              <a:t>/art-89478/Hindu-</a:t>
+              <a:t>/Fibonacci#/media/</a:t>
             </a:r>
             <a:r>
               <a:rPr lang="pt-BR" dirty="0" err="1"/>
-              <a:t>Arabic</a:t>
-            </a:r>
-            <a:r>
-              <a:rPr lang="pt-BR" dirty="0"/>
-              <a:t>-</a:t>
-            </a:r>
-            <a:r>
-              <a:rPr lang="pt-BR" dirty="0" err="1"/>
-              <a:t>numerals</a:t>
-            </a:r>
-            <a:r>
-              <a:rPr lang="pt-BR" dirty="0"/>
-              <a:t>-are-</a:t>
-            </a:r>
-            <a:r>
-              <a:rPr lang="pt-BR" dirty="0" err="1"/>
-              <a:t>now</a:t>
-            </a:r>
-            <a:r>
-              <a:rPr lang="pt-BR" dirty="0"/>
-              <a:t>-</a:t>
-            </a:r>
-            <a:r>
-              <a:rPr lang="pt-BR" dirty="0" err="1"/>
-              <a:t>used</a:t>
-            </a:r>
-            <a:r>
-              <a:rPr lang="pt-BR" dirty="0"/>
-              <a:t>-in-</a:t>
-            </a:r>
-            <a:r>
-              <a:rPr lang="pt-BR" dirty="0" err="1"/>
-              <a:t>most</a:t>
-            </a:r>
-            <a:r>
-              <a:rPr lang="pt-BR" dirty="0"/>
-              <a:t>-</a:t>
-            </a:r>
-            <a:r>
-              <a:rPr lang="pt-BR" dirty="0" err="1"/>
-              <a:t>of-the</a:t>
-            </a:r>
+              <a:t>File:Fibonacci.jpg</a:t>
+            </a:r>
+            <a:endParaRPr lang="pt-BR" dirty="0"/>
+          </a:p>
+          <a:p>
             <a:endParaRPr lang="pt-BR" dirty="0"/>
           </a:p>
         </p:txBody>
@@ -5737,7 +5763,7 @@
     </p:spTree>
     <p:extLst>
       <p:ext uri="{BB962C8B-B14F-4D97-AF65-F5344CB8AC3E}">
-        <p14:creationId xmlns:p14="http://schemas.microsoft.com/office/powerpoint/2010/main" val="1118835600"/>
+        <p14:creationId xmlns:p14="http://schemas.microsoft.com/office/powerpoint/2010/main" val="3857331035"/>
       </p:ext>
     </p:extLst>
   </p:cSld>
@@ -5791,64 +5817,6 @@
           <a:bodyPr/>
           <a:lstStyle/>
           <a:p>
-            <a:pPr marL="0" marR="0" indent="0" algn="l" defTabSz="914400" rtl="0" eaLnBrk="1" fontAlgn="auto" latinLnBrk="0" hangingPunct="1">
-              <a:lnSpc>
-                <a:spcPct val="100000"/>
-              </a:lnSpc>
-              <a:spcBef>
-                <a:spcPts val="0"/>
-              </a:spcBef>
-              <a:spcAft>
-                <a:spcPts val="0"/>
-              </a:spcAft>
-              <a:buClrTx/>
-              <a:buSzTx/>
-              <a:buFontTx/>
-              <a:buNone/>
-              <a:tabLst/>
-              <a:defRPr/>
-            </a:pPr>
-            <a:r>
-              <a:rPr lang="pt-PT" sz="1200" b="0" i="0" kern="1200" dirty="0">
-                <a:solidFill>
-                  <a:schemeClr val="tx1"/>
-                </a:solidFill>
-                <a:effectLst/>
-                <a:latin typeface="+mn-lt"/>
-                <a:ea typeface="+mn-ea"/>
-                <a:cs typeface="+mn-cs"/>
-              </a:rPr>
-              <a:t>Sequência de </a:t>
-            </a:r>
-            <a:r>
-              <a:rPr lang="pt-PT" sz="1200" b="0" i="0" kern="1200" dirty="0" err="1">
-                <a:solidFill>
-                  <a:schemeClr val="tx1"/>
-                </a:solidFill>
-                <a:effectLst/>
-                <a:latin typeface="+mn-lt"/>
-                <a:ea typeface="+mn-ea"/>
-                <a:cs typeface="+mn-cs"/>
-              </a:rPr>
-              <a:t>Fibonacci</a:t>
-            </a:r>
-            <a:endParaRPr lang="pt-PT" sz="1200" b="0" i="0" kern="1200" dirty="0">
-              <a:solidFill>
-                <a:schemeClr val="tx1"/>
-              </a:solidFill>
-              <a:effectLst/>
-              <a:latin typeface="+mn-lt"/>
-              <a:ea typeface="+mn-ea"/>
-              <a:cs typeface="+mn-cs"/>
-            </a:endParaRPr>
-          </a:p>
-          <a:p>
-            <a:endParaRPr lang="pt-BR" dirty="0"/>
-          </a:p>
-          <a:p>
-            <a:endParaRPr lang="pt-BR" dirty="0"/>
-          </a:p>
-          <a:p>
             <a:r>
               <a:rPr lang="pt-BR" dirty="0" err="1"/>
               <a:t>http</a:t>
@@ -5859,104 +5827,46 @@
             </a:r>
             <a:r>
               <a:rPr lang="pt-BR" dirty="0" err="1"/>
-              <a:t>www.stephanieylin.com</a:t>
+              <a:t>www.toomanymornings.com</a:t>
             </a:r>
             <a:r>
               <a:rPr lang="pt-BR" dirty="0"/>
-              <a:t>/</a:t>
+              <a:t>/?</a:t>
             </a:r>
             <a:r>
               <a:rPr lang="pt-BR" dirty="0" err="1"/>
-              <a:t>humanbeing</a:t>
+              <a:t>attachment_id</a:t>
             </a:r>
             <a:r>
               <a:rPr lang="pt-BR" dirty="0"/>
-              <a:t>/</a:t>
-            </a:r>
-          </a:p>
-          <a:p>
-            <a:endParaRPr lang="pt-BR" dirty="0"/>
-          </a:p>
-          <a:p>
-            <a:r>
-              <a:rPr lang="pt-BR" dirty="0" err="1"/>
-              <a:t>doc</a:t>
-            </a:r>
-            <a:r>
-              <a:rPr lang="pt-BR" dirty="0"/>
-              <a:t>: </a:t>
-            </a:r>
+              <a:t>=4104</a:t>
+            </a:r>
+          </a:p>
+          <a:p>
             <a:r>
               <a:rPr lang="pt-BR" dirty="0" err="1"/>
               <a:t>http</a:t>
             </a:r>
             <a:r>
               <a:rPr lang="pt-BR" dirty="0"/>
-              <a:t>://</a:t>
+              <a:t>://www.10magazine.com.au/blog/</a:t>
             </a:r>
             <a:r>
               <a:rPr lang="pt-BR" dirty="0" err="1"/>
-              <a:t>www.math.chalmers.se</a:t>
+              <a:t>bespoke</a:t>
             </a:r>
             <a:r>
               <a:rPr lang="pt-BR" dirty="0"/>
-              <a:t>/</a:t>
+              <a:t>-</a:t>
             </a:r>
             <a:r>
               <a:rPr lang="pt-BR" dirty="0" err="1"/>
-              <a:t>Math</a:t>
+              <a:t>coco-rocha</a:t>
             </a:r>
             <a:r>
               <a:rPr lang="pt-BR" dirty="0"/>
-              <a:t>/</a:t>
-            </a:r>
-            <a:r>
-              <a:rPr lang="pt-BR" dirty="0" err="1"/>
-              <a:t>Grundutb</a:t>
-            </a:r>
-            <a:r>
-              <a:rPr lang="pt-BR" dirty="0"/>
-              <a:t>/GU/MAN250/S04/</a:t>
-            </a:r>
-            <a:r>
-              <a:rPr lang="pt-BR" dirty="0" err="1"/>
-              <a:t>Number_Systems.pdf</a:t>
-            </a:r>
-            <a:endParaRPr lang="pt-BR" dirty="0"/>
-          </a:p>
-          <a:p>
-            <a:r>
-              <a:rPr lang="pt-BR" dirty="0" err="1"/>
-              <a:t>https</a:t>
-            </a:r>
-            <a:r>
-              <a:rPr lang="pt-BR" dirty="0"/>
-              <a:t>://</a:t>
-            </a:r>
-            <a:r>
-              <a:rPr lang="pt-BR" dirty="0" err="1"/>
-              <a:t>en.wikipedia.org</a:t>
-            </a:r>
-            <a:r>
-              <a:rPr lang="pt-BR" dirty="0"/>
-              <a:t>/</a:t>
-            </a:r>
-            <a:r>
-              <a:rPr lang="pt-BR" dirty="0" err="1"/>
-              <a:t>wiki</a:t>
-            </a:r>
-            <a:r>
-              <a:rPr lang="pt-BR" dirty="0"/>
-              <a:t>/Fibonacci#/media/</a:t>
-            </a:r>
-            <a:r>
-              <a:rPr lang="pt-BR" dirty="0" err="1"/>
-              <a:t>File:Fibonacci.jpg</a:t>
-            </a:r>
-            <a:endParaRPr lang="pt-BR" dirty="0"/>
-          </a:p>
-          <a:p>
-            <a:endParaRPr lang="pt-BR" dirty="0"/>
+              <a:t>/	</a:t>
+            </a:r>
           </a:p>
         </p:txBody>
       </p:sp>
@@ -5986,7 +5896,7 @@
     </p:spTree>
     <p:extLst>
       <p:ext uri="{BB962C8B-B14F-4D97-AF65-F5344CB8AC3E}">
-        <p14:creationId xmlns:p14="http://schemas.microsoft.com/office/powerpoint/2010/main" val="3857331035"/>
+        <p14:creationId xmlns:p14="http://schemas.microsoft.com/office/powerpoint/2010/main" val="241508033"/>
       </p:ext>
     </p:extLst>
   </p:cSld>
@@ -6040,6 +5950,140 @@
           <a:bodyPr/>
           <a:lstStyle/>
           <a:p>
+            <a:pPr marL="0" marR="0" indent="0" algn="l" defTabSz="914400" rtl="0" eaLnBrk="1" fontAlgn="auto" latinLnBrk="0" hangingPunct="1">
+              <a:lnSpc>
+                <a:spcPct val="100000"/>
+              </a:lnSpc>
+              <a:spcBef>
+                <a:spcPts val="0"/>
+              </a:spcBef>
+              <a:spcAft>
+                <a:spcPts val="0"/>
+              </a:spcAft>
+              <a:buClrTx/>
+              <a:buSzTx/>
+              <a:buFontTx/>
+              <a:buNone/>
+              <a:tabLst/>
+              <a:defRPr/>
+            </a:pPr>
+            <a:r>
+              <a:rPr lang="en-US" dirty="0" err="1"/>
+              <a:t>Pingala</a:t>
+            </a:r>
+            <a:r>
+              <a:rPr lang="en-US" dirty="0"/>
+              <a:t> </a:t>
+            </a:r>
+            <a:r>
+              <a:rPr lang="en-US" dirty="0" err="1"/>
+              <a:t>é</a:t>
+            </a:r>
+            <a:r>
+              <a:rPr lang="en-US" dirty="0"/>
+              <a:t> um </a:t>
+            </a:r>
+            <a:r>
+              <a:rPr lang="en-US" dirty="0" err="1"/>
+              <a:t>antigo</a:t>
+            </a:r>
+            <a:r>
+              <a:rPr lang="en-US" dirty="0"/>
+              <a:t> </a:t>
+            </a:r>
+            <a:r>
+              <a:rPr lang="en-US" dirty="0" err="1"/>
+              <a:t>matemático</a:t>
+            </a:r>
+            <a:r>
+              <a:rPr lang="en-US" dirty="0"/>
+              <a:t> </a:t>
+            </a:r>
+            <a:r>
+              <a:rPr lang="en-US" dirty="0" err="1"/>
+              <a:t>indiano</a:t>
+            </a:r>
+            <a:r>
+              <a:rPr lang="en-US" dirty="0"/>
+              <a:t>, </a:t>
+            </a:r>
+            <a:r>
+              <a:rPr lang="en-US" dirty="0" err="1"/>
+              <a:t>famoso</a:t>
+            </a:r>
+            <a:r>
+              <a:rPr lang="en-US" dirty="0"/>
+              <a:t> </a:t>
+            </a:r>
+            <a:r>
+              <a:rPr lang="en-US" dirty="0" err="1"/>
+              <a:t>por</a:t>
+            </a:r>
+            <a:r>
+              <a:rPr lang="en-US" dirty="0"/>
+              <a:t> </a:t>
+            </a:r>
+            <a:r>
+              <a:rPr lang="en-US" dirty="0" err="1"/>
+              <a:t>sua</a:t>
+            </a:r>
+            <a:r>
+              <a:rPr lang="en-US" dirty="0"/>
+              <a:t> </a:t>
+            </a:r>
+            <a:r>
+              <a:rPr lang="en-US" dirty="0" err="1"/>
+              <a:t>obra</a:t>
+            </a:r>
+            <a:r>
+              <a:rPr lang="en-US" dirty="0"/>
+              <a:t>, o </a:t>
+            </a:r>
+            <a:r>
+              <a:rPr lang="en-US" dirty="0" err="1"/>
+              <a:t>Chandas</a:t>
+            </a:r>
+            <a:r>
+              <a:rPr lang="en-US" dirty="0"/>
+              <a:t> </a:t>
+            </a:r>
+            <a:r>
+              <a:rPr lang="en-US" dirty="0" err="1"/>
+              <a:t>shastra</a:t>
+            </a:r>
+            <a:r>
+              <a:rPr lang="en-US" dirty="0"/>
+              <a:t> que </a:t>
+            </a:r>
+            <a:r>
+              <a:rPr lang="en-US" dirty="0" err="1"/>
+              <a:t>discuti</a:t>
+            </a:r>
+            <a:r>
+              <a:rPr lang="en-US" dirty="0"/>
+              <a:t> </a:t>
+            </a:r>
+            <a:r>
+              <a:rPr lang="en-US" dirty="0" err="1"/>
+              <a:t>números</a:t>
+            </a:r>
+            <a:r>
+              <a:rPr lang="en-US" dirty="0"/>
+              <a:t> </a:t>
+            </a:r>
+            <a:r>
+              <a:rPr lang="en-US" dirty="0" err="1"/>
+              <a:t>binários</a:t>
+            </a:r>
+            <a:r>
+              <a:rPr lang="en-US" dirty="0"/>
+              <a:t>.</a:t>
+            </a:r>
+          </a:p>
+          <a:p>
+            <a:endParaRPr lang="pt-BR" dirty="0"/>
+          </a:p>
+          <a:p>
             <a:r>
               <a:rPr lang="pt-BR" dirty="0" err="1"/>
               <a:t>http</a:t>
@@ -6050,46 +6094,155 @@
             </a:r>
             <a:r>
               <a:rPr lang="pt-BR" dirty="0" err="1"/>
-              <a:t>www.toomanymornings.com</a:t>
+              <a:t>www.pierce.ctc.edu</a:t>
             </a:r>
             <a:r>
               <a:rPr lang="pt-BR" dirty="0"/>
-              <a:t>/?</a:t>
+              <a:t>/staff/</a:t>
             </a:r>
             <a:r>
               <a:rPr lang="pt-BR" dirty="0" err="1"/>
-              <a:t>attachment_id</a:t>
+              <a:t>dlippman</a:t>
             </a:r>
             <a:r>
               <a:rPr lang="pt-BR" dirty="0"/>
-              <a:t>=4104</a:t>
-            </a:r>
-          </a:p>
-          <a:p>
+              <a:t>/</a:t>
+            </a:r>
+            <a:r>
+              <a:rPr lang="pt-BR" dirty="0" err="1"/>
+              <a:t>mathinsociety</a:t>
+            </a:r>
+            <a:r>
+              <a:rPr lang="pt-BR" dirty="0"/>
+              <a:t>/HistoricalCounting1.0.pdf</a:t>
+            </a:r>
+          </a:p>
+          <a:p>
+            <a:pPr marL="0" marR="0" indent="0" algn="l" defTabSz="914400" rtl="0" eaLnBrk="1" fontAlgn="auto" latinLnBrk="0" hangingPunct="1">
+              <a:lnSpc>
+                <a:spcPct val="100000"/>
+              </a:lnSpc>
+              <a:spcBef>
+                <a:spcPts val="0"/>
+              </a:spcBef>
+              <a:spcAft>
+                <a:spcPts val="0"/>
+              </a:spcAft>
+              <a:buClrTx/>
+              <a:buSzTx/>
+              <a:buFontTx/>
+              <a:buNone/>
+              <a:tabLst/>
+              <a:defRPr/>
+            </a:pPr>
+            <a:r>
+              <a:rPr lang="pt-BR" dirty="0" err="1"/>
+              <a:t>https</a:t>
+            </a:r>
+            <a:r>
+              <a:rPr lang="pt-BR" dirty="0"/>
+              <a:t>://</a:t>
+            </a:r>
+            <a:r>
+              <a:rPr lang="pt-BR" dirty="0" err="1"/>
+              <a:t>en.wikipedia.org</a:t>
+            </a:r>
+            <a:r>
+              <a:rPr lang="pt-BR" dirty="0"/>
+              <a:t>/</a:t>
+            </a:r>
+            <a:r>
+              <a:rPr lang="pt-BR" dirty="0" err="1"/>
+              <a:t>wiki</a:t>
+            </a:r>
+            <a:r>
+              <a:rPr lang="pt-BR" dirty="0"/>
+              <a:t>/</a:t>
+            </a:r>
+            <a:r>
+              <a:rPr lang="pt-BR" dirty="0" err="1"/>
+              <a:t>Radix</a:t>
+            </a:r>
+            <a:endParaRPr lang="pt-BR" dirty="0"/>
+          </a:p>
+          <a:p>
+            <a:pPr marL="0" marR="0" indent="0" algn="l" defTabSz="914400" rtl="0" eaLnBrk="1" fontAlgn="auto" latinLnBrk="0" hangingPunct="1">
+              <a:lnSpc>
+                <a:spcPct val="100000"/>
+              </a:lnSpc>
+              <a:spcBef>
+                <a:spcPts val="0"/>
+              </a:spcBef>
+              <a:spcAft>
+                <a:spcPts val="0"/>
+              </a:spcAft>
+              <a:buClrTx/>
+              <a:buSzTx/>
+              <a:buFontTx/>
+              <a:buNone/>
+              <a:tabLst/>
+              <a:defRPr/>
+            </a:pPr>
             <a:r>
               <a:rPr lang="pt-BR" dirty="0" err="1"/>
               <a:t>http</a:t>
             </a:r>
             <a:r>
               <a:rPr lang="pt-BR" dirty="0"/>
-              <a:t>://www.10magazine.com.au/blog/</a:t>
+              <a:t>://</a:t>
             </a:r>
             <a:r>
               <a:rPr lang="pt-BR" dirty="0" err="1"/>
-              <a:t>bespoke</a:t>
+              <a:t>www.math.chalmers.se</a:t>
             </a:r>
             <a:r>
               <a:rPr lang="pt-BR" dirty="0"/>
-              <a:t>-</a:t>
+              <a:t>/</a:t>
             </a:r>
             <a:r>
               <a:rPr lang="pt-BR" dirty="0" err="1"/>
-              <a:t>coco-rocha</a:t>
+              <a:t>Math</a:t>
             </a:r>
             <a:r>
               <a:rPr lang="pt-BR" dirty="0"/>
-              <a:t>/	</a:t>
-            </a:r>
+              <a:t>/</a:t>
+            </a:r>
+            <a:r>
+              <a:rPr lang="pt-BR" dirty="0" err="1"/>
+              <a:t>Grundutb</a:t>
+            </a:r>
+            <a:r>
+              <a:rPr lang="pt-BR" dirty="0"/>
+              <a:t>/GU/MAN250/S04/</a:t>
+            </a:r>
+            <a:r>
+              <a:rPr lang="pt-BR" dirty="0" err="1"/>
+              <a:t>Number_Systems.pdf</a:t>
+            </a:r>
+            <a:endParaRPr lang="pt-BR" dirty="0"/>
+          </a:p>
+          <a:p>
+            <a:pPr marL="0" marR="0" indent="0" algn="l" defTabSz="914400" rtl="0" eaLnBrk="1" fontAlgn="auto" latinLnBrk="0" hangingPunct="1">
+              <a:lnSpc>
+                <a:spcPct val="100000"/>
+              </a:lnSpc>
+              <a:spcBef>
+                <a:spcPts val="0"/>
+              </a:spcBef>
+              <a:spcAft>
+                <a:spcPts val="0"/>
+              </a:spcAft>
+              <a:buClrTx/>
+              <a:buSzTx/>
+              <a:buFontTx/>
+              <a:buNone/>
+              <a:tabLst/>
+              <a:defRPr/>
+            </a:pPr>
+            <a:endParaRPr lang="pt-BR" dirty="0"/>
+          </a:p>
+          <a:p>
+            <a:endParaRPr lang="pt-BR" dirty="0"/>
           </a:p>
         </p:txBody>
       </p:sp>
@@ -6119,7 +6272,7 @@
     </p:spTree>
     <p:extLst>
       <p:ext uri="{BB962C8B-B14F-4D97-AF65-F5344CB8AC3E}">
-        <p14:creationId xmlns:p14="http://schemas.microsoft.com/office/powerpoint/2010/main" val="241508033"/>
+        <p14:creationId xmlns:p14="http://schemas.microsoft.com/office/powerpoint/2010/main" val="134922506"/>
       </p:ext>
     </p:extLst>
   </p:cSld>
@@ -6173,295 +6326,51 @@
           <a:bodyPr/>
           <a:lstStyle/>
           <a:p>
-            <a:pPr marL="0" marR="0" indent="0" algn="l" defTabSz="914400" rtl="0" eaLnBrk="1" fontAlgn="auto" latinLnBrk="0" hangingPunct="1">
-              <a:lnSpc>
-                <a:spcPct val="100000"/>
-              </a:lnSpc>
-              <a:spcBef>
-                <a:spcPts val="0"/>
-              </a:spcBef>
-              <a:spcAft>
-                <a:spcPts val="0"/>
-              </a:spcAft>
-              <a:buClrTx/>
-              <a:buSzTx/>
-              <a:buFontTx/>
-              <a:buNone/>
-              <a:tabLst/>
-              <a:defRPr/>
-            </a:pPr>
-            <a:r>
-              <a:rPr lang="en-US" dirty="0" err="1"/>
-              <a:t>Pingala</a:t>
-            </a:r>
-            <a:r>
-              <a:rPr lang="en-US" dirty="0"/>
-              <a:t> </a:t>
-            </a:r>
-            <a:r>
-              <a:rPr lang="en-US" dirty="0" err="1"/>
-              <a:t>é</a:t>
-            </a:r>
-            <a:r>
-              <a:rPr lang="en-US" dirty="0"/>
-              <a:t> um </a:t>
-            </a:r>
-            <a:r>
-              <a:rPr lang="en-US" dirty="0" err="1"/>
-              <a:t>antigo</a:t>
-            </a:r>
-            <a:r>
-              <a:rPr lang="en-US" dirty="0"/>
-              <a:t> </a:t>
-            </a:r>
-            <a:r>
-              <a:rPr lang="en-US" dirty="0" err="1"/>
-              <a:t>matemático</a:t>
-            </a:r>
-            <a:r>
-              <a:rPr lang="en-US" dirty="0"/>
-              <a:t> </a:t>
-            </a:r>
-            <a:r>
-              <a:rPr lang="en-US" dirty="0" err="1"/>
-              <a:t>indiano</a:t>
-            </a:r>
-            <a:r>
-              <a:rPr lang="en-US" dirty="0"/>
-              <a:t>, </a:t>
-            </a:r>
-            <a:r>
-              <a:rPr lang="en-US" dirty="0" err="1"/>
-              <a:t>famoso</a:t>
-            </a:r>
-            <a:r>
-              <a:rPr lang="en-US" dirty="0"/>
-              <a:t> </a:t>
-            </a:r>
-            <a:r>
-              <a:rPr lang="en-US" dirty="0" err="1"/>
-              <a:t>por</a:t>
-            </a:r>
-            <a:r>
-              <a:rPr lang="en-US" dirty="0"/>
-              <a:t> </a:t>
-            </a:r>
-            <a:r>
-              <a:rPr lang="en-US" dirty="0" err="1"/>
-              <a:t>sua</a:t>
-            </a:r>
-            <a:r>
-              <a:rPr lang="en-US" dirty="0"/>
-              <a:t> </a:t>
-            </a:r>
-            <a:r>
-              <a:rPr lang="en-US" dirty="0" err="1"/>
-              <a:t>obra</a:t>
-            </a:r>
-            <a:r>
-              <a:rPr lang="en-US" dirty="0"/>
-              <a:t>, o </a:t>
-            </a:r>
-            <a:r>
-              <a:rPr lang="en-US" dirty="0" err="1"/>
-              <a:t>Chandas</a:t>
-            </a:r>
-            <a:r>
-              <a:rPr lang="en-US" dirty="0"/>
-              <a:t> </a:t>
-            </a:r>
-            <a:r>
-              <a:rPr lang="en-US" dirty="0" err="1"/>
-              <a:t>shastra</a:t>
-            </a:r>
-            <a:r>
-              <a:rPr lang="en-US" dirty="0"/>
-              <a:t> que </a:t>
-            </a:r>
-            <a:r>
-              <a:rPr lang="en-US" dirty="0" err="1"/>
-              <a:t>discuti</a:t>
-            </a:r>
-            <a:r>
-              <a:rPr lang="en-US" dirty="0"/>
-              <a:t> </a:t>
-            </a:r>
-            <a:r>
-              <a:rPr lang="en-US" dirty="0" err="1"/>
-              <a:t>números</a:t>
-            </a:r>
-            <a:r>
-              <a:rPr lang="en-US" dirty="0"/>
-              <a:t> </a:t>
-            </a:r>
-            <a:r>
-              <a:rPr lang="en-US" dirty="0" err="1"/>
-              <a:t>binários</a:t>
-            </a:r>
-            <a:r>
-              <a:rPr lang="en-US" dirty="0"/>
+            <a:r>
+              <a:rPr lang="pt-BR" dirty="0"/>
+              <a:t>duas casas 4 possibilidades, 3 casas 8 possibilidades,</a:t>
+            </a:r>
+            <a:r>
+              <a:rPr lang="pt-BR" baseline="0" dirty="0"/>
+              <a:t> ou seja dois elevado ao número de </a:t>
+            </a:r>
+            <a:r>
+              <a:rPr lang="pt-BR" baseline="0" dirty="0" err="1"/>
+              <a:t>digitos</a:t>
+            </a:r>
+            <a:r>
+              <a:rPr lang="pt-BR" dirty="0"/>
               <a:t>.</a:t>
             </a:r>
           </a:p>
           <a:p>
+            <a:r>
+              <a:rPr lang="pt-BR" dirty="0"/>
+              <a:t>Dessa forma em 8 bits podemos colocar dados entre:</a:t>
+            </a:r>
+          </a:p>
+          <a:p>
+            <a:r>
+              <a:rPr lang="pt-BR" dirty="0"/>
+              <a:t>00000000 à 11111111</a:t>
+            </a:r>
+          </a:p>
+          <a:p>
             <a:endParaRPr lang="pt-BR" dirty="0"/>
           </a:p>
           <a:p>
             <a:r>
-              <a:rPr lang="pt-BR" dirty="0" err="1"/>
-              <a:t>http</a:t>
-            </a:r>
-            <a:r>
               <a:rPr lang="pt-BR" dirty="0"/>
-              <a:t>://</a:t>
-            </a:r>
-            <a:r>
-              <a:rPr lang="pt-BR" dirty="0" err="1"/>
-              <a:t>www.pierce.ctc.edu</a:t>
-            </a:r>
-            <a:r>
-              <a:rPr lang="pt-BR" dirty="0"/>
-              <a:t>/staff/</a:t>
-            </a:r>
-            <a:r>
-              <a:rPr lang="pt-BR" dirty="0" err="1"/>
-              <a:t>dlippman</a:t>
-            </a:r>
-            <a:r>
-              <a:rPr lang="pt-BR" dirty="0"/>
-              <a:t>/</a:t>
-            </a:r>
-            <a:r>
-              <a:rPr lang="pt-BR" dirty="0" err="1"/>
-              <a:t>mathinsociety</a:t>
-            </a:r>
-            <a:r>
-              <a:rPr lang="pt-BR" dirty="0"/>
-              <a:t>/HistoricalCounting1.0.pdf</a:t>
-            </a:r>
-          </a:p>
-          <a:p>
-            <a:pPr marL="0" marR="0" indent="0" algn="l" defTabSz="914400" rtl="0" eaLnBrk="1" fontAlgn="auto" latinLnBrk="0" hangingPunct="1">
-              <a:lnSpc>
-                <a:spcPct val="100000"/>
-              </a:lnSpc>
-              <a:spcBef>
-                <a:spcPts val="0"/>
-              </a:spcBef>
-              <a:spcAft>
-                <a:spcPts val="0"/>
-              </a:spcAft>
-              <a:buClrTx/>
-              <a:buSzTx/>
-              <a:buFontTx/>
-              <a:buNone/>
-              <a:tabLst/>
-              <a:defRPr/>
-            </a:pPr>
-            <a:r>
-              <a:rPr lang="pt-BR" dirty="0" err="1"/>
-              <a:t>https</a:t>
-            </a:r>
-            <a:r>
-              <a:rPr lang="pt-BR" dirty="0"/>
-              <a:t>://</a:t>
-            </a:r>
-            <a:r>
-              <a:rPr lang="pt-BR" dirty="0" err="1"/>
-              <a:t>en.wikipedia.org</a:t>
-            </a:r>
-            <a:r>
-              <a:rPr lang="pt-BR" dirty="0"/>
-              <a:t>/</a:t>
-            </a:r>
-            <a:r>
-              <a:rPr lang="pt-BR" dirty="0" err="1"/>
-              <a:t>wiki</a:t>
-            </a:r>
-            <a:r>
-              <a:rPr lang="pt-BR" dirty="0"/>
-              <a:t>/</a:t>
-            </a:r>
-            <a:r>
-              <a:rPr lang="pt-BR" dirty="0" err="1"/>
-              <a:t>Radix</a:t>
-            </a:r>
-            <a:endParaRPr lang="pt-BR" dirty="0"/>
-          </a:p>
-          <a:p>
-            <a:pPr marL="0" marR="0" indent="0" algn="l" defTabSz="914400" rtl="0" eaLnBrk="1" fontAlgn="auto" latinLnBrk="0" hangingPunct="1">
-              <a:lnSpc>
-                <a:spcPct val="100000"/>
-              </a:lnSpc>
-              <a:spcBef>
-                <a:spcPts val="0"/>
-              </a:spcBef>
-              <a:spcAft>
-                <a:spcPts val="0"/>
-              </a:spcAft>
-              <a:buClrTx/>
-              <a:buSzTx/>
-              <a:buFontTx/>
-              <a:buNone/>
-              <a:tabLst/>
-              <a:defRPr/>
-            </a:pPr>
-            <a:r>
-              <a:rPr lang="pt-BR" dirty="0" err="1"/>
-              <a:t>http</a:t>
-            </a:r>
-            <a:r>
-              <a:rPr lang="pt-BR" dirty="0"/>
-              <a:t>://</a:t>
-            </a:r>
-            <a:r>
-              <a:rPr lang="pt-BR" dirty="0" err="1"/>
-              <a:t>www.math.chalmers.se</a:t>
-            </a:r>
-            <a:r>
-              <a:rPr lang="pt-BR" dirty="0"/>
-              <a:t>/</a:t>
-            </a:r>
-            <a:r>
-              <a:rPr lang="pt-BR" dirty="0" err="1"/>
-              <a:t>Math</a:t>
-            </a:r>
-            <a:r>
-              <a:rPr lang="pt-BR" dirty="0"/>
-              <a:t>/</a:t>
-            </a:r>
-            <a:r>
-              <a:rPr lang="pt-BR" dirty="0" err="1"/>
-              <a:t>Grundutb</a:t>
-            </a:r>
-            <a:r>
-              <a:rPr lang="pt-BR" dirty="0"/>
-              <a:t>/GU/MAN250/S04/</a:t>
-            </a:r>
-            <a:r>
-              <a:rPr lang="pt-BR" dirty="0" err="1"/>
-              <a:t>Number_Systems.pdf</a:t>
-            </a:r>
-            <a:endParaRPr lang="pt-BR" dirty="0"/>
-          </a:p>
-          <a:p>
-            <a:pPr marL="0" marR="0" indent="0" algn="l" defTabSz="914400" rtl="0" eaLnBrk="1" fontAlgn="auto" latinLnBrk="0" hangingPunct="1">
-              <a:lnSpc>
-                <a:spcPct val="100000"/>
-              </a:lnSpc>
-              <a:spcBef>
-                <a:spcPts val="0"/>
-              </a:spcBef>
-              <a:spcAft>
-                <a:spcPts val="0"/>
-              </a:spcAft>
-              <a:buClrTx/>
-              <a:buSzTx/>
-              <a:buFontTx/>
-              <a:buNone/>
-              <a:tabLst/>
-              <a:defRPr/>
-            </a:pPr>
+              <a:t>Estudar:</a:t>
+            </a:r>
+          </a:p>
+          <a:p>
+            <a:r>
+              <a:rPr lang="pt-BR" dirty="0">
+                <a:hlinkClick r:id="rId3"/>
+              </a:rPr>
+              <a:t>http://homepage.cs.uiowa.edu/~jones/assem/notes/02data.shtml</a:t>
+            </a:r>
             <a:endParaRPr lang="pt-BR" dirty="0"/>
           </a:p>
           <a:p>
@@ -6495,7 +6404,7 @@
     </p:spTree>
     <p:extLst>
       <p:ext uri="{BB962C8B-B14F-4D97-AF65-F5344CB8AC3E}">
-        <p14:creationId xmlns:p14="http://schemas.microsoft.com/office/powerpoint/2010/main" val="134922506"/>
+        <p14:creationId xmlns:p14="http://schemas.microsoft.com/office/powerpoint/2010/main" val="530051757"/>
       </p:ext>
     </p:extLst>
   </p:cSld>
@@ -6547,7 +6456,7 @@
           <a:p>
             <a:fld id="{CC8788FA-9D8F-3C45-9A7B-393163C83DF0}" type="datetime1">
               <a:rPr lang="en-US" smtClean="0"/>
-              <a:t>8/16/26</a:t>
+              <a:t>8/17/26</a:t>
             </a:fld>
             <a:endParaRPr lang="pt-BR" dirty="0"/>
           </a:p>
@@ -7080,7 +6989,7 @@
           <a:p>
             <a:fld id="{AB1C2149-89A1-2143-B6CB-10E4BD2D3370}" type="datetime1">
               <a:rPr lang="en-US" smtClean="0"/>
-              <a:t>8/16/26</a:t>
+              <a:t>8/17/26</a:t>
             </a:fld>
             <a:endParaRPr lang="pt-BR"/>
           </a:p>
@@ -7628,7 +7537,7 @@
           <a:p>
             <a:fld id="{372D7956-45FE-0B43-9FB1-4BE9D905D684}" type="datetime1">
               <a:rPr lang="en-US" smtClean="0"/>
-              <a:t>8/16/26</a:t>
+              <a:t>8/17/26</a:t>
             </a:fld>
             <a:endParaRPr lang="pt-BR"/>
           </a:p>
@@ -7953,7 +7862,7 @@
           <a:p>
             <a:fld id="{2316C89B-46A1-944B-8294-819B08567B54}" type="datetime1">
               <a:rPr lang="en-US" smtClean="0"/>
-              <a:t>8/16/26</a:t>
+              <a:t>8/17/26</a:t>
             </a:fld>
             <a:endParaRPr lang="pt-BR"/>
           </a:p>
@@ -8479,7 +8388,7 @@
           <a:p>
             <a:fld id="{02FE0B43-6A8C-D94C-A4F4-9A1865BE9A40}" type="datetime1">
               <a:rPr lang="en-US" smtClean="0"/>
-              <a:t>8/16/26</a:t>
+              <a:t>8/17/26</a:t>
             </a:fld>
             <a:endParaRPr lang="pt-BR"/>
           </a:p>
@@ -9097,7 +9006,7 @@
             </a:pPr>
             <a:fld id="{EF6ED924-9D16-4A38-9B8F-043BDA0BE473}" type="datetime1">
               <a:rPr lang="pt-BR" smtClean="0"/>
-              <a:t>16/08/2026</a:t>
+              <a:t>17/08/2026</a:t>
             </a:fld>
             <a:endParaRPr lang="en-US"/>
           </a:p>
@@ -9239,7 +9148,7 @@
           <a:p>
             <a:fld id="{A8EA56D1-9008-324A-AE78-6F3716B85DF9}" type="datetime1">
               <a:rPr lang="en-US" smtClean="0"/>
-              <a:t>8/16/26</a:t>
+              <a:t>8/17/26</a:t>
             </a:fld>
             <a:endParaRPr lang="pt-BR" dirty="0"/>
           </a:p>
@@ -9831,13 +9740,13 @@
   <p:clrMapOvr>
     <a:masterClrMapping/>
   </p:clrMapOvr>
-  <mc:AlternateContent xmlns:mc="http://schemas.openxmlformats.org/markup-compatibility/2006">
-    <mc:Choice xmlns:p14="http://schemas.microsoft.com/office/powerpoint/2010/main" Requires="p14">
+  <mc:AlternateContent xmlns:mc="http://schemas.openxmlformats.org/markup-compatibility/2006" xmlns:p14="http://schemas.microsoft.com/office/powerpoint/2010/main">
+    <mc:Choice Requires="p14">
       <p:transition spd="slow" p14:dur="1200">
         <p14:prism/>
       </p:transition>
     </mc:Choice>
-    <mc:Fallback>
+    <mc:Fallback xmlns="">
       <p:transition spd="slow">
         <p:fade/>
       </p:transition>
@@ -9880,1564 +9789,6 @@
           <a:p>
             <a:r>
               <a:rPr lang="pt-BR" dirty="0"/>
-              <a:t>Dados Binários ( e Hexadecimais)</a:t>
-            </a:r>
-          </a:p>
-        </p:txBody>
-      </p:sp>
-      <p:sp>
-        <p:nvSpPr>
-          <p:cNvPr id="3" name="Content Placeholder 2"/>
-          <p:cNvSpPr>
-            <a:spLocks noGrp="1"/>
-          </p:cNvSpPr>
-          <p:nvPr>
-            <p:ph idx="1"/>
-          </p:nvPr>
-        </p:nvSpPr>
-        <p:spPr/>
-        <p:txBody>
-          <a:bodyPr/>
-          <a:lstStyle/>
-          <a:p>
-            <a:r>
-              <a:rPr lang="pt-BR" dirty="0"/>
-              <a:t>Cada dígito binário representa um bit. Usualmente os bits são organizados em 8 bits (Byte) ou múltiplos deles 16, 32, 64 bits.</a:t>
-            </a:r>
-          </a:p>
-          <a:p>
-            <a:endParaRPr lang="pt-BR" dirty="0"/>
-          </a:p>
-          <a:p>
-            <a:endParaRPr lang="pt-BR" dirty="0"/>
-          </a:p>
-          <a:p>
-            <a:endParaRPr lang="pt-BR" dirty="0"/>
-          </a:p>
-          <a:p>
-            <a:endParaRPr lang="pt-BR" dirty="0"/>
-          </a:p>
-          <a:p>
-            <a:endParaRPr lang="pt-BR" dirty="0"/>
-          </a:p>
-          <a:p>
-            <a:endParaRPr lang="pt-BR" dirty="0"/>
-          </a:p>
-          <a:p>
-            <a:endParaRPr lang="pt-BR" dirty="0"/>
-          </a:p>
-          <a:p>
-            <a:endParaRPr lang="pt-BR" dirty="0"/>
-          </a:p>
-          <a:p>
-            <a:endParaRPr lang="pt-BR" dirty="0"/>
-          </a:p>
-          <a:p>
-            <a:endParaRPr lang="pt-BR" dirty="0"/>
-          </a:p>
-        </p:txBody>
-      </p:sp>
-      <p:sp>
-        <p:nvSpPr>
-          <p:cNvPr id="4" name="Text Placeholder 3"/>
-          <p:cNvSpPr>
-            <a:spLocks noGrp="1"/>
-          </p:cNvSpPr>
-          <p:nvPr>
-            <p:ph type="body" sz="quarter" idx="13"/>
-          </p:nvPr>
-        </p:nvSpPr>
-        <p:spPr/>
-        <p:txBody>
-          <a:bodyPr/>
-          <a:lstStyle/>
-          <a:p>
-            <a:endParaRPr lang="pt-BR"/>
-          </a:p>
-        </p:txBody>
-      </p:sp>
-      <p:sp>
-        <p:nvSpPr>
-          <p:cNvPr id="5" name="Slide Number Placeholder 4"/>
-          <p:cNvSpPr>
-            <a:spLocks noGrp="1"/>
-          </p:cNvSpPr>
-          <p:nvPr>
-            <p:ph type="sldNum" sz="quarter" idx="4"/>
-          </p:nvPr>
-        </p:nvSpPr>
-        <p:spPr/>
-        <p:txBody>
-          <a:bodyPr/>
-          <a:lstStyle/>
-          <a:p>
-            <a:fld id="{7FFE5E5C-C80A-4D8D-A711-3102A7BA9258}" type="slidenum">
-              <a:rPr lang="pt-BR" smtClean="0"/>
-              <a:pPr/>
-              <a:t>10</a:t>
-            </a:fld>
-            <a:endParaRPr lang="pt-BR" dirty="0"/>
-          </a:p>
-        </p:txBody>
-      </p:sp>
-      <p:grpSp>
-        <p:nvGrpSpPr>
-          <p:cNvPr id="6" name="Group 17"/>
-          <p:cNvGrpSpPr>
-            <a:grpSpLocks/>
-          </p:cNvGrpSpPr>
-          <p:nvPr/>
-        </p:nvGrpSpPr>
-        <p:grpSpPr bwMode="auto">
-          <a:xfrm>
-            <a:off x="2085975" y="3746814"/>
-            <a:ext cx="4648200" cy="508000"/>
-            <a:chOff x="1905000" y="3886200"/>
-            <a:chExt cx="7086600" cy="773723"/>
-          </a:xfrm>
-        </p:grpSpPr>
-        <p:sp>
-          <p:nvSpPr>
-            <p:cNvPr id="7" name="Rectangle 6"/>
-            <p:cNvSpPr/>
-            <p:nvPr/>
-          </p:nvSpPr>
-          <p:spPr bwMode="auto">
-            <a:xfrm>
-              <a:off x="1905000" y="3886200"/>
-              <a:ext cx="837419" cy="773723"/>
-            </a:xfrm>
-            <a:prstGeom prst="rect">
-              <a:avLst/>
-            </a:prstGeom>
-            <a:solidFill>
-              <a:schemeClr val="bg1">
-                <a:lumMod val="65000"/>
-                <a:lumOff val="35000"/>
-              </a:schemeClr>
-            </a:solidFill>
-            <a:ln w="9525" cap="flat" cmpd="sng" algn="ctr">
-              <a:solidFill>
-                <a:schemeClr val="tx1"/>
-              </a:solidFill>
-              <a:prstDash val="solid"/>
-              <a:round/>
-              <a:headEnd type="none" w="med" len="med"/>
-              <a:tailEnd type="none" w="med" len="med"/>
-            </a:ln>
-            <a:effectLst/>
-          </p:spPr>
-          <p:txBody>
-            <a:bodyPr tIns="91440" bIns="91440" anchor="ctr"/>
-            <a:lstStyle/>
-            <a:p>
-              <a:pPr algn="ctr" defTabSz="669925" eaLnBrk="0" hangingPunct="0">
-                <a:spcBef>
-                  <a:spcPct val="50000"/>
-                </a:spcBef>
-                <a:defRPr/>
-              </a:pPr>
-              <a:r>
-                <a:rPr lang="pt-BR" sz="2800">
-                  <a:solidFill>
-                    <a:srgbClr val="000000"/>
-                  </a:solidFill>
-                  <a:latin typeface="+mn-lt"/>
-                </a:rPr>
-                <a:t>1</a:t>
-              </a:r>
-              <a:endParaRPr lang="en-US" sz="2800">
-                <a:solidFill>
-                  <a:srgbClr val="000000"/>
-                </a:solidFill>
-                <a:latin typeface="+mn-lt"/>
-              </a:endParaRPr>
-            </a:p>
-          </p:txBody>
-        </p:sp>
-        <p:sp>
-          <p:nvSpPr>
-            <p:cNvPr id="8" name="Rectangle 7"/>
-            <p:cNvSpPr/>
-            <p:nvPr/>
-          </p:nvSpPr>
-          <p:spPr bwMode="auto">
-            <a:xfrm>
-              <a:off x="2798087" y="3886200"/>
-              <a:ext cx="837419" cy="773723"/>
-            </a:xfrm>
-            <a:prstGeom prst="rect">
-              <a:avLst/>
-            </a:prstGeom>
-            <a:solidFill>
-              <a:schemeClr val="bg1">
-                <a:lumMod val="65000"/>
-                <a:lumOff val="35000"/>
-              </a:schemeClr>
-            </a:solidFill>
-            <a:ln w="9525" cap="flat" cmpd="sng" algn="ctr">
-              <a:solidFill>
-                <a:schemeClr val="tx1"/>
-              </a:solidFill>
-              <a:prstDash val="solid"/>
-              <a:round/>
-              <a:headEnd type="none" w="med" len="med"/>
-              <a:tailEnd type="none" w="med" len="med"/>
-            </a:ln>
-            <a:effectLst/>
-          </p:spPr>
-          <p:txBody>
-            <a:bodyPr tIns="91440" bIns="91440" anchor="ctr"/>
-            <a:lstStyle/>
-            <a:p>
-              <a:pPr algn="ctr" defTabSz="669925" eaLnBrk="0" hangingPunct="0">
-                <a:spcBef>
-                  <a:spcPct val="50000"/>
-                </a:spcBef>
-                <a:defRPr/>
-              </a:pPr>
-              <a:r>
-                <a:rPr lang="pt-BR" sz="2800">
-                  <a:solidFill>
-                    <a:srgbClr val="000000"/>
-                  </a:solidFill>
-                  <a:latin typeface="+mn-lt"/>
-                </a:rPr>
-                <a:t>1</a:t>
-              </a:r>
-              <a:endParaRPr lang="en-US" sz="2800">
-                <a:solidFill>
-                  <a:srgbClr val="000000"/>
-                </a:solidFill>
-                <a:latin typeface="+mn-lt"/>
-              </a:endParaRPr>
-            </a:p>
-          </p:txBody>
-        </p:sp>
-        <p:sp>
-          <p:nvSpPr>
-            <p:cNvPr id="9" name="Rectangle 8"/>
-            <p:cNvSpPr/>
-            <p:nvPr/>
-          </p:nvSpPr>
-          <p:spPr bwMode="auto">
-            <a:xfrm>
-              <a:off x="3691172" y="3886200"/>
-              <a:ext cx="837419" cy="773723"/>
-            </a:xfrm>
-            <a:prstGeom prst="rect">
-              <a:avLst/>
-            </a:prstGeom>
-            <a:solidFill>
-              <a:schemeClr val="bg1">
-                <a:lumMod val="65000"/>
-                <a:lumOff val="35000"/>
-              </a:schemeClr>
-            </a:solidFill>
-            <a:ln w="9525" cap="flat" cmpd="sng" algn="ctr">
-              <a:solidFill>
-                <a:schemeClr val="tx1"/>
-              </a:solidFill>
-              <a:prstDash val="solid"/>
-              <a:round/>
-              <a:headEnd type="none" w="med" len="med"/>
-              <a:tailEnd type="none" w="med" len="med"/>
-            </a:ln>
-            <a:effectLst/>
-          </p:spPr>
-          <p:txBody>
-            <a:bodyPr tIns="91440" bIns="91440" anchor="ctr"/>
-            <a:lstStyle/>
-            <a:p>
-              <a:pPr algn="ctr" defTabSz="669925" eaLnBrk="0" hangingPunct="0">
-                <a:spcBef>
-                  <a:spcPct val="50000"/>
-                </a:spcBef>
-                <a:defRPr/>
-              </a:pPr>
-              <a:r>
-                <a:rPr lang="pt-BR" sz="2800">
-                  <a:solidFill>
-                    <a:srgbClr val="000000"/>
-                  </a:solidFill>
-                  <a:latin typeface="+mn-lt"/>
-                </a:rPr>
-                <a:t>1</a:t>
-              </a:r>
-              <a:endParaRPr lang="en-US" sz="2800">
-                <a:solidFill>
-                  <a:srgbClr val="000000"/>
-                </a:solidFill>
-                <a:latin typeface="+mn-lt"/>
-              </a:endParaRPr>
-            </a:p>
-          </p:txBody>
-        </p:sp>
-        <p:sp>
-          <p:nvSpPr>
-            <p:cNvPr id="10" name="Rectangle 9"/>
-            <p:cNvSpPr/>
-            <p:nvPr/>
-          </p:nvSpPr>
-          <p:spPr bwMode="auto">
-            <a:xfrm>
-              <a:off x="4581837" y="3886200"/>
-              <a:ext cx="839840" cy="773723"/>
-            </a:xfrm>
-            <a:prstGeom prst="rect">
-              <a:avLst/>
-            </a:prstGeom>
-            <a:solidFill>
-              <a:schemeClr val="bg1">
-                <a:lumMod val="65000"/>
-                <a:lumOff val="35000"/>
-              </a:schemeClr>
-            </a:solidFill>
-            <a:ln w="9525" cap="flat" cmpd="sng" algn="ctr">
-              <a:solidFill>
-                <a:schemeClr val="tx1"/>
-              </a:solidFill>
-              <a:prstDash val="solid"/>
-              <a:round/>
-              <a:headEnd type="none" w="med" len="med"/>
-              <a:tailEnd type="none" w="med" len="med"/>
-            </a:ln>
-            <a:effectLst/>
-          </p:spPr>
-          <p:txBody>
-            <a:bodyPr tIns="91440" bIns="91440" anchor="ctr"/>
-            <a:lstStyle/>
-            <a:p>
-              <a:pPr algn="ctr" defTabSz="669925" eaLnBrk="0" hangingPunct="0">
-                <a:spcBef>
-                  <a:spcPct val="50000"/>
-                </a:spcBef>
-                <a:defRPr/>
-              </a:pPr>
-              <a:r>
-                <a:rPr lang="pt-BR" sz="2800" dirty="0">
-                  <a:solidFill>
-                    <a:srgbClr val="000000"/>
-                  </a:solidFill>
-                  <a:latin typeface="+mn-lt"/>
-                </a:rPr>
-                <a:t>1</a:t>
-              </a:r>
-              <a:endParaRPr lang="en-US" sz="2800" dirty="0">
-                <a:solidFill>
-                  <a:srgbClr val="000000"/>
-                </a:solidFill>
-                <a:latin typeface="+mn-lt"/>
-              </a:endParaRPr>
-            </a:p>
-          </p:txBody>
-        </p:sp>
-        <p:sp>
-          <p:nvSpPr>
-            <p:cNvPr id="11" name="Rectangle 10"/>
-            <p:cNvSpPr/>
-            <p:nvPr/>
-          </p:nvSpPr>
-          <p:spPr bwMode="auto">
-            <a:xfrm>
-              <a:off x="5474924" y="3886200"/>
-              <a:ext cx="839839" cy="773723"/>
-            </a:xfrm>
-            <a:prstGeom prst="rect">
-              <a:avLst/>
-            </a:prstGeom>
-            <a:solidFill>
-              <a:schemeClr val="bg1">
-                <a:lumMod val="65000"/>
-                <a:lumOff val="35000"/>
-              </a:schemeClr>
-            </a:solidFill>
-            <a:ln w="9525" cap="flat" cmpd="sng" algn="ctr">
-              <a:solidFill>
-                <a:schemeClr val="tx1"/>
-              </a:solidFill>
-              <a:prstDash val="solid"/>
-              <a:round/>
-              <a:headEnd type="none" w="med" len="med"/>
-              <a:tailEnd type="none" w="med" len="med"/>
-            </a:ln>
-            <a:effectLst/>
-          </p:spPr>
-          <p:txBody>
-            <a:bodyPr tIns="91440" bIns="91440" anchor="ctr"/>
-            <a:lstStyle/>
-            <a:p>
-              <a:pPr algn="ctr" defTabSz="669925" eaLnBrk="0" hangingPunct="0">
-                <a:spcBef>
-                  <a:spcPct val="50000"/>
-                </a:spcBef>
-                <a:defRPr/>
-              </a:pPr>
-              <a:r>
-                <a:rPr lang="pt-BR" sz="2800">
-                  <a:solidFill>
-                    <a:srgbClr val="000000"/>
-                  </a:solidFill>
-                  <a:latin typeface="+mn-lt"/>
-                </a:rPr>
-                <a:t>1</a:t>
-              </a:r>
-              <a:endParaRPr lang="en-US" sz="2800">
-                <a:solidFill>
-                  <a:srgbClr val="000000"/>
-                </a:solidFill>
-                <a:latin typeface="+mn-lt"/>
-              </a:endParaRPr>
-            </a:p>
-          </p:txBody>
-        </p:sp>
-        <p:sp>
-          <p:nvSpPr>
-            <p:cNvPr id="12" name="Rectangle 11"/>
-            <p:cNvSpPr/>
-            <p:nvPr/>
-          </p:nvSpPr>
-          <p:spPr bwMode="auto">
-            <a:xfrm>
-              <a:off x="6368009" y="3886200"/>
-              <a:ext cx="837419" cy="773723"/>
-            </a:xfrm>
-            <a:prstGeom prst="rect">
-              <a:avLst/>
-            </a:prstGeom>
-            <a:solidFill>
-              <a:schemeClr val="bg1">
-                <a:lumMod val="65000"/>
-                <a:lumOff val="35000"/>
-              </a:schemeClr>
-            </a:solidFill>
-            <a:ln w="9525" cap="flat" cmpd="sng" algn="ctr">
-              <a:solidFill>
-                <a:schemeClr val="tx1"/>
-              </a:solidFill>
-              <a:prstDash val="solid"/>
-              <a:round/>
-              <a:headEnd type="none" w="med" len="med"/>
-              <a:tailEnd type="none" w="med" len="med"/>
-            </a:ln>
-            <a:effectLst/>
-          </p:spPr>
-          <p:txBody>
-            <a:bodyPr tIns="91440" bIns="91440" anchor="ctr"/>
-            <a:lstStyle/>
-            <a:p>
-              <a:pPr algn="ctr" defTabSz="669925" eaLnBrk="0" hangingPunct="0">
-                <a:spcBef>
-                  <a:spcPct val="50000"/>
-                </a:spcBef>
-                <a:defRPr/>
-              </a:pPr>
-              <a:r>
-                <a:rPr lang="pt-BR" sz="2800">
-                  <a:solidFill>
-                    <a:srgbClr val="000000"/>
-                  </a:solidFill>
-                  <a:latin typeface="+mn-lt"/>
-                </a:rPr>
-                <a:t>1</a:t>
-              </a:r>
-              <a:endParaRPr lang="en-US" sz="2800">
-                <a:solidFill>
-                  <a:srgbClr val="000000"/>
-                </a:solidFill>
-                <a:latin typeface="+mn-lt"/>
-              </a:endParaRPr>
-            </a:p>
-          </p:txBody>
-        </p:sp>
-        <p:sp>
-          <p:nvSpPr>
-            <p:cNvPr id="13" name="Rectangle 12"/>
-            <p:cNvSpPr/>
-            <p:nvPr/>
-          </p:nvSpPr>
-          <p:spPr bwMode="auto">
-            <a:xfrm>
-              <a:off x="7261096" y="3886200"/>
-              <a:ext cx="837419" cy="773723"/>
-            </a:xfrm>
-            <a:prstGeom prst="rect">
-              <a:avLst/>
-            </a:prstGeom>
-            <a:solidFill>
-              <a:schemeClr val="bg1">
-                <a:lumMod val="65000"/>
-                <a:lumOff val="35000"/>
-              </a:schemeClr>
-            </a:solidFill>
-            <a:ln w="9525" cap="flat" cmpd="sng" algn="ctr">
-              <a:solidFill>
-                <a:schemeClr val="tx1"/>
-              </a:solidFill>
-              <a:prstDash val="solid"/>
-              <a:round/>
-              <a:headEnd type="none" w="med" len="med"/>
-              <a:tailEnd type="none" w="med" len="med"/>
-            </a:ln>
-            <a:effectLst/>
-          </p:spPr>
-          <p:txBody>
-            <a:bodyPr tIns="91440" bIns="91440" anchor="ctr"/>
-            <a:lstStyle/>
-            <a:p>
-              <a:pPr algn="ctr" defTabSz="669925" eaLnBrk="0" hangingPunct="0">
-                <a:spcBef>
-                  <a:spcPct val="50000"/>
-                </a:spcBef>
-                <a:defRPr/>
-              </a:pPr>
-              <a:r>
-                <a:rPr lang="pt-BR" sz="2800">
-                  <a:solidFill>
-                    <a:srgbClr val="000000"/>
-                  </a:solidFill>
-                  <a:latin typeface="+mn-lt"/>
-                </a:rPr>
-                <a:t>1</a:t>
-              </a:r>
-              <a:endParaRPr lang="en-US" sz="2800">
-                <a:solidFill>
-                  <a:srgbClr val="000000"/>
-                </a:solidFill>
-                <a:latin typeface="+mn-lt"/>
-              </a:endParaRPr>
-            </a:p>
-          </p:txBody>
-        </p:sp>
-        <p:sp>
-          <p:nvSpPr>
-            <p:cNvPr id="14" name="Rectangle 13"/>
-            <p:cNvSpPr/>
-            <p:nvPr/>
-          </p:nvSpPr>
-          <p:spPr bwMode="auto">
-            <a:xfrm>
-              <a:off x="8154181" y="3886200"/>
-              <a:ext cx="837419" cy="773723"/>
-            </a:xfrm>
-            <a:prstGeom prst="rect">
-              <a:avLst/>
-            </a:prstGeom>
-            <a:solidFill>
-              <a:schemeClr val="bg1">
-                <a:lumMod val="65000"/>
-                <a:lumOff val="35000"/>
-              </a:schemeClr>
-            </a:solidFill>
-            <a:ln w="9525" cap="flat" cmpd="sng" algn="ctr">
-              <a:solidFill>
-                <a:schemeClr val="tx1"/>
-              </a:solidFill>
-              <a:prstDash val="solid"/>
-              <a:round/>
-              <a:headEnd type="none" w="med" len="med"/>
-              <a:tailEnd type="none" w="med" len="med"/>
-            </a:ln>
-            <a:effectLst/>
-          </p:spPr>
-          <p:txBody>
-            <a:bodyPr tIns="91440" bIns="91440" anchor="ctr"/>
-            <a:lstStyle/>
-            <a:p>
-              <a:pPr algn="ctr" defTabSz="669925" eaLnBrk="0" hangingPunct="0">
-                <a:spcBef>
-                  <a:spcPct val="50000"/>
-                </a:spcBef>
-                <a:defRPr/>
-              </a:pPr>
-              <a:r>
-                <a:rPr lang="pt-BR" sz="2800">
-                  <a:solidFill>
-                    <a:srgbClr val="000000"/>
-                  </a:solidFill>
-                  <a:latin typeface="+mn-lt"/>
-                </a:rPr>
-                <a:t>1</a:t>
-              </a:r>
-              <a:endParaRPr lang="en-US" sz="2800">
-                <a:solidFill>
-                  <a:srgbClr val="000000"/>
-                </a:solidFill>
-                <a:latin typeface="+mn-lt"/>
-              </a:endParaRPr>
-            </a:p>
-          </p:txBody>
-        </p:sp>
-      </p:grpSp>
-      <p:grpSp>
-        <p:nvGrpSpPr>
-          <p:cNvPr id="25" name="Group 24"/>
-          <p:cNvGrpSpPr/>
-          <p:nvPr/>
-        </p:nvGrpSpPr>
-        <p:grpSpPr>
-          <a:xfrm>
-            <a:off x="352153" y="4313418"/>
-            <a:ext cx="3036138" cy="1297536"/>
-            <a:chOff x="352153" y="4313418"/>
-            <a:chExt cx="3036138" cy="1297536"/>
-          </a:xfrm>
-        </p:grpSpPr>
-        <p:sp>
-          <p:nvSpPr>
-            <p:cNvPr id="15" name="Rectangle 14"/>
-            <p:cNvSpPr/>
-            <p:nvPr/>
-          </p:nvSpPr>
-          <p:spPr>
-            <a:xfrm>
-              <a:off x="352153" y="4697884"/>
-              <a:ext cx="3036138" cy="913070"/>
-            </a:xfrm>
-            <a:prstGeom prst="rect">
-              <a:avLst/>
-            </a:prstGeom>
-            <a:ln>
-              <a:solidFill>
-                <a:srgbClr val="000000"/>
-              </a:solidFill>
-              <a:prstDash val="sysDash"/>
-            </a:ln>
-          </p:spPr>
-          <p:txBody>
-            <a:bodyPr wrap="none">
-              <a:spAutoFit/>
-            </a:bodyPr>
-            <a:lstStyle/>
-            <a:p>
-              <a:pPr algn="ctr"/>
-              <a:r>
-                <a:rPr lang="pt-BR" sz="3200" baseline="30000" dirty="0"/>
-                <a:t>bit</a:t>
-              </a:r>
-              <a:r>
-                <a:rPr lang="pt-BR" sz="3200" dirty="0"/>
-                <a:t> </a:t>
-              </a:r>
-              <a:r>
-                <a:rPr lang="pt-BR" sz="3200" baseline="30000" dirty="0"/>
-                <a:t>mais significativo</a:t>
-              </a:r>
-            </a:p>
-            <a:p>
-              <a:pPr algn="ctr"/>
-              <a:r>
-                <a:rPr lang="en-US" sz="3200" baseline="30000" dirty="0"/>
-                <a:t>(MSB) most significant bit</a:t>
-              </a:r>
-              <a:endParaRPr lang="en-US" sz="3200" dirty="0"/>
-            </a:p>
-          </p:txBody>
-        </p:sp>
-        <p:cxnSp>
-          <p:nvCxnSpPr>
-            <p:cNvPr id="16" name="Straight Arrow Connector 15"/>
-            <p:cNvCxnSpPr>
-              <a:stCxn id="15" idx="0"/>
-            </p:cNvCxnSpPr>
-            <p:nvPr/>
-          </p:nvCxnSpPr>
-          <p:spPr>
-            <a:xfrm flipV="1">
-              <a:off x="1870222" y="4313418"/>
-              <a:ext cx="215753" cy="384466"/>
-            </a:xfrm>
-            <a:prstGeom prst="straightConnector1">
-              <a:avLst/>
-            </a:prstGeom>
-            <a:ln>
-              <a:solidFill>
-                <a:srgbClr val="000000"/>
-              </a:solidFill>
-              <a:tailEnd type="arrow"/>
-            </a:ln>
-          </p:spPr>
-          <p:style>
-            <a:lnRef idx="2">
-              <a:schemeClr val="accent1"/>
-            </a:lnRef>
-            <a:fillRef idx="0">
-              <a:schemeClr val="accent1"/>
-            </a:fillRef>
-            <a:effectRef idx="1">
-              <a:schemeClr val="accent1"/>
-            </a:effectRef>
-            <a:fontRef idx="minor">
-              <a:schemeClr val="tx1"/>
-            </a:fontRef>
-          </p:style>
-        </p:cxnSp>
-      </p:grpSp>
-      <p:grpSp>
-        <p:nvGrpSpPr>
-          <p:cNvPr id="26" name="Group 25"/>
-          <p:cNvGrpSpPr/>
-          <p:nvPr/>
-        </p:nvGrpSpPr>
-        <p:grpSpPr>
-          <a:xfrm>
-            <a:off x="5685599" y="4289460"/>
-            <a:ext cx="2990237" cy="1297536"/>
-            <a:chOff x="5685599" y="4289460"/>
-            <a:chExt cx="2990237" cy="1297536"/>
-          </a:xfrm>
-        </p:grpSpPr>
-        <p:sp>
-          <p:nvSpPr>
-            <p:cNvPr id="19" name="Rectangle 18"/>
-            <p:cNvSpPr/>
-            <p:nvPr/>
-          </p:nvSpPr>
-          <p:spPr>
-            <a:xfrm>
-              <a:off x="5685599" y="4673926"/>
-              <a:ext cx="2990237" cy="913070"/>
-            </a:xfrm>
-            <a:prstGeom prst="rect">
-              <a:avLst/>
-            </a:prstGeom>
-            <a:ln>
-              <a:solidFill>
-                <a:srgbClr val="000000"/>
-              </a:solidFill>
-              <a:prstDash val="sysDash"/>
-            </a:ln>
-          </p:spPr>
-          <p:txBody>
-            <a:bodyPr wrap="square">
-              <a:spAutoFit/>
-            </a:bodyPr>
-            <a:lstStyle/>
-            <a:p>
-              <a:pPr algn="ctr"/>
-              <a:r>
-                <a:rPr lang="pt-BR" sz="3200" baseline="30000" dirty="0"/>
-                <a:t>bit</a:t>
-              </a:r>
-              <a:r>
-                <a:rPr lang="pt-BR" sz="3200" dirty="0"/>
-                <a:t> </a:t>
-              </a:r>
-              <a:r>
-                <a:rPr lang="pt-BR" sz="3200" baseline="30000" dirty="0"/>
-                <a:t>menos significativo</a:t>
-              </a:r>
-            </a:p>
-            <a:p>
-              <a:pPr algn="ctr"/>
-              <a:r>
-                <a:rPr lang="en-US" sz="3200" baseline="30000" dirty="0"/>
-                <a:t>(LSB) least significant bit</a:t>
-              </a:r>
-              <a:endParaRPr lang="en-US" sz="3200" dirty="0"/>
-            </a:p>
-          </p:txBody>
-        </p:sp>
-        <p:cxnSp>
-          <p:nvCxnSpPr>
-            <p:cNvPr id="20" name="Straight Arrow Connector 19"/>
-            <p:cNvCxnSpPr>
-              <a:stCxn id="19" idx="0"/>
-            </p:cNvCxnSpPr>
-            <p:nvPr/>
-          </p:nvCxnSpPr>
-          <p:spPr>
-            <a:xfrm flipH="1" flipV="1">
-              <a:off x="6758136" y="4289460"/>
-              <a:ext cx="422582" cy="384466"/>
-            </a:xfrm>
-            <a:prstGeom prst="straightConnector1">
-              <a:avLst/>
-            </a:prstGeom>
-            <a:ln>
-              <a:solidFill>
-                <a:srgbClr val="000000"/>
-              </a:solidFill>
-              <a:tailEnd type="arrow"/>
-            </a:ln>
-          </p:spPr>
-          <p:style>
-            <a:lnRef idx="2">
-              <a:schemeClr val="accent1"/>
-            </a:lnRef>
-            <a:fillRef idx="0">
-              <a:schemeClr val="accent1"/>
-            </a:fillRef>
-            <a:effectRef idx="1">
-              <a:schemeClr val="accent1"/>
-            </a:effectRef>
-            <a:fontRef idx="minor">
-              <a:schemeClr val="tx1"/>
-            </a:fontRef>
-          </p:style>
-        </p:cxnSp>
-      </p:grpSp>
-      <p:sp>
-        <p:nvSpPr>
-          <p:cNvPr id="17" name="Left Brace 16"/>
-          <p:cNvSpPr/>
-          <p:nvPr/>
-        </p:nvSpPr>
-        <p:spPr>
-          <a:xfrm rot="5400000">
-            <a:off x="3052349" y="2299295"/>
-            <a:ext cx="373890" cy="2306638"/>
-          </a:xfrm>
-          <a:prstGeom prst="leftBrace">
-            <a:avLst/>
-          </a:prstGeom>
-        </p:spPr>
-        <p:style>
-          <a:lnRef idx="1">
-            <a:schemeClr val="accent1"/>
-          </a:lnRef>
-          <a:fillRef idx="0">
-            <a:schemeClr val="accent1"/>
-          </a:fillRef>
-          <a:effectRef idx="0">
-            <a:schemeClr val="accent1"/>
-          </a:effectRef>
-          <a:fontRef idx="minor">
-            <a:schemeClr val="tx1"/>
-          </a:fontRef>
-        </p:style>
-        <p:txBody>
-          <a:bodyPr rtlCol="0" anchor="ctr"/>
-          <a:lstStyle/>
-          <a:p>
-            <a:pPr algn="ctr"/>
-            <a:endParaRPr lang="pt-BR"/>
-          </a:p>
-        </p:txBody>
-      </p:sp>
-      <p:sp>
-        <p:nvSpPr>
-          <p:cNvPr id="22" name="Left Brace 21"/>
-          <p:cNvSpPr/>
-          <p:nvPr/>
-        </p:nvSpPr>
-        <p:spPr>
-          <a:xfrm rot="5400000">
-            <a:off x="5393912" y="2299295"/>
-            <a:ext cx="373890" cy="2306638"/>
-          </a:xfrm>
-          <a:prstGeom prst="leftBrace">
-            <a:avLst/>
-          </a:prstGeom>
-        </p:spPr>
-        <p:style>
-          <a:lnRef idx="1">
-            <a:schemeClr val="accent1"/>
-          </a:lnRef>
-          <a:fillRef idx="0">
-            <a:schemeClr val="accent1"/>
-          </a:fillRef>
-          <a:effectRef idx="0">
-            <a:schemeClr val="accent1"/>
-          </a:effectRef>
-          <a:fontRef idx="minor">
-            <a:schemeClr val="tx1"/>
-          </a:fontRef>
-        </p:style>
-        <p:txBody>
-          <a:bodyPr rtlCol="0" anchor="ctr"/>
-          <a:lstStyle/>
-          <a:p>
-            <a:pPr algn="ctr"/>
-            <a:endParaRPr lang="pt-BR"/>
-          </a:p>
-        </p:txBody>
-      </p:sp>
-      <p:sp>
-        <p:nvSpPr>
-          <p:cNvPr id="18" name="Rectangle 17"/>
-          <p:cNvSpPr/>
-          <p:nvPr/>
-        </p:nvSpPr>
-        <p:spPr>
-          <a:xfrm>
-            <a:off x="2390379" y="2590849"/>
-            <a:ext cx="4341999" cy="707886"/>
-          </a:xfrm>
-          <a:prstGeom prst="rect">
-            <a:avLst/>
-          </a:prstGeom>
-        </p:spPr>
-        <p:txBody>
-          <a:bodyPr wrap="square">
-            <a:spAutoFit/>
-          </a:bodyPr>
-          <a:lstStyle/>
-          <a:p>
-            <a:r>
-              <a:rPr lang="pt-BR" sz="4000" noProof="1"/>
-              <a:t>0 x F              </a:t>
-            </a:r>
-            <a:r>
-              <a:rPr lang="pt-BR" sz="2000" noProof="1"/>
-              <a:t> </a:t>
-            </a:r>
-            <a:r>
-              <a:rPr lang="pt-BR" sz="4000" noProof="1"/>
-              <a:t>    F</a:t>
-            </a:r>
-          </a:p>
-        </p:txBody>
-      </p:sp>
-      <p:sp>
-        <p:nvSpPr>
-          <p:cNvPr id="23" name="Rectangle 22"/>
-          <p:cNvSpPr/>
-          <p:nvPr/>
-        </p:nvSpPr>
-        <p:spPr>
-          <a:xfrm>
-            <a:off x="524893" y="3799390"/>
-            <a:ext cx="846707" cy="369332"/>
-          </a:xfrm>
-          <a:prstGeom prst="rect">
-            <a:avLst/>
-          </a:prstGeom>
-        </p:spPr>
-        <p:txBody>
-          <a:bodyPr wrap="none">
-            <a:spAutoFit/>
-          </a:bodyPr>
-          <a:lstStyle/>
-          <a:p>
-            <a:r>
-              <a:rPr lang="pt-BR" dirty="0">
-                <a:solidFill>
-                  <a:srgbClr val="002060"/>
-                </a:solidFill>
-              </a:rPr>
-              <a:t>binário</a:t>
-            </a:r>
-          </a:p>
-        </p:txBody>
-      </p:sp>
-      <p:sp>
-        <p:nvSpPr>
-          <p:cNvPr id="24" name="Rectangle 23"/>
-          <p:cNvSpPr/>
-          <p:nvPr/>
-        </p:nvSpPr>
-        <p:spPr>
-          <a:xfrm>
-            <a:off x="524892" y="2823504"/>
-            <a:ext cx="1360052" cy="369332"/>
-          </a:xfrm>
-          <a:prstGeom prst="rect">
-            <a:avLst/>
-          </a:prstGeom>
-        </p:spPr>
-        <p:txBody>
-          <a:bodyPr wrap="none">
-            <a:spAutoFit/>
-          </a:bodyPr>
-          <a:lstStyle/>
-          <a:p>
-            <a:r>
-              <a:rPr lang="pt-BR" dirty="0">
-                <a:solidFill>
-                  <a:srgbClr val="002060"/>
-                </a:solidFill>
-              </a:rPr>
-              <a:t>hexadecimal</a:t>
-            </a:r>
-          </a:p>
-        </p:txBody>
-      </p:sp>
-    </p:spTree>
-    <p:custDataLst>
-      <p:tags r:id="rId1"/>
-    </p:custDataLst>
-    <p:extLst>
-      <p:ext uri="{BB962C8B-B14F-4D97-AF65-F5344CB8AC3E}">
-        <p14:creationId xmlns:p14="http://schemas.microsoft.com/office/powerpoint/2010/main" val="849212017"/>
-      </p:ext>
-    </p:extLst>
-  </p:cSld>
-  <p:clrMapOvr>
-    <a:masterClrMapping/>
-  </p:clrMapOvr>
-  <mc:AlternateContent xmlns:mc="http://schemas.openxmlformats.org/markup-compatibility/2006">
-    <mc:Choice xmlns:p14="http://schemas.microsoft.com/office/powerpoint/2010/main" Requires="p14">
-      <p:transition spd="slow" p14:dur="1200">
-        <p14:prism/>
-      </p:transition>
-    </mc:Choice>
-    <mc:Fallback>
-      <p:transition spd="slow">
-        <p:fade/>
-      </p:transition>
-    </mc:Fallback>
-  </mc:AlternateContent>
-  <p:timing>
-    <p:tnLst>
-      <p:par>
-        <p:cTn id="1" dur="indefinite" restart="never" nodeType="tmRoot">
-          <p:childTnLst>
-            <p:seq concurrent="1" nextAc="seek">
-              <p:cTn id="2" dur="indefinite" nodeType="mainSeq">
-                <p:childTnLst>
-                  <p:par>
-                    <p:cTn id="3" fill="hold">
-                      <p:stCondLst>
-                        <p:cond delay="indefinite"/>
-                      </p:stCondLst>
-                      <p:childTnLst>
-                        <p:par>
-                          <p:cTn id="4" fill="hold">
-                            <p:stCondLst>
-                              <p:cond delay="0"/>
-                            </p:stCondLst>
-                            <p:childTnLst>
-                              <p:par>
-                                <p:cTn id="5" presetID="42" presetClass="entr" presetSubtype="0" fill="hold" nodeType="clickEffect">
-                                  <p:stCondLst>
-                                    <p:cond delay="0"/>
-                                  </p:stCondLst>
-                                  <p:childTnLst>
-                                    <p:set>
-                                      <p:cBhvr>
-                                        <p:cTn id="6" dur="1" fill="hold">
-                                          <p:stCondLst>
-                                            <p:cond delay="0"/>
-                                          </p:stCondLst>
-                                        </p:cTn>
-                                        <p:tgtEl>
-                                          <p:spTgt spid="26"/>
-                                        </p:tgtEl>
-                                        <p:attrNameLst>
-                                          <p:attrName>style.visibility</p:attrName>
-                                        </p:attrNameLst>
-                                      </p:cBhvr>
-                                      <p:to>
-                                        <p:strVal val="visible"/>
-                                      </p:to>
-                                    </p:set>
-                                    <p:animEffect transition="in" filter="fade">
-                                      <p:cBhvr>
-                                        <p:cTn id="7" dur="1000"/>
-                                        <p:tgtEl>
-                                          <p:spTgt spid="26"/>
-                                        </p:tgtEl>
-                                      </p:cBhvr>
-                                    </p:animEffect>
-                                    <p:anim calcmode="lin" valueType="num">
-                                      <p:cBhvr>
-                                        <p:cTn id="8" dur="1000" fill="hold"/>
-                                        <p:tgtEl>
-                                          <p:spTgt spid="26"/>
-                                        </p:tgtEl>
-                                        <p:attrNameLst>
-                                          <p:attrName>ppt_x</p:attrName>
-                                        </p:attrNameLst>
-                                      </p:cBhvr>
-                                      <p:tavLst>
-                                        <p:tav tm="0">
-                                          <p:val>
-                                            <p:strVal val="#ppt_x"/>
-                                          </p:val>
-                                        </p:tav>
-                                        <p:tav tm="100000">
-                                          <p:val>
-                                            <p:strVal val="#ppt_x"/>
-                                          </p:val>
-                                        </p:tav>
-                                      </p:tavLst>
-                                    </p:anim>
-                                    <p:anim calcmode="lin" valueType="num">
-                                      <p:cBhvr>
-                                        <p:cTn id="9" dur="1000" fill="hold"/>
-                                        <p:tgtEl>
-                                          <p:spTgt spid="26"/>
-                                        </p:tgtEl>
-                                        <p:attrNameLst>
-                                          <p:attrName>ppt_y</p:attrName>
-                                        </p:attrNameLst>
-                                      </p:cBhvr>
-                                      <p:tavLst>
-                                        <p:tav tm="0">
-                                          <p:val>
-                                            <p:strVal val="#ppt_y+.1"/>
-                                          </p:val>
-                                        </p:tav>
-                                        <p:tav tm="100000">
-                                          <p:val>
-                                            <p:strVal val="#ppt_y"/>
-                                          </p:val>
-                                        </p:tav>
-                                      </p:tavLst>
-                                    </p:anim>
-                                  </p:childTnLst>
-                                </p:cTn>
-                              </p:par>
-                            </p:childTnLst>
-                          </p:cTn>
-                        </p:par>
-                      </p:childTnLst>
-                    </p:cTn>
-                  </p:par>
-                  <p:par>
-                    <p:cTn id="10" fill="hold">
-                      <p:stCondLst>
-                        <p:cond delay="indefinite"/>
-                      </p:stCondLst>
-                      <p:childTnLst>
-                        <p:par>
-                          <p:cTn id="11" fill="hold">
-                            <p:stCondLst>
-                              <p:cond delay="0"/>
-                            </p:stCondLst>
-                            <p:childTnLst>
-                              <p:par>
-                                <p:cTn id="12" presetID="42" presetClass="entr" presetSubtype="0" fill="hold" nodeType="clickEffect">
-                                  <p:stCondLst>
-                                    <p:cond delay="0"/>
-                                  </p:stCondLst>
-                                  <p:childTnLst>
-                                    <p:set>
-                                      <p:cBhvr>
-                                        <p:cTn id="13" dur="1" fill="hold">
-                                          <p:stCondLst>
-                                            <p:cond delay="0"/>
-                                          </p:stCondLst>
-                                        </p:cTn>
-                                        <p:tgtEl>
-                                          <p:spTgt spid="25"/>
-                                        </p:tgtEl>
-                                        <p:attrNameLst>
-                                          <p:attrName>style.visibility</p:attrName>
-                                        </p:attrNameLst>
-                                      </p:cBhvr>
-                                      <p:to>
-                                        <p:strVal val="visible"/>
-                                      </p:to>
-                                    </p:set>
-                                    <p:animEffect transition="in" filter="fade">
-                                      <p:cBhvr>
-                                        <p:cTn id="14" dur="1000"/>
-                                        <p:tgtEl>
-                                          <p:spTgt spid="25"/>
-                                        </p:tgtEl>
-                                      </p:cBhvr>
-                                    </p:animEffect>
-                                    <p:anim calcmode="lin" valueType="num">
-                                      <p:cBhvr>
-                                        <p:cTn id="15" dur="1000" fill="hold"/>
-                                        <p:tgtEl>
-                                          <p:spTgt spid="25"/>
-                                        </p:tgtEl>
-                                        <p:attrNameLst>
-                                          <p:attrName>ppt_x</p:attrName>
-                                        </p:attrNameLst>
-                                      </p:cBhvr>
-                                      <p:tavLst>
-                                        <p:tav tm="0">
-                                          <p:val>
-                                            <p:strVal val="#ppt_x"/>
-                                          </p:val>
-                                        </p:tav>
-                                        <p:tav tm="100000">
-                                          <p:val>
-                                            <p:strVal val="#ppt_x"/>
-                                          </p:val>
-                                        </p:tav>
-                                      </p:tavLst>
-                                    </p:anim>
-                                    <p:anim calcmode="lin" valueType="num">
-                                      <p:cBhvr>
-                                        <p:cTn id="16" dur="1000" fill="hold"/>
-                                        <p:tgtEl>
-                                          <p:spTgt spid="25"/>
-                                        </p:tgtEl>
-                                        <p:attrNameLst>
-                                          <p:attrName>ppt_y</p:attrName>
-                                        </p:attrNameLst>
-                                      </p:cBhvr>
-                                      <p:tavLst>
-                                        <p:tav tm="0">
-                                          <p:val>
-                                            <p:strVal val="#ppt_y+.1"/>
-                                          </p:val>
-                                        </p:tav>
-                                        <p:tav tm="100000">
-                                          <p:val>
-                                            <p:strVal val="#ppt_y"/>
-                                          </p:val>
-                                        </p:tav>
-                                      </p:tavLst>
-                                    </p:anim>
-                                  </p:childTnLst>
-                                </p:cTn>
-                              </p:par>
-                            </p:childTnLst>
-                          </p:cTn>
-                        </p:par>
-                      </p:childTnLst>
-                    </p:cTn>
-                  </p:par>
-                  <p:par>
-                    <p:cTn id="17" fill="hold">
-                      <p:stCondLst>
-                        <p:cond delay="indefinite"/>
-                      </p:stCondLst>
-                      <p:childTnLst>
-                        <p:par>
-                          <p:cTn id="18" fill="hold">
-                            <p:stCondLst>
-                              <p:cond delay="0"/>
-                            </p:stCondLst>
-                            <p:childTnLst>
-                              <p:par>
-                                <p:cTn id="19" presetID="47" presetClass="entr" presetSubtype="0" fill="hold" grpId="0" nodeType="clickEffect">
-                                  <p:stCondLst>
-                                    <p:cond delay="0"/>
-                                  </p:stCondLst>
-                                  <p:childTnLst>
-                                    <p:set>
-                                      <p:cBhvr>
-                                        <p:cTn id="20" dur="1" fill="hold">
-                                          <p:stCondLst>
-                                            <p:cond delay="0"/>
-                                          </p:stCondLst>
-                                        </p:cTn>
-                                        <p:tgtEl>
-                                          <p:spTgt spid="17"/>
-                                        </p:tgtEl>
-                                        <p:attrNameLst>
-                                          <p:attrName>style.visibility</p:attrName>
-                                        </p:attrNameLst>
-                                      </p:cBhvr>
-                                      <p:to>
-                                        <p:strVal val="visible"/>
-                                      </p:to>
-                                    </p:set>
-                                    <p:animEffect transition="in" filter="fade">
-                                      <p:cBhvr>
-                                        <p:cTn id="21" dur="500"/>
-                                        <p:tgtEl>
-                                          <p:spTgt spid="17"/>
-                                        </p:tgtEl>
-                                      </p:cBhvr>
-                                    </p:animEffect>
-                                    <p:anim calcmode="lin" valueType="num">
-                                      <p:cBhvr>
-                                        <p:cTn id="22" dur="500" fill="hold"/>
-                                        <p:tgtEl>
-                                          <p:spTgt spid="17"/>
-                                        </p:tgtEl>
-                                        <p:attrNameLst>
-                                          <p:attrName>ppt_x</p:attrName>
-                                        </p:attrNameLst>
-                                      </p:cBhvr>
-                                      <p:tavLst>
-                                        <p:tav tm="0">
-                                          <p:val>
-                                            <p:strVal val="#ppt_x"/>
-                                          </p:val>
-                                        </p:tav>
-                                        <p:tav tm="100000">
-                                          <p:val>
-                                            <p:strVal val="#ppt_x"/>
-                                          </p:val>
-                                        </p:tav>
-                                      </p:tavLst>
-                                    </p:anim>
-                                    <p:anim calcmode="lin" valueType="num">
-                                      <p:cBhvr>
-                                        <p:cTn id="23" dur="500" fill="hold"/>
-                                        <p:tgtEl>
-                                          <p:spTgt spid="17"/>
-                                        </p:tgtEl>
-                                        <p:attrNameLst>
-                                          <p:attrName>ppt_y</p:attrName>
-                                        </p:attrNameLst>
-                                      </p:cBhvr>
-                                      <p:tavLst>
-                                        <p:tav tm="0">
-                                          <p:val>
-                                            <p:strVal val="#ppt_y-.1"/>
-                                          </p:val>
-                                        </p:tav>
-                                        <p:tav tm="100000">
-                                          <p:val>
-                                            <p:strVal val="#ppt_y"/>
-                                          </p:val>
-                                        </p:tav>
-                                      </p:tavLst>
-                                    </p:anim>
-                                  </p:childTnLst>
-                                </p:cTn>
-                              </p:par>
-                              <p:par>
-                                <p:cTn id="24" presetID="47" presetClass="entr" presetSubtype="0" fill="hold" grpId="0" nodeType="withEffect">
-                                  <p:stCondLst>
-                                    <p:cond delay="300"/>
-                                  </p:stCondLst>
-                                  <p:childTnLst>
-                                    <p:set>
-                                      <p:cBhvr>
-                                        <p:cTn id="25" dur="1" fill="hold">
-                                          <p:stCondLst>
-                                            <p:cond delay="0"/>
-                                          </p:stCondLst>
-                                        </p:cTn>
-                                        <p:tgtEl>
-                                          <p:spTgt spid="22"/>
-                                        </p:tgtEl>
-                                        <p:attrNameLst>
-                                          <p:attrName>style.visibility</p:attrName>
-                                        </p:attrNameLst>
-                                      </p:cBhvr>
-                                      <p:to>
-                                        <p:strVal val="visible"/>
-                                      </p:to>
-                                    </p:set>
-                                    <p:animEffect transition="in" filter="fade">
-                                      <p:cBhvr>
-                                        <p:cTn id="26" dur="500"/>
-                                        <p:tgtEl>
-                                          <p:spTgt spid="22"/>
-                                        </p:tgtEl>
-                                      </p:cBhvr>
-                                    </p:animEffect>
-                                    <p:anim calcmode="lin" valueType="num">
-                                      <p:cBhvr>
-                                        <p:cTn id="27" dur="500" fill="hold"/>
-                                        <p:tgtEl>
-                                          <p:spTgt spid="22"/>
-                                        </p:tgtEl>
-                                        <p:attrNameLst>
-                                          <p:attrName>ppt_x</p:attrName>
-                                        </p:attrNameLst>
-                                      </p:cBhvr>
-                                      <p:tavLst>
-                                        <p:tav tm="0">
-                                          <p:val>
-                                            <p:strVal val="#ppt_x"/>
-                                          </p:val>
-                                        </p:tav>
-                                        <p:tav tm="100000">
-                                          <p:val>
-                                            <p:strVal val="#ppt_x"/>
-                                          </p:val>
-                                        </p:tav>
-                                      </p:tavLst>
-                                    </p:anim>
-                                    <p:anim calcmode="lin" valueType="num">
-                                      <p:cBhvr>
-                                        <p:cTn id="28" dur="500" fill="hold"/>
-                                        <p:tgtEl>
-                                          <p:spTgt spid="22"/>
-                                        </p:tgtEl>
-                                        <p:attrNameLst>
-                                          <p:attrName>ppt_y</p:attrName>
-                                        </p:attrNameLst>
-                                      </p:cBhvr>
-                                      <p:tavLst>
-                                        <p:tav tm="0">
-                                          <p:val>
-                                            <p:strVal val="#ppt_y-.1"/>
-                                          </p:val>
-                                        </p:tav>
-                                        <p:tav tm="100000">
-                                          <p:val>
-                                            <p:strVal val="#ppt_y"/>
-                                          </p:val>
-                                        </p:tav>
-                                      </p:tavLst>
-                                    </p:anim>
-                                  </p:childTnLst>
-                                </p:cTn>
-                              </p:par>
-                            </p:childTnLst>
-                          </p:cTn>
-                        </p:par>
-                        <p:par>
-                          <p:cTn id="29" fill="hold">
-                            <p:stCondLst>
-                              <p:cond delay="800"/>
-                            </p:stCondLst>
-                            <p:childTnLst>
-                              <p:par>
-                                <p:cTn id="30" presetID="1" presetClass="entr" presetSubtype="0" fill="hold" grpId="0" nodeType="afterEffect">
-                                  <p:stCondLst>
-                                    <p:cond delay="0"/>
-                                  </p:stCondLst>
-                                  <p:childTnLst>
-                                    <p:set>
-                                      <p:cBhvr>
-                                        <p:cTn id="31" dur="1" fill="hold">
-                                          <p:stCondLst>
-                                            <p:cond delay="0"/>
-                                          </p:stCondLst>
-                                        </p:cTn>
-                                        <p:tgtEl>
-                                          <p:spTgt spid="18"/>
-                                        </p:tgtEl>
-                                        <p:attrNameLst>
-                                          <p:attrName>style.visibility</p:attrName>
-                                        </p:attrNameLst>
-                                      </p:cBhvr>
-                                      <p:to>
-                                        <p:strVal val="visible"/>
-                                      </p:to>
-                                    </p:set>
-                                  </p:childTnLst>
-                                </p:cTn>
-                              </p:par>
-                            </p:childTnLst>
-                          </p:cTn>
-                        </p:par>
-                      </p:childTnLst>
-                    </p:cTn>
-                  </p:par>
-                  <p:par>
-                    <p:cTn id="32" fill="hold">
-                      <p:stCondLst>
-                        <p:cond delay="indefinite"/>
-                      </p:stCondLst>
-                      <p:childTnLst>
-                        <p:par>
-                          <p:cTn id="33" fill="hold">
-                            <p:stCondLst>
-                              <p:cond delay="0"/>
-                            </p:stCondLst>
-                            <p:childTnLst>
-                              <p:par>
-                                <p:cTn id="34" presetID="1" presetClass="entr" presetSubtype="0" fill="hold" grpId="0" nodeType="clickEffect">
-                                  <p:stCondLst>
-                                    <p:cond delay="0"/>
-                                  </p:stCondLst>
-                                  <p:childTnLst>
-                                    <p:set>
-                                      <p:cBhvr>
-                                        <p:cTn id="35" dur="1" fill="hold">
-                                          <p:stCondLst>
-                                            <p:cond delay="0"/>
-                                          </p:stCondLst>
-                                        </p:cTn>
-                                        <p:tgtEl>
-                                          <p:spTgt spid="23"/>
-                                        </p:tgtEl>
-                                        <p:attrNameLst>
-                                          <p:attrName>style.visibility</p:attrName>
-                                        </p:attrNameLst>
-                                      </p:cBhvr>
-                                      <p:to>
-                                        <p:strVal val="visible"/>
-                                      </p:to>
-                                    </p:set>
-                                  </p:childTnLst>
-                                </p:cTn>
-                              </p:par>
-                              <p:par>
-                                <p:cTn id="36" presetID="1" presetClass="entr" presetSubtype="0" fill="hold" grpId="0" nodeType="withEffect">
-                                  <p:stCondLst>
-                                    <p:cond delay="0"/>
-                                  </p:stCondLst>
-                                  <p:childTnLst>
-                                    <p:set>
-                                      <p:cBhvr>
-                                        <p:cTn id="37" dur="1" fill="hold">
-                                          <p:stCondLst>
-                                            <p:cond delay="0"/>
-                                          </p:stCondLst>
-                                        </p:cTn>
-                                        <p:tgtEl>
-                                          <p:spTgt spid="24"/>
-                                        </p:tgtEl>
-                                        <p:attrNameLst>
-                                          <p:attrName>style.visibility</p:attrName>
-                                        </p:attrNameLst>
-                                      </p:cBhvr>
-                                      <p:to>
-                                        <p:strVal val="visible"/>
-                                      </p:to>
-                                    </p:set>
-                                  </p:childTnLst>
-                                </p:cTn>
-                              </p:par>
-                            </p:childTnLst>
-                          </p:cTn>
-                        </p:par>
-                      </p:childTnLst>
-                    </p:cTn>
-                  </p:par>
-                </p:childTnLst>
-              </p:cTn>
-              <p:prevCondLst>
-                <p:cond evt="onPrev" delay="0">
-                  <p:tgtEl>
-                    <p:sldTgt/>
-                  </p:tgtEl>
-                </p:cond>
-              </p:prevCondLst>
-              <p:nextCondLst>
-                <p:cond evt="onNext" delay="0">
-                  <p:tgtEl>
-                    <p:sldTgt/>
-                  </p:tgtEl>
-                </p:cond>
-              </p:nextCondLst>
-            </p:seq>
-          </p:childTnLst>
-        </p:cTn>
-      </p:par>
-    </p:tnLst>
-    <p:bldLst>
-      <p:bldP spid="17" grpId="0" animBg="1"/>
-      <p:bldP spid="22" grpId="0" animBg="1"/>
-      <p:bldP spid="18" grpId="0"/>
-      <p:bldP spid="23" grpId="0"/>
-      <p:bldP spid="24" grpId="0"/>
-    </p:bldLst>
-  </p:timing>
-</p:sld>
-</file>
-
-<file path=ppt/slides/slide11.xml><?xml version="1.0" encoding="utf-8"?>
-<p:sld xmlns:a="http://schemas.openxmlformats.org/drawingml/2006/main" xmlns:r="http://schemas.openxmlformats.org/officeDocument/2006/relationships" xmlns:p="http://schemas.openxmlformats.org/presentationml/2006/main">
-  <p:cSld>
-    <p:spTree>
-      <p:nvGrpSpPr>
-        <p:cNvPr id="1" name=""/>
-        <p:cNvGrpSpPr/>
-        <p:nvPr/>
-      </p:nvGrpSpPr>
-      <p:grpSpPr>
-        <a:xfrm>
-          <a:off x="0" y="0"/>
-          <a:ext cx="0" cy="0"/>
-          <a:chOff x="0" y="0"/>
-          <a:chExt cx="0" cy="0"/>
-        </a:xfrm>
-      </p:grpSpPr>
-      <p:sp>
-        <p:nvSpPr>
-          <p:cNvPr id="2" name="Title 1"/>
-          <p:cNvSpPr>
-            <a:spLocks noGrp="1"/>
-          </p:cNvSpPr>
-          <p:nvPr>
-            <p:ph type="title"/>
-          </p:nvPr>
-        </p:nvSpPr>
-        <p:spPr/>
-        <p:txBody>
-          <a:bodyPr/>
-          <a:lstStyle/>
-          <a:p>
-            <a:r>
-              <a:rPr lang="pt-BR" dirty="0"/>
               <a:t>Exemplo em base 10 </a:t>
             </a:r>
           </a:p>
@@ -11566,7 +9917,7 @@
             <a:fld id="{7FFE5E5C-C80A-4D8D-A711-3102A7BA9258}" type="slidenum">
               <a:rPr lang="pt-BR" smtClean="0"/>
               <a:pPr/>
-              <a:t>11</a:t>
+              <a:t>10</a:t>
             </a:fld>
             <a:endParaRPr lang="pt-BR" dirty="0"/>
           </a:p>
@@ -11796,13 +10147,13 @@
   <p:clrMapOvr>
     <a:masterClrMapping/>
   </p:clrMapOvr>
-  <mc:AlternateContent xmlns:mc="http://schemas.openxmlformats.org/markup-compatibility/2006">
-    <mc:Choice xmlns:p14="http://schemas.microsoft.com/office/powerpoint/2010/main" Requires="p14">
+  <mc:AlternateContent xmlns:mc="http://schemas.openxmlformats.org/markup-compatibility/2006" xmlns:p14="http://schemas.microsoft.com/office/powerpoint/2010/main">
+    <mc:Choice Requires="p14">
       <p:transition spd="slow" p14:dur="1200">
         <p14:prism/>
       </p:transition>
     </mc:Choice>
-    <mc:Fallback>
+    <mc:Fallback xmlns="">
       <p:transition spd="slow">
         <p:fade/>
       </p:transition>
@@ -11811,7 +10162,7 @@
 </p:sld>
 </file>
 
-<file path=ppt/slides/slide12.xml><?xml version="1.0" encoding="utf-8"?>
+<file path=ppt/slides/slide11.xml><?xml version="1.0" encoding="utf-8"?>
 <p:sld xmlns:a="http://schemas.openxmlformats.org/drawingml/2006/main" xmlns:r="http://schemas.openxmlformats.org/officeDocument/2006/relationships" xmlns:p="http://schemas.openxmlformats.org/presentationml/2006/main">
   <p:cSld>
     <p:spTree>
@@ -11972,7 +10323,7 @@
             <a:fld id="{7FFE5E5C-C80A-4D8D-A711-3102A7BA9258}" type="slidenum">
               <a:rPr lang="pt-BR" smtClean="0"/>
               <a:pPr/>
-              <a:t>12</a:t>
+              <a:t>11</a:t>
             </a:fld>
             <a:endParaRPr lang="pt-BR" dirty="0"/>
           </a:p>
@@ -12207,13 +10558,13 @@
   <p:clrMapOvr>
     <a:masterClrMapping/>
   </p:clrMapOvr>
-  <mc:AlternateContent xmlns:mc="http://schemas.openxmlformats.org/markup-compatibility/2006">
-    <mc:Choice xmlns:p14="http://schemas.microsoft.com/office/powerpoint/2010/main" Requires="p14">
+  <mc:AlternateContent xmlns:mc="http://schemas.openxmlformats.org/markup-compatibility/2006" xmlns:p14="http://schemas.microsoft.com/office/powerpoint/2010/main">
+    <mc:Choice Requires="p14">
       <p:transition spd="slow" p14:dur="1200">
         <p14:prism/>
       </p:transition>
     </mc:Choice>
-    <mc:Fallback>
+    <mc:Fallback xmlns="">
       <p:transition spd="slow">
         <p:fade/>
       </p:transition>
@@ -12222,7 +10573,7 @@
 </p:sld>
 </file>
 
-<file path=ppt/slides/slide13.xml><?xml version="1.0" encoding="utf-8"?>
+<file path=ppt/slides/slide12.xml><?xml version="1.0" encoding="utf-8"?>
 <p:sld xmlns:a="http://schemas.openxmlformats.org/drawingml/2006/main" xmlns:r="http://schemas.openxmlformats.org/officeDocument/2006/relationships" xmlns:p="http://schemas.openxmlformats.org/presentationml/2006/main">
   <p:cSld>
     <p:spTree>
@@ -12307,7 +10658,7 @@
               <a:pPr>
                 <a:defRPr/>
               </a:pPr>
-              <a:t>13</a:t>
+              <a:t>12</a:t>
             </a:fld>
             <a:endParaRPr lang="en-US">
               <a:solidFill>
@@ -12364,7 +10715,7 @@
                 </a:spcAft>
                 <a:defRPr/>
               </a:pPr>
-              <a:t>13</a:t>
+              <a:t>12</a:t>
             </a:fld>
             <a:endParaRPr lang="en-US" sz="1100">
               <a:solidFill>
@@ -12383,7 +10734,7 @@
         </p:nvSpPr>
         <p:spPr bwMode="auto">
           <a:xfrm>
-            <a:off x="1143000" y="5410200"/>
+            <a:off x="1143000" y="5542087"/>
             <a:ext cx="6858000" cy="762000"/>
           </a:xfrm>
           <a:prstGeom prst="rect">
@@ -12500,23 +10851,22 @@
       <p:cxnSp>
         <p:nvCxnSpPr>
           <p:cNvPr id="10" name="Straight Arrow Connector 9"/>
-          <p:cNvCxnSpPr/>
+          <p:cNvCxnSpPr>
+            <a:cxnSpLocks/>
+          </p:cNvCxnSpPr>
           <p:nvPr/>
         </p:nvCxnSpPr>
         <p:spPr>
-          <a:xfrm rot="10800000">
-            <a:off x="6096000" y="6019800"/>
-            <a:ext cx="1600200" cy="1588"/>
+          <a:xfrm flipH="1">
+            <a:off x="5712740" y="6162799"/>
+            <a:ext cx="1079500" cy="0"/>
           </a:xfrm>
           <a:prstGeom prst="straightConnector1">
             <a:avLst/>
           </a:prstGeom>
           <a:ln w="38100">
             <a:solidFill>
-              <a:schemeClr val="bg1">
-                <a:lumMod val="85000"/>
-                <a:lumOff val="15000"/>
-              </a:schemeClr>
+              <a:schemeClr val="tx1"/>
             </a:solidFill>
             <a:tailEnd type="arrow"/>
           </a:ln>
@@ -12544,7 +10894,7 @@
         </p:nvSpPr>
         <p:spPr>
           <a:xfrm>
-            <a:off x="2084388" y="2438400"/>
+            <a:off x="2008188" y="2451100"/>
             <a:ext cx="4621212" cy="2730500"/>
           </a:xfrm>
           <a:custGeom>
@@ -13882,8 +12232,8 @@
         </p:nvSpPr>
         <p:spPr>
           <a:xfrm>
-            <a:off x="4707492" y="1690469"/>
-            <a:ext cx="3496708" cy="646331"/>
+            <a:off x="2166924" y="2216261"/>
+            <a:ext cx="613604" cy="369332"/>
           </a:xfrm>
           <a:prstGeom prst="rect">
             <a:avLst/>
@@ -13901,7 +12251,121 @@
                   <a:srgbClr val="FF0000"/>
                 </a:solidFill>
               </a:rPr>
-              <a:t>ORDEM GERANDO CONFUSÃO. SETA NÃO AJUDA.</a:t>
+              <a:t>LSB</a:t>
+            </a:r>
+          </a:p>
+        </p:txBody>
+      </p:sp>
+      <p:sp>
+        <p:nvSpPr>
+          <p:cNvPr id="3" name="Rectangle 2">
+            <a:extLst>
+              <a:ext uri="{FF2B5EF4-FFF2-40B4-BE49-F238E27FC236}">
+                <a16:creationId xmlns:a16="http://schemas.microsoft.com/office/drawing/2014/main" id="{48CFDCC6-E7B7-B59B-6892-C4F2AADAB8E6}"/>
+              </a:ext>
+            </a:extLst>
+          </p:cNvPr>
+          <p:cNvSpPr/>
+          <p:nvPr/>
+        </p:nvSpPr>
+        <p:spPr>
+          <a:xfrm>
+            <a:off x="6407392" y="4651273"/>
+            <a:ext cx="728420" cy="369332"/>
+          </a:xfrm>
+          <a:prstGeom prst="rect">
+            <a:avLst/>
+          </a:prstGeom>
+        </p:spPr>
+        <p:txBody>
+          <a:bodyPr wrap="square">
+            <a:spAutoFit/>
+          </a:bodyPr>
+          <a:lstStyle/>
+          <a:p>
+            <a:r>
+              <a:rPr lang="pt-BR" b="1" dirty="0">
+                <a:solidFill>
+                  <a:srgbClr val="FF0000"/>
+                </a:solidFill>
+              </a:rPr>
+              <a:t>MSB</a:t>
+            </a:r>
+          </a:p>
+        </p:txBody>
+      </p:sp>
+      <p:sp>
+        <p:nvSpPr>
+          <p:cNvPr id="6" name="Rectangle 5">
+            <a:extLst>
+              <a:ext uri="{FF2B5EF4-FFF2-40B4-BE49-F238E27FC236}">
+                <a16:creationId xmlns:a16="http://schemas.microsoft.com/office/drawing/2014/main" id="{9AA8139C-D7DD-50BF-23CC-8BE04A9DAC9F}"/>
+              </a:ext>
+            </a:extLst>
+          </p:cNvPr>
+          <p:cNvSpPr/>
+          <p:nvPr/>
+        </p:nvSpPr>
+        <p:spPr>
+          <a:xfrm>
+            <a:off x="6625392" y="6187153"/>
+            <a:ext cx="613604" cy="369332"/>
+          </a:xfrm>
+          <a:prstGeom prst="rect">
+            <a:avLst/>
+          </a:prstGeom>
+        </p:spPr>
+        <p:txBody>
+          <a:bodyPr wrap="square">
+            <a:spAutoFit/>
+          </a:bodyPr>
+          <a:lstStyle/>
+          <a:p>
+            <a:r>
+              <a:rPr lang="pt-BR" b="1" dirty="0">
+                <a:solidFill>
+                  <a:srgbClr val="FF0000"/>
+                </a:solidFill>
+              </a:rPr>
+              <a:t>LSB</a:t>
+            </a:r>
+          </a:p>
+        </p:txBody>
+      </p:sp>
+      <p:sp>
+        <p:nvSpPr>
+          <p:cNvPr id="8" name="Rectangle 7">
+            <a:extLst>
+              <a:ext uri="{FF2B5EF4-FFF2-40B4-BE49-F238E27FC236}">
+                <a16:creationId xmlns:a16="http://schemas.microsoft.com/office/drawing/2014/main" id="{D02AA94E-B5D5-A4B8-9B77-BE04FC57F046}"/>
+              </a:ext>
+            </a:extLst>
+          </p:cNvPr>
+          <p:cNvSpPr/>
+          <p:nvPr/>
+        </p:nvSpPr>
+        <p:spPr>
+          <a:xfrm>
+            <a:off x="5414370" y="6188199"/>
+            <a:ext cx="728420" cy="369332"/>
+          </a:xfrm>
+          <a:prstGeom prst="rect">
+            <a:avLst/>
+          </a:prstGeom>
+        </p:spPr>
+        <p:txBody>
+          <a:bodyPr wrap="square">
+            <a:spAutoFit/>
+          </a:bodyPr>
+          <a:lstStyle/>
+          <a:p>
+            <a:r>
+              <a:rPr lang="pt-BR" b="1" dirty="0">
+                <a:solidFill>
+                  <a:srgbClr val="FF0000"/>
+                </a:solidFill>
+              </a:rPr>
+              <a:t>MSB</a:t>
             </a:r>
           </a:p>
         </p:txBody>
@@ -13919,13 +12383,13 @@
   <p:clrMapOvr>
     <a:masterClrMapping/>
   </p:clrMapOvr>
-  <mc:AlternateContent xmlns:mc="http://schemas.openxmlformats.org/markup-compatibility/2006">
-    <mc:Choice xmlns:p14="http://schemas.microsoft.com/office/powerpoint/2010/main" Requires="p14">
+  <mc:AlternateContent xmlns:mc="http://schemas.openxmlformats.org/markup-compatibility/2006" xmlns:p14="http://schemas.microsoft.com/office/powerpoint/2010/main">
+    <mc:Choice Requires="p14">
       <p:transition spd="slow" p14:dur="1200">
         <p14:prism/>
       </p:transition>
     </mc:Choice>
-    <mc:Fallback>
+    <mc:Fallback xmlns="">
       <p:transition spd="slow">
         <p:fade/>
       </p:transition>
@@ -14158,15 +12622,185 @@
                                   </p:childTnLst>
                                 </p:cTn>
                               </p:par>
+                            </p:childTnLst>
+                          </p:cTn>
+                        </p:par>
+                      </p:childTnLst>
+                    </p:cTn>
+                  </p:par>
+                  <p:par>
+                    <p:cTn id="23" fill="hold">
+                      <p:stCondLst>
+                        <p:cond delay="indefinite"/>
+                      </p:stCondLst>
+                      <p:childTnLst>
+                        <p:par>
+                          <p:cTn id="24" fill="hold">
+                            <p:stCondLst>
+                              <p:cond delay="0"/>
+                            </p:stCondLst>
+                            <p:childTnLst>
                               <p:par>
-                                <p:cTn id="23" presetID="22" presetClass="entr" presetSubtype="2" fill="hold" nodeType="withEffect">
+                                <p:cTn id="25" presetID="1" presetClass="entr" presetSubtype="0" fill="hold" grpId="0" nodeType="clickEffect">
                                   <p:stCondLst>
                                     <p:cond delay="0"/>
                                   </p:stCondLst>
                                   <p:childTnLst>
                                     <p:set>
                                       <p:cBhvr>
-                                        <p:cTn id="24" dur="1" fill="hold">
+                                        <p:cTn id="26" dur="1" fill="hold">
+                                          <p:stCondLst>
+                                            <p:cond delay="0"/>
+                                          </p:stCondLst>
+                                        </p:cTn>
+                                        <p:tgtEl>
+                                          <p:spTgt spid="2"/>
+                                        </p:tgtEl>
+                                        <p:attrNameLst>
+                                          <p:attrName>style.visibility</p:attrName>
+                                        </p:attrNameLst>
+                                      </p:cBhvr>
+                                      <p:to>
+                                        <p:strVal val="visible"/>
+                                      </p:to>
+                                    </p:set>
+                                  </p:childTnLst>
+                                </p:cTn>
+                              </p:par>
+                              <p:par>
+                                <p:cTn id="27" presetID="1" presetClass="entr" presetSubtype="0" fill="hold" grpId="0" nodeType="withEffect">
+                                  <p:stCondLst>
+                                    <p:cond delay="0"/>
+                                  </p:stCondLst>
+                                  <p:childTnLst>
+                                    <p:set>
+                                      <p:cBhvr>
+                                        <p:cTn id="28" dur="1" fill="hold">
+                                          <p:stCondLst>
+                                            <p:cond delay="0"/>
+                                          </p:stCondLst>
+                                        </p:cTn>
+                                        <p:tgtEl>
+                                          <p:spTgt spid="3"/>
+                                        </p:tgtEl>
+                                        <p:attrNameLst>
+                                          <p:attrName>style.visibility</p:attrName>
+                                        </p:attrNameLst>
+                                      </p:cBhvr>
+                                      <p:to>
+                                        <p:strVal val="visible"/>
+                                      </p:to>
+                                    </p:set>
+                                  </p:childTnLst>
+                                </p:cTn>
+                              </p:par>
+                            </p:childTnLst>
+                          </p:cTn>
+                        </p:par>
+                      </p:childTnLst>
+                    </p:cTn>
+                  </p:par>
+                  <p:par>
+                    <p:cTn id="29" fill="hold">
+                      <p:stCondLst>
+                        <p:cond delay="indefinite"/>
+                      </p:stCondLst>
+                      <p:childTnLst>
+                        <p:par>
+                          <p:cTn id="30" fill="hold">
+                            <p:stCondLst>
+                              <p:cond delay="0"/>
+                            </p:stCondLst>
+                            <p:childTnLst>
+                              <p:par>
+                                <p:cTn id="31" presetID="1" presetClass="entr" presetSubtype="0" fill="hold" grpId="0" nodeType="clickEffect">
+                                  <p:stCondLst>
+                                    <p:cond delay="0"/>
+                                  </p:stCondLst>
+                                  <p:childTnLst>
+                                    <p:set>
+                                      <p:cBhvr>
+                                        <p:cTn id="32" dur="1" fill="hold">
+                                          <p:stCondLst>
+                                            <p:cond delay="0"/>
+                                          </p:stCondLst>
+                                        </p:cTn>
+                                        <p:tgtEl>
+                                          <p:spTgt spid="7"/>
+                                        </p:tgtEl>
+                                        <p:attrNameLst>
+                                          <p:attrName>style.visibility</p:attrName>
+                                        </p:attrNameLst>
+                                      </p:cBhvr>
+                                      <p:to>
+                                        <p:strVal val="visible"/>
+                                      </p:to>
+                                    </p:set>
+                                  </p:childTnLst>
+                                </p:cTn>
+                              </p:par>
+                            </p:childTnLst>
+                          </p:cTn>
+                        </p:par>
+                      </p:childTnLst>
+                    </p:cTn>
+                  </p:par>
+                  <p:par>
+                    <p:cTn id="33" fill="hold">
+                      <p:stCondLst>
+                        <p:cond delay="indefinite"/>
+                      </p:stCondLst>
+                      <p:childTnLst>
+                        <p:par>
+                          <p:cTn id="34" fill="hold">
+                            <p:stCondLst>
+                              <p:cond delay="0"/>
+                            </p:stCondLst>
+                            <p:childTnLst>
+                              <p:par>
+                                <p:cTn id="35" presetID="22" presetClass="entr" presetSubtype="8" fill="hold" nodeType="clickEffect">
+                                  <p:stCondLst>
+                                    <p:cond delay="0"/>
+                                  </p:stCondLst>
+                                  <p:childTnLst>
+                                    <p:set>
+                                      <p:cBhvr>
+                                        <p:cTn id="36" dur="1" fill="hold">
+                                          <p:stCondLst>
+                                            <p:cond delay="0"/>
+                                          </p:stCondLst>
+                                        </p:cTn>
+                                        <p:tgtEl>
+                                          <p:spTgt spid="14"/>
+                                        </p:tgtEl>
+                                        <p:attrNameLst>
+                                          <p:attrName>style.visibility</p:attrName>
+                                        </p:attrNameLst>
+                                      </p:cBhvr>
+                                      <p:to>
+                                        <p:strVal val="visible"/>
+                                      </p:to>
+                                    </p:set>
+                                    <p:animEffect transition="in" filter="wipe(left)">
+                                      <p:cBhvr>
+                                        <p:cTn id="37" dur="500"/>
+                                        <p:tgtEl>
+                                          <p:spTgt spid="14"/>
+                                        </p:tgtEl>
+                                      </p:cBhvr>
+                                    </p:animEffect>
+                                  </p:childTnLst>
+                                </p:cTn>
+                              </p:par>
+                              <p:par>
+                                <p:cTn id="38" presetID="22" presetClass="entr" presetSubtype="2" fill="hold" nodeType="withEffect">
+                                  <p:stCondLst>
+                                    <p:cond delay="0"/>
+                                  </p:stCondLst>
+                                  <p:childTnLst>
+                                    <p:set>
+                                      <p:cBhvr>
+                                        <p:cTn id="39" dur="1" fill="hold">
                                           <p:stCondLst>
                                             <p:cond delay="0"/>
                                           </p:stCondLst>
@@ -14184,7 +12818,7 @@
                                     </p:set>
                                     <p:animEffect transition="in" filter="wipe(right)">
                                       <p:cBhvr>
-                                        <p:cTn id="25" dur="500"/>
+                                        <p:cTn id="40" dur="500"/>
                                         <p:tgtEl>
                                           <p:spTgt spid="10"/>
                                         </p:tgtEl>
@@ -14193,39 +12827,21 @@
                                   </p:childTnLst>
                                 </p:cTn>
                               </p:par>
-                            </p:childTnLst>
-                          </p:cTn>
-                        </p:par>
-                      </p:childTnLst>
-                    </p:cTn>
-                  </p:par>
-                  <p:par>
-                    <p:cTn id="26" fill="hold">
-                      <p:stCondLst>
-                        <p:cond delay="indefinite"/>
-                      </p:stCondLst>
-                      <p:childTnLst>
-                        <p:par>
-                          <p:cTn id="27" fill="hold">
-                            <p:stCondLst>
-                              <p:cond delay="0"/>
-                            </p:stCondLst>
-                            <p:childTnLst>
                               <p:par>
-                                <p:cTn id="28" presetID="22" presetClass="entr" presetSubtype="8" fill="hold" nodeType="clickEffect">
+                                <p:cTn id="41" presetID="1" presetClass="entr" presetSubtype="0" fill="hold" grpId="0" nodeType="withEffect">
                                   <p:stCondLst>
                                     <p:cond delay="0"/>
                                   </p:stCondLst>
                                   <p:childTnLst>
                                     <p:set>
                                       <p:cBhvr>
-                                        <p:cTn id="29" dur="1" fill="hold">
+                                        <p:cTn id="42" dur="1" fill="hold">
                                           <p:stCondLst>
                                             <p:cond delay="0"/>
                                           </p:stCondLst>
                                         </p:cTn>
                                         <p:tgtEl>
-                                          <p:spTgt spid="14"/>
+                                          <p:spTgt spid="6"/>
                                         </p:tgtEl>
                                         <p:attrNameLst>
                                           <p:attrName>style.visibility</p:attrName>
@@ -14235,50 +12851,24 @@
                                         <p:strVal val="visible"/>
                                       </p:to>
                                     </p:set>
-                                    <p:animEffect transition="in" filter="wipe(left)">
-                                      <p:cBhvr>
-                                        <p:cTn id="30" dur="500"/>
-                                        <p:tgtEl>
-                                          <p:spTgt spid="14"/>
-                                        </p:tgtEl>
-                                      </p:cBhvr>
-                                    </p:animEffect>
                                   </p:childTnLst>
                                 </p:cTn>
                               </p:par>
-                            </p:childTnLst>
-                          </p:cTn>
-                        </p:par>
-                      </p:childTnLst>
-                    </p:cTn>
-                  </p:par>
-                  <p:par>
-                    <p:cTn id="31" fill="hold">
-                      <p:stCondLst>
-                        <p:cond delay="indefinite"/>
-                      </p:stCondLst>
-                      <p:childTnLst>
-                        <p:par>
-                          <p:cTn id="32" fill="hold">
-                            <p:stCondLst>
-                              <p:cond delay="0"/>
-                            </p:stCondLst>
-                            <p:childTnLst>
                               <p:par>
-                                <p:cTn id="33" presetID="1" presetClass="entr" presetSubtype="0" fill="hold" grpId="0" nodeType="clickEffect">
+                                <p:cTn id="43" presetID="1" presetClass="entr" presetSubtype="0" fill="hold" grpId="0" nodeType="withEffect">
                                   <p:stCondLst>
                                     <p:cond delay="0"/>
                                   </p:stCondLst>
                                   <p:childTnLst>
                                     <p:set>
                                       <p:cBhvr>
-                                        <p:cTn id="34" dur="1" fill="hold">
+                                        <p:cTn id="44" dur="1" fill="hold">
                                           <p:stCondLst>
                                             <p:cond delay="0"/>
                                           </p:stCondLst>
                                         </p:cTn>
                                         <p:tgtEl>
-                                          <p:spTgt spid="7"/>
+                                          <p:spTgt spid="8"/>
                                         </p:tgtEl>
                                         <p:attrNameLst>
                                           <p:attrName>style.visibility</p:attrName>
@@ -14320,6 +12910,1114 @@
     </p:tnLst>
     <p:bldLst>
       <p:bldP spid="7" grpId="0"/>
+      <p:bldP spid="2" grpId="0"/>
+      <p:bldP spid="3" grpId="0"/>
+      <p:bldP spid="6" grpId="0"/>
+      <p:bldP spid="8" grpId="0"/>
+    </p:bldLst>
+  </p:timing>
+</p:sld>
+</file>
+
+<file path=ppt/slides/slide13.xml><?xml version="1.0" encoding="utf-8"?>
+<p:sld xmlns:a="http://schemas.openxmlformats.org/drawingml/2006/main" xmlns:r="http://schemas.openxmlformats.org/officeDocument/2006/relationships" xmlns:p="http://schemas.openxmlformats.org/presentationml/2006/main">
+  <p:cSld>
+    <p:spTree>
+      <p:nvGrpSpPr>
+        <p:cNvPr id="1" name="">
+          <a:extLst>
+            <a:ext uri="{FF2B5EF4-FFF2-40B4-BE49-F238E27FC236}">
+              <a16:creationId xmlns:a16="http://schemas.microsoft.com/office/drawing/2014/main" id="{97866EAA-394B-3484-312A-772731553839}"/>
+            </a:ext>
+          </a:extLst>
+        </p:cNvPr>
+        <p:cNvGrpSpPr/>
+        <p:nvPr/>
+      </p:nvGrpSpPr>
+      <p:grpSpPr>
+        <a:xfrm>
+          <a:off x="0" y="0"/>
+          <a:ext cx="0" cy="0"/>
+          <a:chOff x="0" y="0"/>
+          <a:chExt cx="0" cy="0"/>
+        </a:xfrm>
+      </p:grpSpPr>
+      <p:sp>
+        <p:nvSpPr>
+          <p:cNvPr id="15" name="Title 14">
+            <a:extLst>
+              <a:ext uri="{FF2B5EF4-FFF2-40B4-BE49-F238E27FC236}">
+                <a16:creationId xmlns:a16="http://schemas.microsoft.com/office/drawing/2014/main" id="{C7DB811E-72EC-0908-BC87-C731158DF2AA}"/>
+              </a:ext>
+            </a:extLst>
+          </p:cNvPr>
+          <p:cNvSpPr>
+            <a:spLocks noGrp="1"/>
+          </p:cNvSpPr>
+          <p:nvPr>
+            <p:ph type="title"/>
+          </p:nvPr>
+        </p:nvSpPr>
+        <p:spPr/>
+        <p:txBody>
+          <a:bodyPr/>
+          <a:lstStyle/>
+          <a:p>
+            <a:r>
+              <a:rPr lang="pt-BR" dirty="0"/>
+              <a:t>Conversão para Números Binários</a:t>
+            </a:r>
+          </a:p>
+        </p:txBody>
+      </p:sp>
+      <p:sp>
+        <p:nvSpPr>
+          <p:cNvPr id="17" name="Text Placeholder 16">
+            <a:extLst>
+              <a:ext uri="{FF2B5EF4-FFF2-40B4-BE49-F238E27FC236}">
+                <a16:creationId xmlns:a16="http://schemas.microsoft.com/office/drawing/2014/main" id="{2F5091D3-1D89-7F86-1AFD-6323AFD315CF}"/>
+              </a:ext>
+            </a:extLst>
+          </p:cNvPr>
+          <p:cNvSpPr>
+            <a:spLocks noGrp="1"/>
+          </p:cNvSpPr>
+          <p:nvPr>
+            <p:ph type="body" sz="quarter" idx="13"/>
+          </p:nvPr>
+        </p:nvSpPr>
+        <p:spPr/>
+        <p:txBody>
+          <a:bodyPr/>
+          <a:lstStyle/>
+          <a:p>
+            <a:endParaRPr lang="pt-BR"/>
+          </a:p>
+        </p:txBody>
+      </p:sp>
+      <p:sp>
+        <p:nvSpPr>
+          <p:cNvPr id="11" name="Slide Number Placeholder 10">
+            <a:extLst>
+              <a:ext uri="{FF2B5EF4-FFF2-40B4-BE49-F238E27FC236}">
+                <a16:creationId xmlns:a16="http://schemas.microsoft.com/office/drawing/2014/main" id="{7C0048DB-8DA2-0ECB-05EC-4D2A5047C000}"/>
+              </a:ext>
+            </a:extLst>
+          </p:cNvPr>
+          <p:cNvSpPr>
+            <a:spLocks noGrp="1"/>
+          </p:cNvSpPr>
+          <p:nvPr>
+            <p:ph type="sldNum" sz="quarter" idx="4"/>
+          </p:nvPr>
+        </p:nvSpPr>
+        <p:spPr/>
+        <p:txBody>
+          <a:bodyPr/>
+          <a:lstStyle/>
+          <a:p>
+            <a:pPr>
+              <a:defRPr/>
+            </a:pPr>
+            <a:fld id="{C77AF6B4-4C9D-4A5A-8706-A2C5B906F96F}" type="slidenum">
+              <a:rPr lang="en-US" smtClean="0">
+                <a:solidFill>
+                  <a:srgbClr val="000000"/>
+                </a:solidFill>
+              </a:rPr>
+              <a:pPr>
+                <a:defRPr/>
+              </a:pPr>
+              <a:t>13</a:t>
+            </a:fld>
+            <a:endParaRPr lang="en-US">
+              <a:solidFill>
+                <a:srgbClr val="000000"/>
+              </a:solidFill>
+            </a:endParaRPr>
+          </a:p>
+        </p:txBody>
+      </p:sp>
+      <p:sp>
+        <p:nvSpPr>
+          <p:cNvPr id="5" name="Slide Number Placeholder 4">
+            <a:extLst>
+              <a:ext uri="{FF2B5EF4-FFF2-40B4-BE49-F238E27FC236}">
+                <a16:creationId xmlns:a16="http://schemas.microsoft.com/office/drawing/2014/main" id="{7217085B-3E96-1F14-58DB-BDF141034A39}"/>
+              </a:ext>
+            </a:extLst>
+          </p:cNvPr>
+          <p:cNvSpPr txBox="1">
+            <a:spLocks noGrp="1"/>
+          </p:cNvSpPr>
+          <p:nvPr/>
+        </p:nvSpPr>
+        <p:spPr>
+          <a:xfrm>
+            <a:off x="8204200" y="6477000"/>
+            <a:ext cx="733425" cy="274638"/>
+          </a:xfrm>
+          <a:prstGeom prst="rect">
+            <a:avLst/>
+          </a:prstGeom>
+          <a:noFill/>
+        </p:spPr>
+        <p:txBody>
+          <a:bodyPr bIns="0" anchor="b"/>
+          <a:lstStyle/>
+          <a:p>
+            <a:pPr algn="r" fontAlgn="auto">
+              <a:spcBef>
+                <a:spcPts val="0"/>
+              </a:spcBef>
+              <a:spcAft>
+                <a:spcPts val="0"/>
+              </a:spcAft>
+              <a:defRPr/>
+            </a:pPr>
+            <a:fld id="{86709ACC-2A15-4D3D-8928-9ED6FAC32EE0}" type="slidenum">
+              <a:rPr lang="en-US" sz="1100">
+                <a:solidFill>
+                  <a:srgbClr val="000000"/>
+                </a:solidFill>
+                <a:latin typeface="+mn-lt"/>
+              </a:rPr>
+              <a:pPr algn="r" fontAlgn="auto">
+                <a:spcBef>
+                  <a:spcPts val="0"/>
+                </a:spcBef>
+                <a:spcAft>
+                  <a:spcPts val="0"/>
+                </a:spcAft>
+                <a:defRPr/>
+              </a:pPr>
+              <a:t>13</a:t>
+            </a:fld>
+            <a:endParaRPr lang="en-US" sz="1100">
+              <a:solidFill>
+                <a:srgbClr val="000000"/>
+              </a:solidFill>
+              <a:latin typeface="+mn-lt"/>
+            </a:endParaRPr>
+          </a:p>
+        </p:txBody>
+      </p:sp>
+      <p:sp>
+        <p:nvSpPr>
+          <p:cNvPr id="7" name="TextBox 6">
+            <a:extLst>
+              <a:ext uri="{FF2B5EF4-FFF2-40B4-BE49-F238E27FC236}">
+                <a16:creationId xmlns:a16="http://schemas.microsoft.com/office/drawing/2014/main" id="{CAE7C23C-F1F9-D368-A11B-0B6AD11324AD}"/>
+              </a:ext>
+            </a:extLst>
+          </p:cNvPr>
+          <p:cNvSpPr txBox="1"/>
+          <p:nvPr/>
+        </p:nvSpPr>
+        <p:spPr bwMode="auto">
+          <a:xfrm>
+            <a:off x="1143000" y="4932487"/>
+            <a:ext cx="6858000" cy="762000"/>
+          </a:xfrm>
+          <a:prstGeom prst="rect">
+            <a:avLst/>
+          </a:prstGeom>
+          <a:noFill/>
+          <a:ln>
+            <a:noFill/>
+            <a:headEnd/>
+            <a:tailEnd/>
+          </a:ln>
+        </p:spPr>
+        <p:style>
+          <a:lnRef idx="2">
+            <a:schemeClr val="dk1">
+              <a:shade val="50000"/>
+            </a:schemeClr>
+          </a:lnRef>
+          <a:fillRef idx="1">
+            <a:schemeClr val="dk1"/>
+          </a:fillRef>
+          <a:effectRef idx="0">
+            <a:schemeClr val="dk1"/>
+          </a:effectRef>
+          <a:fontRef idx="minor">
+            <a:schemeClr val="lt1"/>
+          </a:fontRef>
+        </p:style>
+        <p:txBody>
+          <a:bodyPr anchor="ctr"/>
+          <a:lstStyle/>
+          <a:p>
+            <a:pPr marL="457200" indent="-457200" algn="ctr" fontAlgn="auto">
+              <a:spcBef>
+                <a:spcPts val="0"/>
+              </a:spcBef>
+              <a:spcAft>
+                <a:spcPts val="0"/>
+              </a:spcAft>
+              <a:buAutoNum type="arabicPlain" startAt="64"/>
+              <a:defRPr/>
+            </a:pPr>
+            <a:r>
+              <a:rPr lang="en-US" sz="3200" dirty="0">
+                <a:solidFill>
+                  <a:srgbClr val="000000"/>
+                </a:solidFill>
+              </a:rPr>
+              <a:t>  32    16    8    4    2    1</a:t>
+            </a:r>
+          </a:p>
+        </p:txBody>
+      </p:sp>
+      <p:sp>
+        <p:nvSpPr>
+          <p:cNvPr id="6" name="TextBox 5">
+            <a:extLst>
+              <a:ext uri="{FF2B5EF4-FFF2-40B4-BE49-F238E27FC236}">
+                <a16:creationId xmlns:a16="http://schemas.microsoft.com/office/drawing/2014/main" id="{07D91EC8-9F5C-769A-ABA3-8668B0EE41B3}"/>
+              </a:ext>
+            </a:extLst>
+          </p:cNvPr>
+          <p:cNvSpPr txBox="1"/>
+          <p:nvPr/>
+        </p:nvSpPr>
+        <p:spPr>
+          <a:xfrm>
+            <a:off x="582230" y="2080272"/>
+            <a:ext cx="641516" cy="523220"/>
+          </a:xfrm>
+          <a:prstGeom prst="rect">
+            <a:avLst/>
+          </a:prstGeom>
+          <a:noFill/>
+        </p:spPr>
+        <p:txBody>
+          <a:bodyPr wrap="square">
+            <a:spAutoFit/>
+          </a:bodyPr>
+          <a:lstStyle/>
+          <a:p>
+            <a:r>
+              <a:rPr lang="en-US" sz="2800" dirty="0">
+                <a:solidFill>
+                  <a:sysClr val="windowText" lastClr="000000"/>
+                </a:solidFill>
+              </a:rPr>
+              <a:t>37</a:t>
+            </a:r>
+          </a:p>
+        </p:txBody>
+      </p:sp>
+      <p:sp>
+        <p:nvSpPr>
+          <p:cNvPr id="8" name="Rectangle 7">
+            <a:extLst>
+              <a:ext uri="{FF2B5EF4-FFF2-40B4-BE49-F238E27FC236}">
+                <a16:creationId xmlns:a16="http://schemas.microsoft.com/office/drawing/2014/main" id="{076C0F8F-278F-CC8B-8FEB-4736D96B2381}"/>
+              </a:ext>
+            </a:extLst>
+          </p:cNvPr>
+          <p:cNvSpPr/>
+          <p:nvPr/>
+        </p:nvSpPr>
+        <p:spPr>
+          <a:xfrm>
+            <a:off x="3098800" y="5040437"/>
+            <a:ext cx="508000" cy="546100"/>
+          </a:xfrm>
+          <a:prstGeom prst="rect">
+            <a:avLst/>
+          </a:prstGeom>
+          <a:noFill/>
+          <a:ln>
+            <a:solidFill>
+              <a:srgbClr val="C00026"/>
+            </a:solidFill>
+          </a:ln>
+        </p:spPr>
+        <p:style>
+          <a:lnRef idx="2">
+            <a:schemeClr val="accent1">
+              <a:shade val="15000"/>
+            </a:schemeClr>
+          </a:lnRef>
+          <a:fillRef idx="1">
+            <a:schemeClr val="accent1"/>
+          </a:fillRef>
+          <a:effectRef idx="0">
+            <a:schemeClr val="accent1"/>
+          </a:effectRef>
+          <a:fontRef idx="minor">
+            <a:schemeClr val="lt1"/>
+          </a:fontRef>
+        </p:style>
+        <p:txBody>
+          <a:bodyPr rtlCol="0" anchor="ctr"/>
+          <a:lstStyle/>
+          <a:p>
+            <a:pPr algn="ctr"/>
+            <a:endParaRPr lang="en-US"/>
+          </a:p>
+        </p:txBody>
+      </p:sp>
+      <p:sp>
+        <p:nvSpPr>
+          <p:cNvPr id="9" name="TextBox 8">
+            <a:extLst>
+              <a:ext uri="{FF2B5EF4-FFF2-40B4-BE49-F238E27FC236}">
+                <a16:creationId xmlns:a16="http://schemas.microsoft.com/office/drawing/2014/main" id="{0C4A803C-2A2B-4C7C-9974-F47B4A182A0E}"/>
+              </a:ext>
+            </a:extLst>
+          </p:cNvPr>
+          <p:cNvSpPr txBox="1"/>
+          <p:nvPr/>
+        </p:nvSpPr>
+        <p:spPr>
+          <a:xfrm>
+            <a:off x="582230" y="2635332"/>
+            <a:ext cx="1983170" cy="523220"/>
+          </a:xfrm>
+          <a:prstGeom prst="rect">
+            <a:avLst/>
+          </a:prstGeom>
+          <a:noFill/>
+        </p:spPr>
+        <p:txBody>
+          <a:bodyPr wrap="square">
+            <a:spAutoFit/>
+          </a:bodyPr>
+          <a:lstStyle/>
+          <a:p>
+            <a:r>
+              <a:rPr lang="en-US" sz="2800" dirty="0">
+                <a:solidFill>
+                  <a:sysClr val="windowText" lastClr="000000"/>
+                </a:solidFill>
+              </a:rPr>
+              <a:t>37 – 32 = 5 </a:t>
+            </a:r>
+          </a:p>
+        </p:txBody>
+      </p:sp>
+      <p:sp>
+        <p:nvSpPr>
+          <p:cNvPr id="12" name="TextBox 11">
+            <a:extLst>
+              <a:ext uri="{FF2B5EF4-FFF2-40B4-BE49-F238E27FC236}">
+                <a16:creationId xmlns:a16="http://schemas.microsoft.com/office/drawing/2014/main" id="{5B2C8051-E6BF-0162-316C-22E47066F7F6}"/>
+              </a:ext>
+            </a:extLst>
+          </p:cNvPr>
+          <p:cNvSpPr txBox="1"/>
+          <p:nvPr/>
+        </p:nvSpPr>
+        <p:spPr>
+          <a:xfrm>
+            <a:off x="582230" y="3190392"/>
+            <a:ext cx="1983170" cy="523220"/>
+          </a:xfrm>
+          <a:prstGeom prst="rect">
+            <a:avLst/>
+          </a:prstGeom>
+          <a:noFill/>
+        </p:spPr>
+        <p:txBody>
+          <a:bodyPr wrap="square">
+            <a:spAutoFit/>
+          </a:bodyPr>
+          <a:lstStyle/>
+          <a:p>
+            <a:r>
+              <a:rPr lang="en-US" sz="2800" dirty="0">
+                <a:solidFill>
+                  <a:sysClr val="windowText" lastClr="000000"/>
+                </a:solidFill>
+              </a:rPr>
+              <a:t>5 – 4 = 1 </a:t>
+            </a:r>
+          </a:p>
+        </p:txBody>
+      </p:sp>
+      <p:sp>
+        <p:nvSpPr>
+          <p:cNvPr id="13" name="TextBox 12">
+            <a:extLst>
+              <a:ext uri="{FF2B5EF4-FFF2-40B4-BE49-F238E27FC236}">
+                <a16:creationId xmlns:a16="http://schemas.microsoft.com/office/drawing/2014/main" id="{785200A3-5E16-3727-C1F4-71D4DC0840E9}"/>
+              </a:ext>
+            </a:extLst>
+          </p:cNvPr>
+          <p:cNvSpPr txBox="1"/>
+          <p:nvPr/>
+        </p:nvSpPr>
+        <p:spPr>
+          <a:xfrm>
+            <a:off x="582230" y="3745452"/>
+            <a:ext cx="1983170" cy="523220"/>
+          </a:xfrm>
+          <a:prstGeom prst="rect">
+            <a:avLst/>
+          </a:prstGeom>
+          <a:noFill/>
+        </p:spPr>
+        <p:txBody>
+          <a:bodyPr wrap="square">
+            <a:spAutoFit/>
+          </a:bodyPr>
+          <a:lstStyle/>
+          <a:p>
+            <a:r>
+              <a:rPr lang="en-US" sz="2800" dirty="0">
+                <a:solidFill>
+                  <a:sysClr val="windowText" lastClr="000000"/>
+                </a:solidFill>
+              </a:rPr>
+              <a:t>1 – 1 = 0 </a:t>
+            </a:r>
+          </a:p>
+        </p:txBody>
+      </p:sp>
+      <p:sp>
+        <p:nvSpPr>
+          <p:cNvPr id="16" name="Rectangle 15">
+            <a:extLst>
+              <a:ext uri="{FF2B5EF4-FFF2-40B4-BE49-F238E27FC236}">
+                <a16:creationId xmlns:a16="http://schemas.microsoft.com/office/drawing/2014/main" id="{C2D4B035-ED35-A04B-C29E-7B1F04D36F08}"/>
+              </a:ext>
+            </a:extLst>
+          </p:cNvPr>
+          <p:cNvSpPr/>
+          <p:nvPr/>
+        </p:nvSpPr>
+        <p:spPr>
+          <a:xfrm>
+            <a:off x="5143500" y="5040437"/>
+            <a:ext cx="508000" cy="546100"/>
+          </a:xfrm>
+          <a:prstGeom prst="rect">
+            <a:avLst/>
+          </a:prstGeom>
+          <a:noFill/>
+          <a:ln>
+            <a:solidFill>
+              <a:srgbClr val="C00026"/>
+            </a:solidFill>
+          </a:ln>
+        </p:spPr>
+        <p:style>
+          <a:lnRef idx="2">
+            <a:schemeClr val="accent1">
+              <a:shade val="15000"/>
+            </a:schemeClr>
+          </a:lnRef>
+          <a:fillRef idx="1">
+            <a:schemeClr val="accent1"/>
+          </a:fillRef>
+          <a:effectRef idx="0">
+            <a:schemeClr val="accent1"/>
+          </a:effectRef>
+          <a:fontRef idx="minor">
+            <a:schemeClr val="lt1"/>
+          </a:fontRef>
+        </p:style>
+        <p:txBody>
+          <a:bodyPr rtlCol="0" anchor="ctr"/>
+          <a:lstStyle/>
+          <a:p>
+            <a:pPr algn="ctr"/>
+            <a:endParaRPr lang="en-US"/>
+          </a:p>
+        </p:txBody>
+      </p:sp>
+      <p:sp>
+        <p:nvSpPr>
+          <p:cNvPr id="23" name="Rectangle 22">
+            <a:extLst>
+              <a:ext uri="{FF2B5EF4-FFF2-40B4-BE49-F238E27FC236}">
+                <a16:creationId xmlns:a16="http://schemas.microsoft.com/office/drawing/2014/main" id="{EABFBD7A-F78F-E8BD-9D1F-88A6114BA795}"/>
+              </a:ext>
+            </a:extLst>
+          </p:cNvPr>
+          <p:cNvSpPr/>
+          <p:nvPr/>
+        </p:nvSpPr>
+        <p:spPr>
+          <a:xfrm>
+            <a:off x="6273800" y="5040437"/>
+            <a:ext cx="508000" cy="546100"/>
+          </a:xfrm>
+          <a:prstGeom prst="rect">
+            <a:avLst/>
+          </a:prstGeom>
+          <a:noFill/>
+          <a:ln>
+            <a:solidFill>
+              <a:srgbClr val="C00026"/>
+            </a:solidFill>
+          </a:ln>
+        </p:spPr>
+        <p:style>
+          <a:lnRef idx="2">
+            <a:schemeClr val="accent1">
+              <a:shade val="15000"/>
+            </a:schemeClr>
+          </a:lnRef>
+          <a:fillRef idx="1">
+            <a:schemeClr val="accent1"/>
+          </a:fillRef>
+          <a:effectRef idx="0">
+            <a:schemeClr val="accent1"/>
+          </a:effectRef>
+          <a:fontRef idx="minor">
+            <a:schemeClr val="lt1"/>
+          </a:fontRef>
+        </p:style>
+        <p:txBody>
+          <a:bodyPr rtlCol="0" anchor="ctr"/>
+          <a:lstStyle/>
+          <a:p>
+            <a:pPr algn="ctr"/>
+            <a:endParaRPr lang="en-US"/>
+          </a:p>
+        </p:txBody>
+      </p:sp>
+      <p:sp>
+        <p:nvSpPr>
+          <p:cNvPr id="24" name="TextBox 23">
+            <a:extLst>
+              <a:ext uri="{FF2B5EF4-FFF2-40B4-BE49-F238E27FC236}">
+                <a16:creationId xmlns:a16="http://schemas.microsoft.com/office/drawing/2014/main" id="{21C7D260-C3D9-04A8-B795-4FF7B2B2916C}"/>
+              </a:ext>
+            </a:extLst>
+          </p:cNvPr>
+          <p:cNvSpPr txBox="1"/>
+          <p:nvPr/>
+        </p:nvSpPr>
+        <p:spPr bwMode="auto">
+          <a:xfrm>
+            <a:off x="1223746" y="5715000"/>
+            <a:ext cx="6858000" cy="762000"/>
+          </a:xfrm>
+          <a:prstGeom prst="rect">
+            <a:avLst/>
+          </a:prstGeom>
+          <a:noFill/>
+          <a:ln>
+            <a:noFill/>
+            <a:headEnd/>
+            <a:tailEnd/>
+          </a:ln>
+        </p:spPr>
+        <p:style>
+          <a:lnRef idx="2">
+            <a:schemeClr val="dk1">
+              <a:shade val="50000"/>
+            </a:schemeClr>
+          </a:lnRef>
+          <a:fillRef idx="1">
+            <a:schemeClr val="dk1"/>
+          </a:fillRef>
+          <a:effectRef idx="0">
+            <a:schemeClr val="dk1"/>
+          </a:effectRef>
+          <a:fontRef idx="minor">
+            <a:schemeClr val="lt1"/>
+          </a:fontRef>
+        </p:style>
+        <p:txBody>
+          <a:bodyPr anchor="ctr"/>
+          <a:lstStyle/>
+          <a:p>
+            <a:pPr algn="ctr" fontAlgn="auto">
+              <a:spcBef>
+                <a:spcPts val="0"/>
+              </a:spcBef>
+              <a:spcAft>
+                <a:spcPts val="0"/>
+              </a:spcAft>
+              <a:defRPr/>
+            </a:pPr>
+            <a:r>
+              <a:rPr lang="en-US" sz="3200" b="1" dirty="0">
+                <a:solidFill>
+                  <a:srgbClr val="00B0F0"/>
+                </a:solidFill>
+              </a:rPr>
+              <a:t>0     1     0     0     1     0     1</a:t>
+            </a:r>
+          </a:p>
+        </p:txBody>
+      </p:sp>
+    </p:spTree>
+    <p:custDataLst>
+      <p:tags r:id="rId1"/>
+    </p:custDataLst>
+    <p:extLst>
+      <p:ext uri="{BB962C8B-B14F-4D97-AF65-F5344CB8AC3E}">
+        <p14:creationId xmlns:p14="http://schemas.microsoft.com/office/powerpoint/2010/main" val="1713318116"/>
+      </p:ext>
+    </p:extLst>
+  </p:cSld>
+  <p:clrMapOvr>
+    <a:masterClrMapping/>
+  </p:clrMapOvr>
+  <mc:AlternateContent xmlns:mc="http://schemas.openxmlformats.org/markup-compatibility/2006" xmlns:p14="http://schemas.microsoft.com/office/powerpoint/2010/main">
+    <mc:Choice Requires="p14">
+      <p:transition spd="slow" p14:dur="1200">
+        <p14:prism/>
+      </p:transition>
+    </mc:Choice>
+    <mc:Fallback xmlns="">
+      <p:transition spd="slow">
+        <p:fade/>
+      </p:transition>
+    </mc:Fallback>
+  </mc:AlternateContent>
+  <p:timing>
+    <p:tnLst>
+      <p:par>
+        <p:cTn id="1" dur="indefinite" restart="never" nodeType="tmRoot">
+          <p:childTnLst>
+            <p:seq concurrent="1" nextAc="seek">
+              <p:cTn id="2" dur="indefinite" nodeType="mainSeq">
+                <p:childTnLst>
+                  <p:par>
+                    <p:cTn id="3" fill="hold">
+                      <p:stCondLst>
+                        <p:cond delay="indefinite"/>
+                      </p:stCondLst>
+                      <p:childTnLst>
+                        <p:par>
+                          <p:cTn id="4" fill="hold">
+                            <p:stCondLst>
+                              <p:cond delay="0"/>
+                            </p:stCondLst>
+                            <p:childTnLst>
+                              <p:par>
+                                <p:cTn id="5" presetID="2" presetClass="entr" presetSubtype="4" fill="hold" grpId="0" nodeType="clickEffect">
+                                  <p:stCondLst>
+                                    <p:cond delay="0"/>
+                                  </p:stCondLst>
+                                  <p:childTnLst>
+                                    <p:set>
+                                      <p:cBhvr>
+                                        <p:cTn id="6" dur="1" fill="hold">
+                                          <p:stCondLst>
+                                            <p:cond delay="0"/>
+                                          </p:stCondLst>
+                                        </p:cTn>
+                                        <p:tgtEl>
+                                          <p:spTgt spid="7"/>
+                                        </p:tgtEl>
+                                        <p:attrNameLst>
+                                          <p:attrName>style.visibility</p:attrName>
+                                        </p:attrNameLst>
+                                      </p:cBhvr>
+                                      <p:to>
+                                        <p:strVal val="visible"/>
+                                      </p:to>
+                                    </p:set>
+                                    <p:anim calcmode="lin" valueType="num">
+                                      <p:cBhvr additive="base">
+                                        <p:cTn id="7" dur="500" fill="hold"/>
+                                        <p:tgtEl>
+                                          <p:spTgt spid="7"/>
+                                        </p:tgtEl>
+                                        <p:attrNameLst>
+                                          <p:attrName>ppt_x</p:attrName>
+                                        </p:attrNameLst>
+                                      </p:cBhvr>
+                                      <p:tavLst>
+                                        <p:tav tm="0">
+                                          <p:val>
+                                            <p:strVal val="#ppt_x"/>
+                                          </p:val>
+                                        </p:tav>
+                                        <p:tav tm="100000">
+                                          <p:val>
+                                            <p:strVal val="#ppt_x"/>
+                                          </p:val>
+                                        </p:tav>
+                                      </p:tavLst>
+                                    </p:anim>
+                                    <p:anim calcmode="lin" valueType="num">
+                                      <p:cBhvr additive="base">
+                                        <p:cTn id="8" dur="500" fill="hold"/>
+                                        <p:tgtEl>
+                                          <p:spTgt spid="7"/>
+                                        </p:tgtEl>
+                                        <p:attrNameLst>
+                                          <p:attrName>ppt_y</p:attrName>
+                                        </p:attrNameLst>
+                                      </p:cBhvr>
+                                      <p:tavLst>
+                                        <p:tav tm="0">
+                                          <p:val>
+                                            <p:strVal val="1+#ppt_h/2"/>
+                                          </p:val>
+                                        </p:tav>
+                                        <p:tav tm="100000">
+                                          <p:val>
+                                            <p:strVal val="#ppt_y"/>
+                                          </p:val>
+                                        </p:tav>
+                                      </p:tavLst>
+                                    </p:anim>
+                                  </p:childTnLst>
+                                </p:cTn>
+                              </p:par>
+                            </p:childTnLst>
+                          </p:cTn>
+                        </p:par>
+                      </p:childTnLst>
+                    </p:cTn>
+                  </p:par>
+                  <p:par>
+                    <p:cTn id="9" fill="hold">
+                      <p:stCondLst>
+                        <p:cond delay="indefinite"/>
+                      </p:stCondLst>
+                      <p:childTnLst>
+                        <p:par>
+                          <p:cTn id="10" fill="hold">
+                            <p:stCondLst>
+                              <p:cond delay="0"/>
+                            </p:stCondLst>
+                            <p:childTnLst>
+                              <p:par>
+                                <p:cTn id="11" presetID="1" presetClass="entr" presetSubtype="0" fill="hold" grpId="0" nodeType="clickEffect">
+                                  <p:stCondLst>
+                                    <p:cond delay="0"/>
+                                  </p:stCondLst>
+                                  <p:childTnLst>
+                                    <p:set>
+                                      <p:cBhvr>
+                                        <p:cTn id="12" dur="1" fill="hold">
+                                          <p:stCondLst>
+                                            <p:cond delay="0"/>
+                                          </p:stCondLst>
+                                        </p:cTn>
+                                        <p:tgtEl>
+                                          <p:spTgt spid="8"/>
+                                        </p:tgtEl>
+                                        <p:attrNameLst>
+                                          <p:attrName>style.visibility</p:attrName>
+                                        </p:attrNameLst>
+                                      </p:cBhvr>
+                                      <p:to>
+                                        <p:strVal val="visible"/>
+                                      </p:to>
+                                    </p:set>
+                                  </p:childTnLst>
+                                </p:cTn>
+                              </p:par>
+                            </p:childTnLst>
+                          </p:cTn>
+                        </p:par>
+                      </p:childTnLst>
+                    </p:cTn>
+                  </p:par>
+                  <p:par>
+                    <p:cTn id="13" fill="hold">
+                      <p:stCondLst>
+                        <p:cond delay="indefinite"/>
+                      </p:stCondLst>
+                      <p:childTnLst>
+                        <p:par>
+                          <p:cTn id="14" fill="hold">
+                            <p:stCondLst>
+                              <p:cond delay="0"/>
+                            </p:stCondLst>
+                            <p:childTnLst>
+                              <p:par>
+                                <p:cTn id="15" presetID="1" presetClass="entr" presetSubtype="0" fill="hold" grpId="0" nodeType="clickEffect">
+                                  <p:stCondLst>
+                                    <p:cond delay="0"/>
+                                  </p:stCondLst>
+                                  <p:childTnLst>
+                                    <p:set>
+                                      <p:cBhvr>
+                                        <p:cTn id="16" dur="1" fill="hold">
+                                          <p:stCondLst>
+                                            <p:cond delay="0"/>
+                                          </p:stCondLst>
+                                        </p:cTn>
+                                        <p:tgtEl>
+                                          <p:spTgt spid="9"/>
+                                        </p:tgtEl>
+                                        <p:attrNameLst>
+                                          <p:attrName>style.visibility</p:attrName>
+                                        </p:attrNameLst>
+                                      </p:cBhvr>
+                                      <p:to>
+                                        <p:strVal val="visible"/>
+                                      </p:to>
+                                    </p:set>
+                                  </p:childTnLst>
+                                </p:cTn>
+                              </p:par>
+                            </p:childTnLst>
+                          </p:cTn>
+                        </p:par>
+                      </p:childTnLst>
+                    </p:cTn>
+                  </p:par>
+                  <p:par>
+                    <p:cTn id="17" fill="hold">
+                      <p:stCondLst>
+                        <p:cond delay="indefinite"/>
+                      </p:stCondLst>
+                      <p:childTnLst>
+                        <p:par>
+                          <p:cTn id="18" fill="hold">
+                            <p:stCondLst>
+                              <p:cond delay="0"/>
+                            </p:stCondLst>
+                            <p:childTnLst>
+                              <p:par>
+                                <p:cTn id="19" presetID="1" presetClass="entr" presetSubtype="0" fill="hold" grpId="0" nodeType="clickEffect">
+                                  <p:stCondLst>
+                                    <p:cond delay="0"/>
+                                  </p:stCondLst>
+                                  <p:childTnLst>
+                                    <p:set>
+                                      <p:cBhvr>
+                                        <p:cTn id="20" dur="1" fill="hold">
+                                          <p:stCondLst>
+                                            <p:cond delay="0"/>
+                                          </p:stCondLst>
+                                        </p:cTn>
+                                        <p:tgtEl>
+                                          <p:spTgt spid="16"/>
+                                        </p:tgtEl>
+                                        <p:attrNameLst>
+                                          <p:attrName>style.visibility</p:attrName>
+                                        </p:attrNameLst>
+                                      </p:cBhvr>
+                                      <p:to>
+                                        <p:strVal val="visible"/>
+                                      </p:to>
+                                    </p:set>
+                                  </p:childTnLst>
+                                </p:cTn>
+                              </p:par>
+                            </p:childTnLst>
+                          </p:cTn>
+                        </p:par>
+                      </p:childTnLst>
+                    </p:cTn>
+                  </p:par>
+                  <p:par>
+                    <p:cTn id="21" fill="hold">
+                      <p:stCondLst>
+                        <p:cond delay="indefinite"/>
+                      </p:stCondLst>
+                      <p:childTnLst>
+                        <p:par>
+                          <p:cTn id="22" fill="hold">
+                            <p:stCondLst>
+                              <p:cond delay="0"/>
+                            </p:stCondLst>
+                            <p:childTnLst>
+                              <p:par>
+                                <p:cTn id="23" presetID="1" presetClass="entr" presetSubtype="0" fill="hold" grpId="0" nodeType="clickEffect">
+                                  <p:stCondLst>
+                                    <p:cond delay="0"/>
+                                  </p:stCondLst>
+                                  <p:childTnLst>
+                                    <p:set>
+                                      <p:cBhvr>
+                                        <p:cTn id="24" dur="1" fill="hold">
+                                          <p:stCondLst>
+                                            <p:cond delay="0"/>
+                                          </p:stCondLst>
+                                        </p:cTn>
+                                        <p:tgtEl>
+                                          <p:spTgt spid="12"/>
+                                        </p:tgtEl>
+                                        <p:attrNameLst>
+                                          <p:attrName>style.visibility</p:attrName>
+                                        </p:attrNameLst>
+                                      </p:cBhvr>
+                                      <p:to>
+                                        <p:strVal val="visible"/>
+                                      </p:to>
+                                    </p:set>
+                                  </p:childTnLst>
+                                </p:cTn>
+                              </p:par>
+                            </p:childTnLst>
+                          </p:cTn>
+                        </p:par>
+                      </p:childTnLst>
+                    </p:cTn>
+                  </p:par>
+                  <p:par>
+                    <p:cTn id="25" fill="hold">
+                      <p:stCondLst>
+                        <p:cond delay="indefinite"/>
+                      </p:stCondLst>
+                      <p:childTnLst>
+                        <p:par>
+                          <p:cTn id="26" fill="hold">
+                            <p:stCondLst>
+                              <p:cond delay="0"/>
+                            </p:stCondLst>
+                            <p:childTnLst>
+                              <p:par>
+                                <p:cTn id="27" presetID="1" presetClass="entr" presetSubtype="0" fill="hold" grpId="0" nodeType="clickEffect">
+                                  <p:stCondLst>
+                                    <p:cond delay="0"/>
+                                  </p:stCondLst>
+                                  <p:childTnLst>
+                                    <p:set>
+                                      <p:cBhvr>
+                                        <p:cTn id="28" dur="1" fill="hold">
+                                          <p:stCondLst>
+                                            <p:cond delay="0"/>
+                                          </p:stCondLst>
+                                        </p:cTn>
+                                        <p:tgtEl>
+                                          <p:spTgt spid="23"/>
+                                        </p:tgtEl>
+                                        <p:attrNameLst>
+                                          <p:attrName>style.visibility</p:attrName>
+                                        </p:attrNameLst>
+                                      </p:cBhvr>
+                                      <p:to>
+                                        <p:strVal val="visible"/>
+                                      </p:to>
+                                    </p:set>
+                                  </p:childTnLst>
+                                </p:cTn>
+                              </p:par>
+                            </p:childTnLst>
+                          </p:cTn>
+                        </p:par>
+                      </p:childTnLst>
+                    </p:cTn>
+                  </p:par>
+                  <p:par>
+                    <p:cTn id="29" fill="hold">
+                      <p:stCondLst>
+                        <p:cond delay="indefinite"/>
+                      </p:stCondLst>
+                      <p:childTnLst>
+                        <p:par>
+                          <p:cTn id="30" fill="hold">
+                            <p:stCondLst>
+                              <p:cond delay="0"/>
+                            </p:stCondLst>
+                            <p:childTnLst>
+                              <p:par>
+                                <p:cTn id="31" presetID="1" presetClass="entr" presetSubtype="0" fill="hold" grpId="0" nodeType="clickEffect">
+                                  <p:stCondLst>
+                                    <p:cond delay="0"/>
+                                  </p:stCondLst>
+                                  <p:childTnLst>
+                                    <p:set>
+                                      <p:cBhvr>
+                                        <p:cTn id="32" dur="1" fill="hold">
+                                          <p:stCondLst>
+                                            <p:cond delay="0"/>
+                                          </p:stCondLst>
+                                        </p:cTn>
+                                        <p:tgtEl>
+                                          <p:spTgt spid="13"/>
+                                        </p:tgtEl>
+                                        <p:attrNameLst>
+                                          <p:attrName>style.visibility</p:attrName>
+                                        </p:attrNameLst>
+                                      </p:cBhvr>
+                                      <p:to>
+                                        <p:strVal val="visible"/>
+                                      </p:to>
+                                    </p:set>
+                                  </p:childTnLst>
+                                </p:cTn>
+                              </p:par>
+                            </p:childTnLst>
+                          </p:cTn>
+                        </p:par>
+                      </p:childTnLst>
+                    </p:cTn>
+                  </p:par>
+                  <p:par>
+                    <p:cTn id="33" fill="hold">
+                      <p:stCondLst>
+                        <p:cond delay="indefinite"/>
+                      </p:stCondLst>
+                      <p:childTnLst>
+                        <p:par>
+                          <p:cTn id="34" fill="hold">
+                            <p:stCondLst>
+                              <p:cond delay="0"/>
+                            </p:stCondLst>
+                            <p:childTnLst>
+                              <p:par>
+                                <p:cTn id="35" presetID="1" presetClass="entr" presetSubtype="0" fill="hold" grpId="0" nodeType="clickEffect">
+                                  <p:stCondLst>
+                                    <p:cond delay="0"/>
+                                  </p:stCondLst>
+                                  <p:childTnLst>
+                                    <p:set>
+                                      <p:cBhvr>
+                                        <p:cTn id="36" dur="1" fill="hold">
+                                          <p:stCondLst>
+                                            <p:cond delay="0"/>
+                                          </p:stCondLst>
+                                        </p:cTn>
+                                        <p:tgtEl>
+                                          <p:spTgt spid="24"/>
+                                        </p:tgtEl>
+                                        <p:attrNameLst>
+                                          <p:attrName>style.visibility</p:attrName>
+                                        </p:attrNameLst>
+                                      </p:cBhvr>
+                                      <p:to>
+                                        <p:strVal val="visible"/>
+                                      </p:to>
+                                    </p:set>
+                                  </p:childTnLst>
+                                </p:cTn>
+                              </p:par>
+                            </p:childTnLst>
+                          </p:cTn>
+                        </p:par>
+                      </p:childTnLst>
+                    </p:cTn>
+                  </p:par>
+                </p:childTnLst>
+              </p:cTn>
+              <p:prevCondLst>
+                <p:cond evt="onPrev" delay="0">
+                  <p:tgtEl>
+                    <p:sldTgt/>
+                  </p:tgtEl>
+                </p:cond>
+              </p:prevCondLst>
+              <p:nextCondLst>
+                <p:cond evt="onNext" delay="0">
+                  <p:tgtEl>
+                    <p:sldTgt/>
+                  </p:tgtEl>
+                </p:cond>
+              </p:nextCondLst>
+            </p:seq>
+          </p:childTnLst>
+        </p:cTn>
+      </p:par>
+    </p:tnLst>
+    <p:bldLst>
+      <p:bldP spid="7" grpId="0"/>
+      <p:bldP spid="8" grpId="0" animBg="1"/>
+      <p:bldP spid="9" grpId="0"/>
+      <p:bldP spid="12" grpId="0"/>
+      <p:bldP spid="13" grpId="0"/>
+      <p:bldP spid="16" grpId="0" animBg="1"/>
+      <p:bldP spid="23" grpId="0" animBg="1"/>
+      <p:bldP spid="24" grpId="0"/>
     </p:bldLst>
   </p:timing>
 </p:sld>
@@ -15278,13 +14976,13 @@
   <p:clrMapOvr>
     <a:masterClrMapping/>
   </p:clrMapOvr>
-  <mc:AlternateContent xmlns:mc="http://schemas.openxmlformats.org/markup-compatibility/2006">
-    <mc:Choice xmlns:p14="http://schemas.microsoft.com/office/powerpoint/2010/main" Requires="p14">
+  <mc:AlternateContent xmlns:mc="http://schemas.openxmlformats.org/markup-compatibility/2006" xmlns:p14="http://schemas.microsoft.com/office/powerpoint/2010/main">
+    <mc:Choice Requires="p14">
       <p:transition spd="slow" p14:dur="1200">
         <p14:prism/>
       </p:transition>
     </mc:Choice>
-    <mc:Fallback>
+    <mc:Fallback xmlns="">
       <p:transition spd="slow">
         <p:fade/>
       </p:transition>
@@ -15345,7 +15043,7 @@
         <p:spPr>
           <a:xfrm>
             <a:off x="657225" y="1485900"/>
-            <a:ext cx="8029575" cy="716226"/>
+            <a:ext cx="8229600" cy="716226"/>
           </a:xfrm>
         </p:spPr>
         <p:txBody>
@@ -15353,9 +15051,10 @@
           <a:lstStyle/>
           <a:p>
             <a:r>
-              <a:rPr lang="pt-BR" dirty="0"/>
-              <a:t>Fazer a operação em números binários é exatamente igual a números decimais.</a:t>
-            </a:r>
+              <a:rPr lang="en-BR" dirty="0"/>
+              <a:t>Fazer operações com números binários é análogo a fazer operações com números decimais.</a:t>
+            </a:r>
+            <a:endParaRPr lang="pt-BR" dirty="0"/>
           </a:p>
         </p:txBody>
       </p:sp>
@@ -18532,10 +18231,10 @@
         </p:nvGrpSpPr>
         <p:grpSpPr>
           <a:xfrm>
-            <a:off x="5417381" y="2319700"/>
-            <a:ext cx="867057" cy="490922"/>
-            <a:chOff x="5755181" y="2319700"/>
-            <a:chExt cx="867057" cy="490922"/>
+            <a:off x="5199790" y="2319700"/>
+            <a:ext cx="1098160" cy="490922"/>
+            <a:chOff x="5537590" y="2319700"/>
+            <a:chExt cx="1098160" cy="490922"/>
           </a:xfrm>
         </p:grpSpPr>
         <p:sp>
@@ -18546,8 +18245,8 @@
           </p:nvSpPr>
           <p:spPr>
             <a:xfrm>
-              <a:off x="5755181" y="2319700"/>
-              <a:ext cx="679449" cy="477054"/>
+              <a:off x="5537590" y="2319700"/>
+              <a:ext cx="897040" cy="461665"/>
             </a:xfrm>
             <a:prstGeom prst="rect">
               <a:avLst/>
@@ -18562,7 +18261,7 @@
               <a:pPr algn="r"/>
               <a:r>
                 <a:rPr lang="en-US" dirty="0"/>
-                <a:t>carry</a:t>
+                <a:t>carry-in</a:t>
               </a:r>
               <a:endParaRPr lang="en-US" sz="600" dirty="0"/>
             </a:p>
@@ -18583,8 +18282,8 @@
           </p:nvCxnSpPr>
           <p:spPr>
             <a:xfrm>
-              <a:off x="6434630" y="2558227"/>
-              <a:ext cx="187608" cy="252395"/>
+              <a:off x="6434630" y="2550533"/>
+              <a:ext cx="201120" cy="260089"/>
             </a:xfrm>
             <a:prstGeom prst="curvedConnector2">
               <a:avLst/>
@@ -18621,10 +18320,10 @@
         </p:nvGrpSpPr>
         <p:grpSpPr>
           <a:xfrm>
-            <a:off x="3718422" y="4682725"/>
-            <a:ext cx="1357502" cy="573428"/>
-            <a:chOff x="5399007" y="2207937"/>
-            <a:chExt cx="1357502" cy="573428"/>
+            <a:off x="3711131" y="4682725"/>
+            <a:ext cx="1364793" cy="573428"/>
+            <a:chOff x="5391716" y="2207937"/>
+            <a:chExt cx="1364793" cy="573428"/>
           </a:xfrm>
         </p:grpSpPr>
         <p:sp>
@@ -18635,8 +18334,8 @@
           </p:nvSpPr>
           <p:spPr>
             <a:xfrm>
-              <a:off x="5399007" y="2319700"/>
-              <a:ext cx="1035623" cy="461665"/>
+              <a:off x="5391716" y="2319700"/>
+              <a:ext cx="1042914" cy="461665"/>
             </a:xfrm>
             <a:prstGeom prst="rect">
               <a:avLst/>
@@ -18651,7 +18350,7 @@
               <a:pPr algn="r"/>
               <a:r>
                 <a:rPr lang="en-US" dirty="0"/>
-                <a:t>overflow</a:t>
+                <a:t>carry-out</a:t>
               </a:r>
               <a:endParaRPr lang="en-US" sz="600" dirty="0"/>
             </a:p>
@@ -18773,7 +18472,7 @@
         <p:spPr>
           <a:xfrm>
             <a:off x="809625" y="5488643"/>
-            <a:ext cx="8029575" cy="716226"/>
+            <a:ext cx="8029575" cy="1101830"/>
           </a:xfrm>
           <a:prstGeom prst="rect">
             <a:avLst/>
@@ -18923,23 +18622,67 @@
           <a:p>
             <a:r>
               <a:rPr lang="pt-BR" dirty="0"/>
-              <a:t>Para o correto cálculo da soma binária, tanto o </a:t>
+              <a:t>Para o correto cálculo da soma binária, os </a:t>
             </a:r>
             <a:r>
               <a:rPr lang="pt-BR" i="1" dirty="0" err="1"/>
+              <a:t>carries</a:t>
+            </a:r>
+            <a:r>
+              <a:rPr lang="pt-BR" dirty="0"/>
+              <a:t> (vai um) precisariam ser tratados. O </a:t>
+            </a:r>
+            <a:r>
+              <a:rPr lang="pt-BR" dirty="0" err="1"/>
               <a:t>carry</a:t>
             </a:r>
             <a:r>
               <a:rPr lang="pt-BR" dirty="0"/>
-              <a:t> (vai um) quando o </a:t>
-            </a:r>
-            <a:r>
-              <a:rPr lang="pt-BR" i="1" dirty="0"/>
-              <a:t>overflow</a:t>
-            </a:r>
-            <a:r>
-              <a:rPr lang="pt-BR" dirty="0"/>
-              <a:t> precisariam ser tratados.</a:t>
+              <a:t>-out </a:t>
+            </a:r>
+            <a:r>
+              <a:rPr lang="en-BR" dirty="0"/>
+              <a:t>indica que a soma unsigned excedeu a faixa representável e também precisa ser tratado.</a:t>
+            </a:r>
+            <a:endParaRPr lang="pt-BR" dirty="0"/>
+          </a:p>
+        </p:txBody>
+      </p:sp>
+      <p:sp>
+        <p:nvSpPr>
+          <p:cNvPr id="8" name="TextBox 7">
+            <a:extLst>
+              <a:ext uri="{FF2B5EF4-FFF2-40B4-BE49-F238E27FC236}">
+                <a16:creationId xmlns:a16="http://schemas.microsoft.com/office/drawing/2014/main" id="{66406EDF-FC4A-DEEE-D11D-6DD3782B0071}"/>
+              </a:ext>
+            </a:extLst>
+          </p:cNvPr>
+          <p:cNvSpPr txBox="1"/>
+          <p:nvPr/>
+        </p:nvSpPr>
+        <p:spPr>
+          <a:xfrm>
+            <a:off x="5646714" y="4843651"/>
+            <a:ext cx="1929508" cy="276999"/>
+          </a:xfrm>
+          <a:prstGeom prst="rect">
+            <a:avLst/>
+          </a:prstGeom>
+          <a:noFill/>
+        </p:spPr>
+        <p:txBody>
+          <a:bodyPr wrap="square">
+            <a:spAutoFit/>
+          </a:bodyPr>
+          <a:lstStyle/>
+          <a:p>
+            <a:r>
+              <a:rPr lang="pt-BR" sz="1200" dirty="0">
+                <a:solidFill>
+                  <a:srgbClr val="FF0000"/>
+                </a:solidFill>
+              </a:rPr>
+              <a:t>Limitando o número a 4 bits</a:t>
             </a:r>
           </a:p>
         </p:txBody>
@@ -18957,13 +18700,13 @@
   <p:clrMapOvr>
     <a:masterClrMapping/>
   </p:clrMapOvr>
-  <mc:AlternateContent xmlns:mc="http://schemas.openxmlformats.org/markup-compatibility/2006">
-    <mc:Choice xmlns:p14="http://schemas.microsoft.com/office/powerpoint/2010/main" Requires="p14">
+  <mc:AlternateContent xmlns:mc="http://schemas.openxmlformats.org/markup-compatibility/2006" xmlns:p14="http://schemas.microsoft.com/office/powerpoint/2010/main">
+    <mc:Choice Requires="p14">
       <p:transition spd="slow" p14:dur="1200">
         <p14:prism/>
       </p:transition>
     </mc:Choice>
-    <mc:Fallback>
+    <mc:Fallback xmlns="">
       <p:transition spd="slow">
         <p:fade/>
       </p:transition>
@@ -20137,7 +19880,7 @@
                             </p:stCondLst>
                             <p:childTnLst>
                               <p:par>
-                                <p:cTn id="93" presetID="9" presetClass="entr" presetSubtype="0" fill="hold" nodeType="clickEffect">
+                                <p:cTn id="93" presetID="1" presetClass="entr" presetSubtype="0" fill="hold" grpId="0" nodeType="clickEffect">
                                   <p:stCondLst>
                                     <p:cond delay="0"/>
                                   </p:stCondLst>
@@ -20145,6 +19888,51 @@
                                     <p:set>
                                       <p:cBhvr>
                                         <p:cTn id="94" dur="1" fill="hold">
+                                          <p:stCondLst>
+                                            <p:cond delay="0"/>
+                                          </p:stCondLst>
+                                        </p:cTn>
+                                        <p:tgtEl>
+                                          <p:spTgt spid="8"/>
+                                        </p:tgtEl>
+                                        <p:attrNameLst>
+                                          <p:attrName>style.visibility</p:attrName>
+                                        </p:attrNameLst>
+                                      </p:cBhvr>
+                                      <p:to>
+                                        <p:strVal val="visible"/>
+                                      </p:to>
+                                    </p:set>
+                                  </p:childTnLst>
+                                </p:cTn>
+                              </p:par>
+                            </p:childTnLst>
+                          </p:cTn>
+                        </p:par>
+                      </p:childTnLst>
+                    </p:cTn>
+                  </p:par>
+                  <p:par>
+                    <p:cTn id="95" fill="hold">
+                      <p:stCondLst>
+                        <p:cond delay="indefinite"/>
+                      </p:stCondLst>
+                      <p:childTnLst>
+                        <p:par>
+                          <p:cTn id="96" fill="hold">
+                            <p:stCondLst>
+                              <p:cond delay="0"/>
+                            </p:stCondLst>
+                            <p:childTnLst>
+                              <p:par>
+                                <p:cTn id="97" presetID="9" presetClass="entr" presetSubtype="0" fill="hold" nodeType="clickEffect">
+                                  <p:stCondLst>
+                                    <p:cond delay="0"/>
+                                  </p:stCondLst>
+                                  <p:childTnLst>
+                                    <p:set>
+                                      <p:cBhvr>
+                                        <p:cTn id="98" dur="1" fill="hold">
                                           <p:stCondLst>
                                             <p:cond delay="0"/>
                                           </p:stCondLst>
@@ -20162,7 +19950,7 @@
                                     </p:set>
                                     <p:animEffect transition="in" filter="dissolve">
                                       <p:cBhvr>
-                                        <p:cTn id="95" dur="500"/>
+                                        <p:cTn id="99" dur="500"/>
                                         <p:tgtEl>
                                           <p:spTgt spid="35"/>
                                         </p:tgtEl>
@@ -20178,26 +19966,26 @@
                     </p:cTn>
                   </p:par>
                   <p:par>
-                    <p:cTn id="96" fill="hold">
+                    <p:cTn id="100" fill="hold">
                       <p:stCondLst>
                         <p:cond delay="indefinite"/>
                       </p:stCondLst>
                       <p:childTnLst>
                         <p:par>
-                          <p:cTn id="97" fill="hold">
+                          <p:cTn id="101" fill="hold">
                             <p:stCondLst>
                               <p:cond delay="0"/>
                             </p:stCondLst>
                             <p:childTnLst>
                               <p:par>
-                                <p:cTn id="98" presetID="30" presetClass="entr" presetSubtype="0" fill="hold" nodeType="clickEffect">
+                                <p:cTn id="102" presetID="30" presetClass="entr" presetSubtype="0" fill="hold" nodeType="clickEffect">
                                   <p:stCondLst>
                                     <p:cond delay="0"/>
                                   </p:stCondLst>
                                   <p:childTnLst>
                                     <p:set>
                                       <p:cBhvr>
-                                        <p:cTn id="99" dur="1" fill="hold">
+                                        <p:cTn id="103" dur="1" fill="hold">
                                           <p:stCondLst>
                                             <p:cond delay="0"/>
                                           </p:stCondLst>
@@ -20215,7 +20003,7 @@
                                     </p:set>
                                     <p:animEffect transition="in" filter="fade">
                                       <p:cBhvr>
-                                        <p:cTn id="100" dur="800" decel="100000"/>
+                                        <p:cTn id="104" dur="800" decel="100000"/>
                                         <p:tgtEl>
                                           <p:spTgt spid="47"/>
                                         </p:tgtEl>
@@ -20223,7 +20011,7 @@
                                     </p:animEffect>
                                     <p:anim calcmode="lin" valueType="num">
                                       <p:cBhvr>
-                                        <p:cTn id="101" dur="800" decel="100000" fill="hold"/>
+                                        <p:cTn id="105" dur="800" decel="100000" fill="hold"/>
                                         <p:tgtEl>
                                           <p:spTgt spid="47"/>
                                         </p:tgtEl>
@@ -20246,7 +20034,7 @@
                                     </p:anim>
                                     <p:anim calcmode="lin" valueType="num">
                                       <p:cBhvr>
-                                        <p:cTn id="102" dur="800" decel="100000" fill="hold"/>
+                                        <p:cTn id="106" dur="800" decel="100000" fill="hold"/>
                                         <p:tgtEl>
                                           <p:spTgt spid="47"/>
                                         </p:tgtEl>
@@ -20269,7 +20057,7 @@
                                     </p:anim>
                                     <p:anim calcmode="lin" valueType="num">
                                       <p:cBhvr>
-                                        <p:cTn id="103" dur="800" decel="100000" fill="hold"/>
+                                        <p:cTn id="107" dur="800" decel="100000" fill="hold"/>
                                         <p:tgtEl>
                                           <p:spTgt spid="47"/>
                                         </p:tgtEl>
@@ -20292,7 +20080,7 @@
                                     </p:anim>
                                     <p:anim calcmode="lin" valueType="num">
                                       <p:cBhvr>
-                                        <p:cTn id="104" dur="200" accel="100000" fill="hold">
+                                        <p:cTn id="108" dur="200" accel="100000" fill="hold">
                                           <p:stCondLst>
                                             <p:cond delay="800"/>
                                           </p:stCondLst>
@@ -20319,7 +20107,7 @@
                                     </p:anim>
                                     <p:anim calcmode="lin" valueType="num">
                                       <p:cBhvr>
-                                        <p:cTn id="105" dur="200" accel="100000" fill="hold">
+                                        <p:cTn id="109" dur="200" accel="100000" fill="hold">
                                           <p:stCondLst>
                                             <p:cond delay="800"/>
                                           </p:stCondLst>
@@ -20354,26 +20142,26 @@
                     </p:cTn>
                   </p:par>
                   <p:par>
-                    <p:cTn id="106" fill="hold">
+                    <p:cTn id="110" fill="hold">
                       <p:stCondLst>
                         <p:cond delay="indefinite"/>
                       </p:stCondLst>
                       <p:childTnLst>
                         <p:par>
-                          <p:cTn id="107" fill="hold">
+                          <p:cTn id="111" fill="hold">
                             <p:stCondLst>
                               <p:cond delay="0"/>
                             </p:stCondLst>
                             <p:childTnLst>
                               <p:par>
-                                <p:cTn id="108" presetID="1" presetClass="entr" presetSubtype="0" fill="hold" grpId="0" nodeType="clickEffect">
+                                <p:cTn id="112" presetID="1" presetClass="entr" presetSubtype="0" fill="hold" grpId="0" nodeType="clickEffect">
                                   <p:stCondLst>
                                     <p:cond delay="0"/>
                                   </p:stCondLst>
                                   <p:childTnLst>
                                     <p:set>
                                       <p:cBhvr>
-                                        <p:cTn id="109" dur="1" fill="hold">
+                                        <p:cTn id="113" dur="1" fill="hold">
                                           <p:stCondLst>
                                             <p:cond delay="0"/>
                                           </p:stCondLst>
@@ -20421,6 +20209,7 @@
     </p:tnLst>
     <p:bldLst>
       <p:bldP spid="48" grpId="0"/>
+      <p:bldP spid="8" grpId="0"/>
     </p:bldLst>
   </p:timing>
 </p:sld>
@@ -20475,27 +20264,41 @@
             <p:ph idx="1"/>
           </p:nvPr>
         </p:nvSpPr>
-        <p:spPr/>
+        <p:spPr>
+          <a:xfrm>
+            <a:off x="657225" y="1485899"/>
+            <a:ext cx="8334375" cy="5281399"/>
+          </a:xfrm>
+        </p:spPr>
         <p:txBody>
           <a:bodyPr>
             <a:normAutofit/>
           </a:bodyPr>
           <a:lstStyle/>
           <a:p>
+            <a:r>
+              <a:rPr lang="pt-BR" b="1" dirty="0"/>
+              <a:t>Números Inteiros em Complemento de 2 (um)</a:t>
+            </a:r>
+          </a:p>
+          <a:p>
+            <a:endParaRPr lang="pt-BR" b="1" dirty="0"/>
+          </a:p>
+          <a:p>
             <a:pPr marL="285750" indent="-285750">
               <a:buFont typeface="Arial"/>
               <a:buChar char="•"/>
             </a:pPr>
             <a:r>
-              <a:rPr lang="pt-BR" sz="2000" dirty="0"/>
-              <a:t>Supondo um conjunto de números de </a:t>
-            </a:r>
-            <a:r>
-              <a:rPr lang="pt-BR" sz="2000" dirty="0" err="1"/>
+              <a:rPr lang="pt-BR" dirty="0"/>
+              <a:t>Supondo um conjunto de números inteiros de </a:t>
+            </a:r>
+            <a:r>
+              <a:rPr lang="pt-BR" dirty="0" err="1"/>
               <a:t>n</a:t>
             </a:r>
             <a:r>
-              <a:rPr lang="pt-BR" sz="2000" dirty="0"/>
+              <a:rPr lang="pt-BR" dirty="0"/>
               <a:t> bits:</a:t>
             </a:r>
           </a:p>
@@ -20504,17 +20307,17 @@
               <a:buFont typeface="Arial"/>
               <a:buChar char="•"/>
             </a:pPr>
-            <a:endParaRPr lang="pt-BR" sz="2000" dirty="0"/>
-          </a:p>
-          <a:p>
-            <a:endParaRPr lang="pt-BR" sz="2000" dirty="0"/>
+            <a:endParaRPr lang="pt-BR" dirty="0"/>
+          </a:p>
+          <a:p>
+            <a:endParaRPr lang="pt-BR" dirty="0"/>
           </a:p>
           <a:p>
             <a:pPr marL="285750" indent="-285750">
               <a:buFont typeface="Arial"/>
               <a:buChar char="•"/>
             </a:pPr>
-            <a:endParaRPr lang="pt-BR" sz="2000" dirty="0"/>
+            <a:endParaRPr lang="pt-BR" dirty="0"/>
           </a:p>
           <a:p>
             <a:pPr marL="285750" indent="-285750">
@@ -20522,8 +20325,8 @@
               <a:buChar char="•"/>
             </a:pPr>
             <a:r>
-              <a:rPr lang="pt-BR" sz="2000" dirty="0"/>
-              <a:t>Os códigos dos números positivos começaria com um 0.</a:t>
+              <a:rPr lang="pt-BR" dirty="0"/>
+              <a:t>valores não negativos começam com 0</a:t>
             </a:r>
           </a:p>
           <a:p>
@@ -20531,7 +20334,7 @@
               <a:buFont typeface="Arial"/>
               <a:buChar char="•"/>
             </a:pPr>
-            <a:endParaRPr lang="pt-BR" sz="2000" dirty="0"/>
+            <a:endParaRPr lang="pt-BR" dirty="0"/>
           </a:p>
           <a:p>
             <a:pPr marL="285750" indent="-285750">
@@ -20539,8 +20342,8 @@
               <a:buChar char="•"/>
             </a:pPr>
             <a:r>
-              <a:rPr lang="pt-BR" sz="2000" dirty="0"/>
-              <a:t>Os códigos dos números negativos começaria com um 1.</a:t>
+              <a:rPr lang="pt-BR" dirty="0"/>
+              <a:t>valores negativos começam com 1</a:t>
             </a:r>
           </a:p>
           <a:p>
@@ -20548,7 +20351,7 @@
               <a:buFont typeface="Arial"/>
               <a:buChar char="•"/>
             </a:pPr>
-            <a:endParaRPr lang="pt-BR" sz="2000" dirty="0"/>
+            <a:endParaRPr lang="pt-BR" dirty="0"/>
           </a:p>
           <a:p>
             <a:pPr marL="285750" indent="-285750">
@@ -20556,31 +20359,34 @@
               <a:buChar char="•"/>
             </a:pPr>
             <a:r>
-              <a:rPr lang="pt-BR" sz="2000" dirty="0"/>
-              <a:t>Metade dos números seriam positivos e estariam entre:</a:t>
-            </a:r>
-          </a:p>
-          <a:p>
-            <a:r>
-              <a:rPr lang="pt-BR" sz="2000" dirty="0"/>
+              <a:rPr lang="pt-BR" dirty="0"/>
+              <a:t>Metade dos números seriam não negativos e estariam entre:</a:t>
+            </a:r>
+          </a:p>
+          <a:p>
+            <a:r>
+              <a:rPr lang="pt-BR" dirty="0"/>
               <a:t>	0 e (2</a:t>
             </a:r>
             <a:r>
-              <a:rPr lang="pt-BR" sz="2000" baseline="30000" dirty="0"/>
+              <a:rPr lang="pt-BR" baseline="30000" dirty="0"/>
               <a:t>(</a:t>
             </a:r>
             <a:r>
-              <a:rPr lang="pt-BR" sz="2000" baseline="30000" dirty="0" err="1"/>
+              <a:rPr lang="pt-BR" baseline="30000" dirty="0" err="1"/>
               <a:t>n</a:t>
             </a:r>
             <a:r>
-              <a:rPr lang="pt-BR" sz="2000" baseline="30000" dirty="0"/>
+              <a:rPr lang="pt-BR" baseline="30000" dirty="0"/>
               <a:t> − 1)</a:t>
             </a:r>
             <a:r>
-              <a:rPr lang="pt-BR" sz="2000" dirty="0"/>
+              <a:rPr lang="pt-BR" dirty="0"/>
               <a:t> − 1) </a:t>
             </a:r>
+          </a:p>
+          <a:p>
+            <a:endParaRPr lang="pt-BR" dirty="0"/>
           </a:p>
           <a:p>
             <a:pPr marL="285750" indent="-285750">
@@ -20588,29 +20394,29 @@
               <a:buChar char="•"/>
             </a:pPr>
             <a:r>
-              <a:rPr lang="pt-BR" sz="2000" dirty="0"/>
+              <a:rPr lang="pt-BR" dirty="0"/>
               <a:t>A outra metade compreenderia o espaço de:</a:t>
             </a:r>
           </a:p>
           <a:p>
             <a:r>
-              <a:rPr lang="pt-BR" sz="2000" dirty="0"/>
+              <a:rPr lang="pt-BR" dirty="0"/>
               <a:t>	−2</a:t>
             </a:r>
             <a:r>
-              <a:rPr lang="pt-BR" sz="2000" baseline="30000" dirty="0"/>
+              <a:rPr lang="pt-BR" baseline="30000" dirty="0"/>
               <a:t>(</a:t>
             </a:r>
             <a:r>
-              <a:rPr lang="pt-BR" sz="2000" baseline="30000" dirty="0" err="1"/>
+              <a:rPr lang="pt-BR" baseline="30000" dirty="0" err="1"/>
               <a:t>n</a:t>
             </a:r>
             <a:r>
-              <a:rPr lang="pt-BR" sz="2000" baseline="30000" dirty="0"/>
+              <a:rPr lang="pt-BR" baseline="30000" dirty="0"/>
               <a:t> − 1)</a:t>
             </a:r>
             <a:r>
-              <a:rPr lang="pt-BR" sz="2000" dirty="0"/>
+              <a:rPr lang="pt-BR" dirty="0"/>
               <a:t> e −1 </a:t>
             </a:r>
           </a:p>
@@ -20667,7 +20473,7 @@
         </p:nvGrpSpPr>
         <p:grpSpPr>
           <a:xfrm>
-            <a:off x="1508125" y="2023851"/>
+            <a:off x="1508125" y="2519151"/>
             <a:ext cx="4648200" cy="615553"/>
             <a:chOff x="1508125" y="2023851"/>
             <a:chExt cx="4648200" cy="615553"/>
@@ -20758,13 +20564,13 @@
                   <a:defRPr/>
                 </a:pPr>
                 <a:r>
-                  <a:rPr lang="pt-BR" dirty="0" err="1">
+                  <a:rPr lang="pt-BR" dirty="0">
                     <a:solidFill>
                       <a:srgbClr val="000000"/>
                     </a:solidFill>
                     <a:latin typeface="+mn-lt"/>
                   </a:rPr>
-                  <a:t>n</a:t>
+                  <a:t>n-1</a:t>
                 </a:r>
                 <a:endParaRPr lang="en-US" dirty="0">
                   <a:solidFill>
@@ -20848,7 +20654,7 @@
                       <a:srgbClr val="000000"/>
                     </a:solidFill>
                   </a:rPr>
-                  <a:t>n-1</a:t>
+                  <a:t>n-2</a:t>
                 </a:r>
                 <a:endParaRPr lang="en-US" dirty="0">
                   <a:solidFill>
@@ -20933,7 +20739,7 @@
                     </a:solidFill>
                     <a:latin typeface="+mn-lt"/>
                   </a:rPr>
-                  <a:t>n-2</a:t>
+                  <a:t>n-3</a:t>
                 </a:r>
               </a:p>
             </p:txBody>
@@ -21234,13 +21040,13 @@
   <p:clrMapOvr>
     <a:masterClrMapping/>
   </p:clrMapOvr>
-  <mc:AlternateContent xmlns:mc="http://schemas.openxmlformats.org/markup-compatibility/2006">
-    <mc:Choice xmlns:p14="http://schemas.microsoft.com/office/powerpoint/2010/main" Requires="p14">
+  <mc:AlternateContent xmlns:mc="http://schemas.openxmlformats.org/markup-compatibility/2006" xmlns:p14="http://schemas.microsoft.com/office/powerpoint/2010/main">
+    <mc:Choice Requires="p14">
       <p:transition spd="slow" p14:dur="1200">
         <p14:prism/>
       </p:transition>
     </mc:Choice>
-    <mc:Fallback>
+    <mc:Fallback xmlns="">
       <p:transition spd="slow">
         <p:fade/>
       </p:transition>
@@ -21283,7 +21089,7 @@
           <a:p>
             <a:r>
               <a:rPr lang="pt-BR" dirty="0"/>
-              <a:t>Complemento de 2</a:t>
+              <a:t>Complemento de 2 (dois)</a:t>
             </a:r>
           </a:p>
         </p:txBody>
@@ -21300,8 +21106,8 @@
         </p:nvSpPr>
         <p:spPr>
           <a:xfrm>
-            <a:off x="657225" y="1485900"/>
-            <a:ext cx="5853185" cy="4724400"/>
+            <a:off x="324629" y="1485900"/>
+            <a:ext cx="6185781" cy="4724400"/>
           </a:xfrm>
         </p:spPr>
         <p:txBody>
@@ -21309,8 +21115,12 @@
           <a:lstStyle/>
           <a:p>
             <a:r>
+              <a:rPr lang="en-BR" dirty="0"/>
+              <a:t>Complemento de 2 é a representação mais comum de números inteiros com sinal em computadores</a:t>
+            </a:r>
+            <a:r>
               <a:rPr lang="pt-BR" dirty="0"/>
-              <a:t>Representação usada em computadores para executar soma e subtração de números inteiros.</a:t>
+              <a:t>.</a:t>
             </a:r>
           </a:p>
           <a:p>
@@ -21319,7 +21129,31 @@
           <a:p>
             <a:r>
               <a:rPr lang="pt-BR" dirty="0"/>
-              <a:t>Para o valor negativo de um número:</a:t>
+              <a:t>Para obter a representação de −</a:t>
+            </a:r>
+            <a:r>
+              <a:rPr lang="pt-BR" dirty="0" err="1"/>
+              <a:t>x</a:t>
+            </a:r>
+            <a:r>
+              <a:rPr lang="pt-BR" dirty="0"/>
+              <a:t> a partir de </a:t>
+            </a:r>
+            <a:r>
+              <a:rPr lang="pt-BR" dirty="0" err="1"/>
+              <a:t>x</a:t>
+            </a:r>
+            <a:r>
+              <a:rPr lang="pt-BR" dirty="0"/>
+              <a:t>, em uma largura fixa de </a:t>
+            </a:r>
+            <a:r>
+              <a:rPr lang="pt-BR" dirty="0" err="1"/>
+              <a:t>n</a:t>
+            </a:r>
+            <a:r>
+              <a:rPr lang="pt-BR" dirty="0"/>
+              <a:t> bits:</a:t>
             </a:r>
           </a:p>
           <a:p>
@@ -21343,42 +21177,18 @@
             </a:r>
           </a:p>
           <a:p>
+            <a:endParaRPr lang="pt-BR" sz="1050" dirty="0"/>
+          </a:p>
+          <a:p>
+            <a:endParaRPr lang="pt-BR" sz="1050" dirty="0"/>
+          </a:p>
+          <a:p>
+            <a:endParaRPr lang="pt-BR" sz="1050" dirty="0"/>
+          </a:p>
+          <a:p>
             <a:r>
               <a:rPr lang="pt-BR" dirty="0"/>
-              <a:t>OU</a:t>
-            </a:r>
-          </a:p>
-          <a:p>
-            <a:pPr marL="285750" indent="-285750">
-              <a:buFont typeface="Arial"/>
-              <a:buChar char="•"/>
-            </a:pPr>
-            <a:r>
-              <a:rPr lang="pt-BR" dirty="0"/>
-              <a:t>Some -1 (111....111)</a:t>
-            </a:r>
-          </a:p>
-          <a:p>
-            <a:pPr marL="285750" indent="-285750">
-              <a:buFont typeface="Arial"/>
-              <a:buChar char="•"/>
-            </a:pPr>
-            <a:r>
-              <a:rPr lang="pt-BR" dirty="0"/>
-              <a:t>Inverta todos os bits</a:t>
-            </a:r>
-          </a:p>
-          <a:p>
-            <a:pPr marL="285750" indent="-285750">
-              <a:buFont typeface="Arial"/>
-              <a:buChar char="•"/>
-            </a:pPr>
-            <a:endParaRPr lang="pt-BR" sz="1050" dirty="0"/>
-          </a:p>
-          <a:p>
-            <a:r>
-              <a:rPr lang="pt-BR" dirty="0"/>
-              <a:t>Dessa forma fica simples a soma e subtração:</a:t>
+              <a:t>Essa representação simplifica as operações de soma e subtração. </a:t>
             </a:r>
           </a:p>
           <a:p>
@@ -21393,7 +21203,7 @@
           <a:p>
             <a:r>
               <a:rPr lang="pt-BR" dirty="0"/>
-              <a:t>Invertendo 5             Subtraindo 5 de 3</a:t>
+              <a:t>    Invertendo 5             Subtraindo 5 de 3</a:t>
             </a:r>
           </a:p>
         </p:txBody>
@@ -22423,13 +22233,13 @@
   <p:clrMapOvr>
     <a:masterClrMapping/>
   </p:clrMapOvr>
-  <mc:AlternateContent xmlns:mc="http://schemas.openxmlformats.org/markup-compatibility/2006">
-    <mc:Choice xmlns:p14="http://schemas.microsoft.com/office/powerpoint/2010/main" Requires="p14">
+  <mc:AlternateContent xmlns:mc="http://schemas.openxmlformats.org/markup-compatibility/2006" xmlns:p14="http://schemas.microsoft.com/office/powerpoint/2010/main">
+    <mc:Choice Requires="p14">
       <p:transition spd="slow" p14:dur="1200">
         <p14:prism/>
       </p:transition>
     </mc:Choice>
-    <mc:Fallback>
+    <mc:Fallback xmlns="">
       <p:transition spd="slow">
         <p:fade/>
       </p:transition>
@@ -22540,10 +22350,10 @@
         </p:nvGrpSpPr>
         <p:grpSpPr bwMode="auto">
           <a:xfrm>
-            <a:off x="1014413" y="3378192"/>
-            <a:ext cx="4049712" cy="457200"/>
-            <a:chOff x="1014719" y="5181600"/>
-            <a:chExt cx="4049777" cy="457200"/>
+            <a:off x="1014413" y="3365208"/>
+            <a:ext cx="4776787" cy="470184"/>
+            <a:chOff x="1014719" y="5168616"/>
+            <a:chExt cx="4776865" cy="470184"/>
           </a:xfrm>
         </p:grpSpPr>
         <p:sp>
@@ -22609,8 +22419,8 @@
           </p:nvSpPr>
           <p:spPr bwMode="auto">
             <a:xfrm>
-              <a:off x="1447800" y="5181600"/>
-              <a:ext cx="3616696" cy="369332"/>
+              <a:off x="1395757" y="5168616"/>
+              <a:ext cx="4395827" cy="292388"/>
             </a:xfrm>
             <a:prstGeom prst="rect">
               <a:avLst/>
@@ -22630,15 +22440,15 @@
             <a:lstStyle/>
             <a:p>
               <a:r>
-                <a:rPr lang="pt-BR">
+                <a:rPr lang="pt-BR" sz="1300" dirty="0">
                   <a:solidFill>
                     <a:srgbClr val="000000"/>
                   </a:solidFill>
                   <a:latin typeface="Lucida Sans" pitchFamily="34" charset="0"/>
                 </a:rPr>
-                <a:t>último bit utilizado como sinal</a:t>
+                <a:t>bit mais à esquerda (MSB) caracteriza valor negativo</a:t>
               </a:r>
-              <a:endParaRPr lang="en-US">
+              <a:endParaRPr lang="en-US" sz="1300" dirty="0">
                 <a:solidFill>
                   <a:srgbClr val="000000"/>
                 </a:solidFill>
@@ -22686,6 +22496,10 @@
           </p:nvPr>
         </p:nvSpPr>
         <p:spPr>
+          <a:xfrm>
+            <a:off x="657225" y="1485900"/>
+            <a:ext cx="8029575" cy="2070100"/>
+          </a:xfrm>
           <a:prstGeom prst="rect">
             <a:avLst/>
           </a:prstGeom>
@@ -26186,13 +26000,13 @@
   <p:clrMapOvr>
     <a:masterClrMapping/>
   </p:clrMapOvr>
-  <mc:AlternateContent xmlns:mc="http://schemas.openxmlformats.org/markup-compatibility/2006">
-    <mc:Choice xmlns:p14="http://schemas.microsoft.com/office/powerpoint/2010/main" Requires="p14">
+  <mc:AlternateContent xmlns:mc="http://schemas.openxmlformats.org/markup-compatibility/2006" xmlns:p14="http://schemas.microsoft.com/office/powerpoint/2010/main">
+    <mc:Choice Requires="p14">
       <p:transition spd="slow" p14:dur="1200">
         <p14:prism/>
       </p:transition>
     </mc:Choice>
-    <mc:Fallback>
+    <mc:Fallback xmlns="">
       <p:transition spd="slow">
         <p:fade/>
       </p:transition>
@@ -30846,13 +30660,13 @@
   <p:clrMapOvr>
     <a:masterClrMapping/>
   </p:clrMapOvr>
-  <mc:AlternateContent xmlns:mc="http://schemas.openxmlformats.org/markup-compatibility/2006">
-    <mc:Choice xmlns:p14="http://schemas.microsoft.com/office/powerpoint/2010/main" Requires="p14">
+  <mc:AlternateContent xmlns:mc="http://schemas.openxmlformats.org/markup-compatibility/2006" xmlns:p14="http://schemas.microsoft.com/office/powerpoint/2010/main">
+    <mc:Choice Requires="p14">
       <p:transition spd="slow" p14:dur="1200">
         <p14:prism/>
       </p:transition>
     </mc:Choice>
-    <mc:Fallback>
+    <mc:Fallback xmlns="">
       <p:transition spd="slow">
         <p:fade/>
       </p:transition>
@@ -31443,7 +31257,7 @@
         </p:blipFill>
         <p:spPr>
           <a:xfrm>
-            <a:off x="6166108" y="3199427"/>
+            <a:off x="6166108" y="3429000"/>
             <a:ext cx="2450583" cy="2028069"/>
           </a:xfrm>
           <a:prstGeom prst="rect">
@@ -31463,8 +31277,8 @@
         </p:nvSpPr>
         <p:spPr>
           <a:xfrm>
-            <a:off x="657225" y="1485900"/>
-            <a:ext cx="6152795" cy="2136942"/>
+            <a:off x="527309" y="1485900"/>
+            <a:ext cx="6443002" cy="2136942"/>
           </a:xfrm>
         </p:spPr>
         <p:txBody>
@@ -31479,24 +31293,16 @@
               </a:spcBef>
             </a:pPr>
             <a:r>
-              <a:rPr lang="pt-BR" sz="2100" dirty="0"/>
+              <a:rPr lang="pt-BR" sz="2000" dirty="0"/>
               <a:t>Wilhelm </a:t>
             </a:r>
             <a:r>
-              <a:rPr lang="pt-BR" sz="2100" dirty="0" err="1"/>
+              <a:rPr lang="pt-BR" sz="2000" dirty="0" err="1"/>
               <a:t>Schickard</a:t>
             </a:r>
             <a:r>
-              <a:rPr lang="pt-BR" sz="2100" dirty="0"/>
-              <a:t> (1592–1635) construiu em 1623 uma calculadora para seu amigo astrônomo </a:t>
-            </a:r>
-            <a:r>
-              <a:rPr lang="pt-BR" sz="2100" dirty="0" err="1"/>
-              <a:t>Johannes</a:t>
-            </a:r>
-            <a:r>
-              <a:rPr lang="pt-BR" sz="2100" dirty="0"/>
-              <a:t> Kepler. Esta é a mais antiga calculadora mecânica conhecida de quatro funções, que foi  descoberta por esboços da sua criação.</a:t>
+              <a:rPr lang="pt-BR" sz="2000" dirty="0"/>
+              <a:t> (1592–1635) construiu em 1623 uma calculadora para seu amigo astrônomo Johannes Kepler. Esta é uma das mais antigas calculadoras mecânicas conhecidas capazes de realizar as quatro operações. Seu projeto foi redescoberto no século XX a partir de desenhos e correspondência.</a:t>
             </a:r>
           </a:p>
           <a:p>
@@ -31505,7 +31311,7 @@
                 <a:spcPts val="0"/>
               </a:spcBef>
             </a:pPr>
-            <a:endParaRPr lang="pt-BR" sz="2100" dirty="0"/>
+            <a:endParaRPr lang="pt-BR" sz="2000" dirty="0"/>
           </a:p>
         </p:txBody>
       </p:sp>
@@ -31524,7 +31330,7 @@
         </p:blipFill>
         <p:spPr>
           <a:xfrm>
-            <a:off x="2717441" y="3728734"/>
+            <a:off x="2727552" y="3911296"/>
             <a:ext cx="3168203" cy="2673440"/>
           </a:xfrm>
           <a:prstGeom prst="rect">
@@ -31542,13 +31348,13 @@
   <p:clrMapOvr>
     <a:masterClrMapping/>
   </p:clrMapOvr>
-  <mc:AlternateContent xmlns:mc="http://schemas.openxmlformats.org/markup-compatibility/2006">
-    <mc:Choice xmlns:p14="http://schemas.microsoft.com/office/powerpoint/2010/main" Requires="p14">
+  <mc:AlternateContent xmlns:mc="http://schemas.openxmlformats.org/markup-compatibility/2006" xmlns:p14="http://schemas.microsoft.com/office/powerpoint/2010/main">
+    <mc:Choice Requires="p14">
       <p:transition spd="slow" p14:dur="1200">
         <p14:prism/>
       </p:transition>
     </mc:Choice>
-    <mc:Fallback>
+    <mc:Fallback xmlns="">
       <p:transition spd="slow">
         <p:fade/>
       </p:transition>
@@ -34174,8 +33980,12 @@
               <a:buNone/>
             </a:pPr>
             <a:r>
+              <a:rPr lang="pt-BR" sz="2000" b="1" dirty="0" err="1"/>
+              <a:t>S</a:t>
+            </a:r>
+            <a:r>
               <a:rPr lang="pt-BR" sz="2000" dirty="0"/>
-              <a:t>(S) sinal</a:t>
+              <a:t>: sinal</a:t>
             </a:r>
           </a:p>
           <a:p>
@@ -34186,8 +33996,12 @@
               <a:buNone/>
             </a:pPr>
             <a:r>
+              <a:rPr lang="pt-BR" sz="2000" b="1" dirty="0"/>
+              <a:t>F</a:t>
+            </a:r>
+            <a:r>
               <a:rPr lang="pt-BR" sz="2000" dirty="0"/>
-              <a:t>(M) mantissa</a:t>
+              <a:t>: fração</a:t>
             </a:r>
           </a:p>
           <a:p>
@@ -34198,8 +34012,12 @@
               <a:buNone/>
             </a:pPr>
             <a:r>
+              <a:rPr lang="pt-BR" sz="2000" b="1" dirty="0"/>
+              <a:t>E</a:t>
+            </a:r>
+            <a:r>
               <a:rPr lang="pt-BR" sz="2000" dirty="0"/>
-              <a:t>(E) expoente</a:t>
+              <a:t>: expoente</a:t>
             </a:r>
           </a:p>
           <a:p>
@@ -34210,25 +34028,26 @@
               <a:buNone/>
             </a:pPr>
             <a:r>
+              <a:rPr lang="pt-BR" sz="2000" b="1" dirty="0"/>
+              <a:t>C</a:t>
+            </a:r>
+            <a:r>
               <a:rPr lang="pt-BR" sz="2000" dirty="0"/>
-              <a:t>(C) 127(</a:t>
-            </a:r>
-            <a:r>
-              <a:rPr lang="pt-BR" sz="2000" dirty="0" err="1"/>
-              <a:t>s</a:t>
-            </a:r>
-            <a:r>
-              <a:rPr lang="pt-BR" sz="2000" dirty="0"/>
-              <a:t>) ou 1023(</a:t>
-            </a:r>
-            <a:r>
-              <a:rPr lang="pt-BR" sz="2000" dirty="0" err="1"/>
-              <a:t>d</a:t>
-            </a:r>
-            <a:r>
-              <a:rPr lang="pt-BR" sz="2000" dirty="0"/>
-              <a:t>) </a:t>
-            </a:r>
+              <a:t>: 127 </a:t>
+            </a:r>
+            <a:r>
+              <a:rPr lang="pt-BR" dirty="0"/>
+              <a:t>(</a:t>
+            </a:r>
+            <a:r>
+              <a:rPr lang="en-US" noProof="0" dirty="0"/>
+              <a:t>single precision</a:t>
+            </a:r>
+            <a:r>
+              <a:rPr lang="pt-BR" dirty="0"/>
+              <a:t>)</a:t>
+            </a:r>
+            <a:endParaRPr lang="pt-BR" sz="2000" dirty="0"/>
           </a:p>
         </p:txBody>
       </p:sp>
@@ -37110,7 +36929,7 @@
         <p:spPr>
           <a:xfrm>
             <a:off x="4990094" y="3458626"/>
-            <a:ext cx="1485077" cy="523220"/>
+            <a:ext cx="1092863" cy="523220"/>
           </a:xfrm>
           <a:prstGeom prst="rect">
             <a:avLst/>
@@ -37134,7 +36953,7 @@
                 </a:solidFill>
                 <a:latin typeface="Calibri"/>
               </a:rPr>
-              <a:t>mantissa</a:t>
+              <a:t>fração</a:t>
             </a:r>
           </a:p>
         </p:txBody>
@@ -37441,28 +37260,12 @@
               <a:buChar char="•"/>
             </a:pPr>
             <a:r>
-              <a:rPr lang="en-US" b="1" i="1" dirty="0">
+              <a:rPr lang="pt-BR" b="1" i="1" noProof="0" dirty="0">
                 <a:solidFill>
                   <a:srgbClr val="000000"/>
                 </a:solidFill>
               </a:rPr>
-              <a:t>IEEE 754-2008 </a:t>
-            </a:r>
-            <a:r>
-              <a:rPr lang="en-US" b="1" i="1" dirty="0" err="1">
-                <a:solidFill>
-                  <a:srgbClr val="000000"/>
-                </a:solidFill>
-              </a:rPr>
-              <a:t>Precisão</a:t>
-            </a:r>
-            <a:r>
-              <a:rPr lang="en-US" b="1" i="1" dirty="0">
-                <a:solidFill>
-                  <a:srgbClr val="000000"/>
-                </a:solidFill>
-              </a:rPr>
-              <a:t> Simples</a:t>
+              <a:t>IEEE 754-2008 Precisão Simples</a:t>
             </a:r>
           </a:p>
         </p:txBody>
@@ -37551,8 +37354,8 @@
         </p:nvSpPr>
         <p:spPr>
           <a:xfrm>
-            <a:off x="1341331" y="1613973"/>
-            <a:ext cx="3238302" cy="707886"/>
+            <a:off x="1021432" y="1625387"/>
+            <a:ext cx="3936014" cy="707886"/>
           </a:xfrm>
           <a:prstGeom prst="rect">
             <a:avLst/>
@@ -37576,7 +37379,23 @@
             </a:pPr>
             <a:r>
               <a:rPr lang="pt-BR" sz="4000" dirty="0"/>
-              <a:t> S · (1+M) · 2</a:t>
+              <a:t> (-1)</a:t>
+            </a:r>
+            <a:r>
+              <a:rPr lang="pt-BR" sz="4000" baseline="30000" dirty="0" err="1"/>
+              <a:t>S</a:t>
+            </a:r>
+            <a:r>
+              <a:rPr lang="pt-BR" sz="4000" dirty="0"/>
+              <a:t> · (1+F</a:t>
+            </a:r>
+            <a:r>
+              <a:rPr lang="pt-BR" sz="4000" baseline="-25000" dirty="0"/>
+              <a:t>2</a:t>
+            </a:r>
+            <a:r>
+              <a:rPr lang="pt-BR" sz="4000" dirty="0"/>
+              <a:t>) · 2</a:t>
             </a:r>
             <a:r>
               <a:rPr lang="pt-BR" sz="4000" baseline="30000" dirty="0"/>
@@ -38179,6 +37998,53 @@
           </a:fontRef>
         </p:style>
       </p:cxnSp>
+      <p:sp>
+        <p:nvSpPr>
+          <p:cNvPr id="8" name="TextBox 7">
+            <a:extLst>
+              <a:ext uri="{FF2B5EF4-FFF2-40B4-BE49-F238E27FC236}">
+                <a16:creationId xmlns:a16="http://schemas.microsoft.com/office/drawing/2014/main" id="{70FA8945-D91E-D63A-DFDB-5ECE134E180E}"/>
+              </a:ext>
+            </a:extLst>
+          </p:cNvPr>
+          <p:cNvSpPr txBox="1"/>
+          <p:nvPr/>
+        </p:nvSpPr>
+        <p:spPr>
+          <a:xfrm>
+            <a:off x="1228016" y="6381361"/>
+            <a:ext cx="6383168" cy="338554"/>
+          </a:xfrm>
+          <a:prstGeom prst="rect">
+            <a:avLst/>
+          </a:prstGeom>
+          <a:noFill/>
+        </p:spPr>
+        <p:txBody>
+          <a:bodyPr wrap="square">
+            <a:spAutoFit/>
+          </a:bodyPr>
+          <a:lstStyle/>
+          <a:p>
+            <a:r>
+              <a:rPr lang="pt-BR" sz="1600" noProof="0" dirty="0" err="1"/>
+              <a:t>Obs</a:t>
+            </a:r>
+            <a:r>
+              <a:rPr lang="pt-BR" sz="1600" noProof="0" dirty="0"/>
+              <a:t>: A especificação também trata casos especiais, como: ±∞ e </a:t>
+            </a:r>
+            <a:r>
+              <a:rPr lang="pt-BR" sz="1600" noProof="0" dirty="0" err="1"/>
+              <a:t>NaN</a:t>
+            </a:r>
+            <a:r>
+              <a:rPr lang="pt-BR" sz="1600" noProof="0" dirty="0"/>
+              <a:t> </a:t>
+            </a:r>
+          </a:p>
+        </p:txBody>
+      </p:sp>
     </p:spTree>
     <p:extLst>
       <p:ext uri="{BB962C8B-B14F-4D97-AF65-F5344CB8AC3E}">
@@ -38189,13 +38055,13 @@
   <p:clrMapOvr>
     <a:masterClrMapping/>
   </p:clrMapOvr>
-  <mc:AlternateContent xmlns:mc="http://schemas.openxmlformats.org/markup-compatibility/2006">
-    <mc:Choice xmlns:p14="http://schemas.microsoft.com/office/powerpoint/2010/main" Requires="p14">
+  <mc:AlternateContent xmlns:mc="http://schemas.openxmlformats.org/markup-compatibility/2006" xmlns:p14="http://schemas.microsoft.com/office/powerpoint/2010/main">
+    <mc:Choice Requires="p14">
       <p:transition spd="slow" p14:dur="1200">
         <p14:prism/>
       </p:transition>
     </mc:Choice>
-    <mc:Fallback>
+    <mc:Fallback xmlns="">
       <p:transition spd="slow">
         <p:fade/>
       </p:transition>
@@ -38238,7 +38104,7 @@
           <a:p>
             <a:r>
               <a:rPr lang="pt-BR" dirty="0"/>
-              <a:t>Arquivos de Textos</a:t>
+              <a:t>Arquivos de Texto</a:t>
             </a:r>
           </a:p>
         </p:txBody>
@@ -38256,7 +38122,7 @@
         <p:spPr>
           <a:xfrm>
             <a:off x="657225" y="1485900"/>
-            <a:ext cx="8163247" cy="4724400"/>
+            <a:ext cx="8372475" cy="4724400"/>
           </a:xfrm>
         </p:spPr>
         <p:txBody>
@@ -38329,21 +38195,21 @@
             </a:r>
           </a:p>
           <a:p>
-            <a:pPr lvl="1">
+            <a:pPr marL="304800" lvl="1" indent="-215900">
               <a:defRPr/>
             </a:pPr>
             <a:r>
               <a:rPr lang="pt-BR" sz="2000" dirty="0"/>
-              <a:t>Estes bytes podem estar organizados de forma de códigos que só um programa específico entenda;</a:t>
-            </a:r>
-          </a:p>
-          <a:p>
-            <a:pPr lvl="1">
+              <a:t>Estes bytes podem estar organizados segundo uma codificação/formato que só um programa específico entenda;</a:t>
+            </a:r>
+          </a:p>
+          <a:p>
+            <a:pPr marL="304800" lvl="1" indent="-215900">
               <a:defRPr/>
             </a:pPr>
             <a:r>
               <a:rPr lang="pt-BR" sz="2000" dirty="0"/>
-              <a:t>Estes bytes podem ser também somente caracteres (ASCII ou Unicode). </a:t>
+              <a:t>Em arquivos de texto, sequências de bytes são interpretadas como caracteres segundo uma codificação, como ASCII. </a:t>
             </a:r>
             <a:br>
               <a:rPr lang="pt-BR" sz="2000" dirty="0"/>
@@ -38417,13 +38283,13 @@
   <p:clrMapOvr>
     <a:masterClrMapping/>
   </p:clrMapOvr>
-  <mc:AlternateContent xmlns:mc="http://schemas.openxmlformats.org/markup-compatibility/2006">
-    <mc:Choice xmlns:p14="http://schemas.microsoft.com/office/powerpoint/2010/main" Requires="p14">
+  <mc:AlternateContent xmlns:mc="http://schemas.openxmlformats.org/markup-compatibility/2006" xmlns:p14="http://schemas.microsoft.com/office/powerpoint/2010/main">
+    <mc:Choice Requires="p14">
       <p:transition spd="slow" p14:dur="1200">
         <p14:prism/>
       </p:transition>
     </mc:Choice>
-    <mc:Fallback>
+    <mc:Fallback xmlns="">
       <p:transition spd="slow">
         <p:fade/>
       </p:transition>
@@ -38620,8 +38486,8 @@
         </p:nvSpPr>
         <p:spPr>
           <a:xfrm>
-            <a:off x="457201" y="5586985"/>
-            <a:ext cx="8363272" cy="677108"/>
+            <a:off x="323528" y="5586985"/>
+            <a:ext cx="8726457" cy="677108"/>
           </a:xfrm>
           <a:prstGeom prst="rect">
             <a:avLst/>
@@ -38639,7 +38505,7 @@
                   <a:srgbClr val="FF0000"/>
                 </a:solidFill>
               </a:rPr>
-              <a:t>Em arquivos o Windows usa os caracteres CR e LF para terminar uma linha, enquanto Unix (Linux/</a:t>
+              <a:t>Em arquivos o Windows usa os caracteres CR e LF para terminar uma linha, enquanto sistemas Unix-like (Linux/</a:t>
             </a:r>
             <a:r>
               <a:rPr lang="pt-BR" sz="1900" b="1" dirty="0" err="1">
@@ -38647,7 +38513,7 @@
                   <a:srgbClr val="FF0000"/>
                 </a:solidFill>
               </a:rPr>
-              <a:t>MacOS</a:t>
+              <a:t>macOS</a:t>
             </a:r>
             <a:r>
               <a:rPr lang="pt-BR" sz="1900" b="1" dirty="0">
@@ -38655,7 +38521,7 @@
                   <a:srgbClr val="FF0000"/>
                 </a:solidFill>
               </a:rPr>
-              <a:t>) usa somente o LF para terminar a linha.</a:t>
+              <a:t>) usam somente o LF para terminar a linha.</a:t>
             </a:r>
           </a:p>
         </p:txBody>
@@ -38673,13 +38539,13 @@
   <p:clrMapOvr>
     <a:masterClrMapping/>
   </p:clrMapOvr>
-  <mc:AlternateContent xmlns:mc="http://schemas.openxmlformats.org/markup-compatibility/2006">
-    <mc:Choice xmlns:p14="http://schemas.microsoft.com/office/powerpoint/2010/main" Requires="p14">
+  <mc:AlternateContent xmlns:mc="http://schemas.openxmlformats.org/markup-compatibility/2006" xmlns:p14="http://schemas.microsoft.com/office/powerpoint/2010/main">
+    <mc:Choice Requires="p14">
       <p:transition spd="slow" p14:dur="1200">
         <p14:prism/>
       </p:transition>
     </mc:Choice>
-    <mc:Fallback>
+    <mc:Fallback xmlns="">
       <p:transition spd="slow">
         <p:fade/>
       </p:transition>
@@ -38855,9 +38721,114 @@
           <a:lstStyle/>
           <a:p>
             <a:r>
-              <a:rPr lang="pt-BR"/>
-              <a:t>Parte da tabela UTF-8</a:t>
-            </a:r>
+              <a:rPr lang="en-BR" dirty="0"/>
+              <a:t>Unicode e codificações de caracteres</a:t>
+            </a:r>
+            <a:endParaRPr lang="pt-BR" dirty="0"/>
+          </a:p>
+        </p:txBody>
+      </p:sp>
+      <p:sp>
+        <p:nvSpPr>
+          <p:cNvPr id="5" name="Content Placeholder 4">
+            <a:extLst>
+              <a:ext uri="{FF2B5EF4-FFF2-40B4-BE49-F238E27FC236}">
+                <a16:creationId xmlns:a16="http://schemas.microsoft.com/office/drawing/2014/main" id="{0B1F0F87-13BD-26C3-858F-F60AB0087875}"/>
+              </a:ext>
+            </a:extLst>
+          </p:cNvPr>
+          <p:cNvSpPr>
+            <a:spLocks noGrp="1"/>
+          </p:cNvSpPr>
+          <p:nvPr>
+            <p:ph idx="1"/>
+          </p:nvPr>
+        </p:nvSpPr>
+        <p:spPr/>
+        <p:txBody>
+          <a:bodyPr>
+            <a:normAutofit/>
+          </a:bodyPr>
+          <a:lstStyle/>
+          <a:p>
+            <a:r>
+              <a:rPr lang="en-BR" sz="2400" b="1" dirty="0"/>
+              <a:t>Unicode </a:t>
+            </a:r>
+            <a:r>
+              <a:rPr lang="en-BR" sz="2400" dirty="0"/>
+              <a:t>→ associa caracteres a </a:t>
+            </a:r>
+            <a:r>
+              <a:rPr lang="en-BR" sz="2400" i="1" dirty="0"/>
+              <a:t>code points</a:t>
+            </a:r>
+          </a:p>
+          <a:p>
+            <a:endParaRPr lang="en-US" sz="2400" dirty="0"/>
+          </a:p>
+          <a:p>
+            <a:r>
+              <a:rPr lang="en-US" sz="2400" dirty="0"/>
+              <a:t>UTF-8 - </a:t>
+            </a:r>
+            <a:r>
+              <a:rPr lang="en-BR" sz="2400" dirty="0"/>
+              <a:t>codifica um </a:t>
+            </a:r>
+            <a:r>
+              <a:rPr lang="en-BR" sz="2400" i="1" dirty="0"/>
+              <a:t>code point</a:t>
+            </a:r>
+            <a:r>
+              <a:rPr lang="en-BR" sz="2400" dirty="0"/>
+              <a:t> usando 1 a 4 bytes</a:t>
+            </a:r>
+            <a:endParaRPr lang="en-US" sz="2400" dirty="0"/>
+          </a:p>
+          <a:p>
+            <a:r>
+              <a:rPr lang="en-US" sz="2400" dirty="0"/>
+              <a:t>UTF-16 -</a:t>
+            </a:r>
+            <a:r>
+              <a:rPr lang="en-BR" sz="2400" dirty="0"/>
+              <a:t> utiliza uma ou duas unidades de 16 bits</a:t>
+            </a:r>
+          </a:p>
+          <a:p>
+            <a:endParaRPr lang="en-BR" sz="2400" dirty="0"/>
+          </a:p>
+          <a:p>
+            <a:endParaRPr lang="en-US" sz="2400" dirty="0"/>
+          </a:p>
+          <a:p>
+            <a:endParaRPr lang="en-US" sz="2400" dirty="0"/>
+          </a:p>
+        </p:txBody>
+      </p:sp>
+      <p:sp>
+        <p:nvSpPr>
+          <p:cNvPr id="8" name="Text Placeholder 7">
+            <a:extLst>
+              <a:ext uri="{FF2B5EF4-FFF2-40B4-BE49-F238E27FC236}">
+                <a16:creationId xmlns:a16="http://schemas.microsoft.com/office/drawing/2014/main" id="{A100E467-109F-D2B8-519A-8EEDB34376EB}"/>
+              </a:ext>
+            </a:extLst>
+          </p:cNvPr>
+          <p:cNvSpPr>
+            <a:spLocks noGrp="1"/>
+          </p:cNvSpPr>
+          <p:nvPr>
+            <p:ph type="body" sz="quarter" idx="13"/>
+          </p:nvPr>
+        </p:nvSpPr>
+        <p:spPr/>
+        <p:txBody>
+          <a:bodyPr/>
+          <a:lstStyle/>
+          <a:p>
+            <a:endParaRPr lang="en-US"/>
           </a:p>
         </p:txBody>
       </p:sp>
@@ -38868,7 +38839,7 @@
             <a:spLocks noGrp="1"/>
           </p:cNvSpPr>
           <p:nvPr>
-            <p:ph type="sldNum" sz="quarter" idx="12"/>
+            <p:ph type="sldNum" sz="quarter" idx="4"/>
           </p:nvPr>
         </p:nvSpPr>
         <p:spPr/>
@@ -38884,244 +38855,129 @@
           </a:p>
         </p:txBody>
       </p:sp>
-      <p:grpSp>
-        <p:nvGrpSpPr>
-          <p:cNvPr id="6" name="Group 5"/>
-          <p:cNvGrpSpPr/>
+      <p:sp>
+        <p:nvSpPr>
+          <p:cNvPr id="10" name="TextBox 9">
+            <a:extLst>
+              <a:ext uri="{FF2B5EF4-FFF2-40B4-BE49-F238E27FC236}">
+                <a16:creationId xmlns:a16="http://schemas.microsoft.com/office/drawing/2014/main" id="{877CE639-DF61-7F15-CF6C-BB329EB6A3AF}"/>
+              </a:ext>
+            </a:extLst>
+          </p:cNvPr>
+          <p:cNvSpPr txBox="1"/>
           <p:nvPr/>
-        </p:nvGrpSpPr>
-        <p:grpSpPr>
-          <a:xfrm>
-            <a:off x="671087" y="2904348"/>
-            <a:ext cx="3526949" cy="3495516"/>
-            <a:chOff x="321120" y="2002117"/>
-            <a:chExt cx="4305694" cy="4114553"/>
-          </a:xfrm>
-        </p:grpSpPr>
-        <p:graphicFrame>
-          <p:nvGraphicFramePr>
-            <p:cNvPr id="11" name="Object 10"/>
-            <p:cNvGraphicFramePr>
-              <a:graphicFrameLocks noChangeAspect="1"/>
-            </p:cNvGraphicFramePr>
-            <p:nvPr>
-              <p:extLst>
-                <p:ext uri="{D42A27DB-BD31-4B8C-83A1-F6EECF244321}">
-                  <p14:modId xmlns:p14="http://schemas.microsoft.com/office/powerpoint/2010/main" val="1813036989"/>
-                </p:ext>
-              </p:extLst>
-            </p:nvPr>
-          </p:nvGraphicFramePr>
-          <p:xfrm>
-            <a:off x="321120" y="2002117"/>
-            <a:ext cx="4305694" cy="4114553"/>
-          </p:xfrm>
-          <a:graphic>
-            <a:graphicData uri="http://schemas.openxmlformats.org/presentationml/2006/ole">
-              <mc:AlternateContent xmlns:mc="http://schemas.openxmlformats.org/markup-compatibility/2006">
-                <mc:Choice xmlns:v="urn:schemas-microsoft-com:vml" Requires="v">
-                  <p:oleObj name="Document" r:id="rId2" imgW="5435600" imgH="5194300" progId="Word.Document.12">
-                    <p:embed/>
-                  </p:oleObj>
-                </mc:Choice>
-                <mc:Fallback>
-                  <p:oleObj name="Document" r:id="rId2" imgW="5435600" imgH="5194300" progId="Word.Document.12">
-                    <p:embed/>
-                    <p:pic>
-                      <p:nvPicPr>
-                        <p:cNvPr id="0" name=""/>
-                        <p:cNvPicPr/>
-                        <p:nvPr/>
-                      </p:nvPicPr>
-                      <p:blipFill>
-                        <a:blip r:embed="rId3"/>
-                        <a:stretch>
-                          <a:fillRect/>
-                        </a:stretch>
-                      </p:blipFill>
-                      <p:spPr>
-                        <a:xfrm>
-                          <a:off x="321120" y="2002117"/>
-                          <a:ext cx="4305694" cy="4114553"/>
-                        </a:xfrm>
-                        <a:prstGeom prst="rect">
-                          <a:avLst/>
-                        </a:prstGeom>
-                      </p:spPr>
-                    </p:pic>
-                  </p:oleObj>
-                </mc:Fallback>
-              </mc:AlternateContent>
-            </a:graphicData>
-          </a:graphic>
-        </p:graphicFrame>
-        <p:cxnSp>
-          <p:nvCxnSpPr>
-            <p:cNvPr id="14" name="Straight Connector 13"/>
-            <p:cNvCxnSpPr/>
-            <p:nvPr/>
-          </p:nvCxnSpPr>
-          <p:spPr>
-            <a:xfrm>
-              <a:off x="321120" y="2002117"/>
-              <a:ext cx="0" cy="3969578"/>
-            </a:xfrm>
-            <a:prstGeom prst="line">
-              <a:avLst/>
-            </a:prstGeom>
-            <a:ln w="3175" cmpd="sng">
-              <a:solidFill>
-                <a:srgbClr val="000000"/>
-              </a:solidFill>
-            </a:ln>
-          </p:spPr>
-          <p:style>
-            <a:lnRef idx="2">
-              <a:schemeClr val="accent1"/>
-            </a:lnRef>
-            <a:fillRef idx="0">
-              <a:schemeClr val="accent1"/>
-            </a:fillRef>
-            <a:effectRef idx="1">
-              <a:schemeClr val="accent1"/>
-            </a:effectRef>
-            <a:fontRef idx="minor">
-              <a:schemeClr val="tx1"/>
-            </a:fontRef>
-          </p:style>
-        </p:cxnSp>
-      </p:grpSp>
-      <p:grpSp>
-        <p:nvGrpSpPr>
-          <p:cNvPr id="7" name="Group 6"/>
-          <p:cNvGrpSpPr/>
-          <p:nvPr/>
-        </p:nvGrpSpPr>
-        <p:grpSpPr>
-          <a:xfrm>
-            <a:off x="4500205" y="2877151"/>
-            <a:ext cx="3539119" cy="3576186"/>
-            <a:chOff x="4687369" y="2002117"/>
-            <a:chExt cx="4320551" cy="4209509"/>
-          </a:xfrm>
-        </p:grpSpPr>
-        <p:graphicFrame>
-          <p:nvGraphicFramePr>
-            <p:cNvPr id="12" name="Object 11"/>
-            <p:cNvGraphicFramePr>
-              <a:graphicFrameLocks noChangeAspect="1"/>
-            </p:cNvGraphicFramePr>
-            <p:nvPr>
-              <p:extLst>
-                <p:ext uri="{D42A27DB-BD31-4B8C-83A1-F6EECF244321}">
-                  <p14:modId xmlns:p14="http://schemas.microsoft.com/office/powerpoint/2010/main" val="315045092"/>
-                </p:ext>
-              </p:extLst>
-            </p:nvPr>
-          </p:nvGraphicFramePr>
-          <p:xfrm>
-            <a:off x="4687369" y="2002117"/>
-            <a:ext cx="4320551" cy="4209509"/>
-          </p:xfrm>
-          <a:graphic>
-            <a:graphicData uri="http://schemas.openxmlformats.org/presentationml/2006/ole">
-              <mc:AlternateContent xmlns:mc="http://schemas.openxmlformats.org/markup-compatibility/2006">
-                <mc:Choice xmlns:v="urn:schemas-microsoft-com:vml" Requires="v">
-                  <p:oleObj name="Document" r:id="rId4" imgW="5435600" imgH="5295900" progId="Word.Document.12">
-                    <p:embed/>
-                  </p:oleObj>
-                </mc:Choice>
-                <mc:Fallback>
-                  <p:oleObj name="Document" r:id="rId4" imgW="5435600" imgH="5295900" progId="Word.Document.12">
-                    <p:embed/>
-                    <p:pic>
-                      <p:nvPicPr>
-                        <p:cNvPr id="0" name=""/>
-                        <p:cNvPicPr/>
-                        <p:nvPr/>
-                      </p:nvPicPr>
-                      <p:blipFill>
-                        <a:blip r:embed="rId5"/>
-                        <a:stretch>
-                          <a:fillRect/>
-                        </a:stretch>
-                      </p:blipFill>
-                      <p:spPr>
-                        <a:xfrm>
-                          <a:off x="4687369" y="2002117"/>
-                          <a:ext cx="4320551" cy="4209509"/>
-                        </a:xfrm>
-                        <a:prstGeom prst="rect">
-                          <a:avLst/>
-                        </a:prstGeom>
-                      </p:spPr>
-                    </p:pic>
-                  </p:oleObj>
-                </mc:Fallback>
-              </mc:AlternateContent>
-            </a:graphicData>
-          </a:graphic>
-        </p:graphicFrame>
-        <p:cxnSp>
-          <p:nvCxnSpPr>
-            <p:cNvPr id="16" name="Straight Connector 15"/>
-            <p:cNvCxnSpPr/>
-            <p:nvPr/>
-          </p:nvCxnSpPr>
-          <p:spPr>
-            <a:xfrm>
-              <a:off x="4692160" y="2002117"/>
-              <a:ext cx="0" cy="4068000"/>
-            </a:xfrm>
-            <a:prstGeom prst="line">
-              <a:avLst/>
-            </a:prstGeom>
-            <a:ln w="3175" cmpd="sng">
-              <a:solidFill>
-                <a:srgbClr val="000000"/>
-              </a:solidFill>
-            </a:ln>
-          </p:spPr>
-          <p:style>
-            <a:lnRef idx="2">
-              <a:schemeClr val="accent1"/>
-            </a:lnRef>
-            <a:fillRef idx="0">
-              <a:schemeClr val="accent1"/>
-            </a:fillRef>
-            <a:effectRef idx="1">
-              <a:schemeClr val="accent1"/>
-            </a:effectRef>
-            <a:fontRef idx="minor">
-              <a:schemeClr val="tx1"/>
-            </a:fontRef>
-          </p:style>
-        </p:cxnSp>
-      </p:grpSp>
-      <p:pic>
-        <p:nvPicPr>
-          <p:cNvPr id="3" name="Picture 2"/>
-          <p:cNvPicPr>
-            <a:picLocks noChangeAspect="1"/>
-          </p:cNvPicPr>
-          <p:nvPr/>
-        </p:nvPicPr>
-        <p:blipFill>
-          <a:blip r:embed="rId6"/>
-          <a:stretch>
-            <a:fillRect/>
-          </a:stretch>
-        </p:blipFill>
+        </p:nvSpPr>
         <p:spPr>
           <a:xfrm>
-            <a:off x="671087" y="922419"/>
-            <a:ext cx="7359421" cy="1825401"/>
+            <a:off x="1524793" y="3830181"/>
+            <a:ext cx="6294438" cy="2246769"/>
           </a:xfrm>
           <a:prstGeom prst="rect">
             <a:avLst/>
           </a:prstGeom>
+          <a:noFill/>
         </p:spPr>
-      </p:pic>
+        <p:txBody>
+          <a:bodyPr wrap="square">
+            <a:spAutoFit/>
+          </a:bodyPr>
+          <a:lstStyle/>
+          <a:p>
+            <a:pPr>
+              <a:buNone/>
+            </a:pPr>
+            <a:r>
+              <a:rPr lang="en-BR" sz="2800" dirty="0">
+                <a:latin typeface="Courier New" panose="02070309020205020404" pitchFamily="49" charset="0"/>
+              </a:rPr>
+              <a:t>A</a:t>
+            </a:r>
+            <a:r>
+              <a:rPr lang="en-BR" sz="2800" dirty="0"/>
+              <a:t> → </a:t>
+            </a:r>
+            <a:r>
+              <a:rPr lang="en-BR" sz="2800" b="1" dirty="0"/>
+              <a:t>U+0041</a:t>
+            </a:r>
+            <a:r>
+              <a:rPr lang="en-BR" sz="2800" dirty="0"/>
+              <a:t> → UTF-8: </a:t>
+            </a:r>
+            <a:r>
+              <a:rPr lang="en-BR" sz="2800" b="1" dirty="0"/>
+              <a:t>41</a:t>
+            </a:r>
+          </a:p>
+          <a:p>
+            <a:pPr>
+              <a:buNone/>
+            </a:pPr>
+            <a:endParaRPr lang="en-BR" sz="2800" dirty="0"/>
+          </a:p>
+          <a:p>
+            <a:pPr>
+              <a:buNone/>
+            </a:pPr>
+            <a:r>
+              <a:rPr lang="en-BR" sz="2800" dirty="0">
+                <a:latin typeface="Courier New" panose="02070309020205020404" pitchFamily="49" charset="0"/>
+              </a:rPr>
+              <a:t>é</a:t>
+            </a:r>
+            <a:r>
+              <a:rPr lang="en-BR" sz="2800" dirty="0"/>
+              <a:t> → </a:t>
+            </a:r>
+            <a:r>
+              <a:rPr lang="en-BR" sz="2800" b="1" dirty="0"/>
+              <a:t>U+00E9</a:t>
+            </a:r>
+            <a:r>
+              <a:rPr lang="en-BR" sz="2800" dirty="0"/>
+              <a:t> → UTF-8: </a:t>
+            </a:r>
+            <a:r>
+              <a:rPr lang="en-BR" sz="2800" b="1" dirty="0"/>
+              <a:t>C3 A9</a:t>
+            </a:r>
+          </a:p>
+          <a:p>
+            <a:pPr>
+              <a:buNone/>
+            </a:pPr>
+            <a:endParaRPr lang="en-BR" sz="2800" dirty="0"/>
+          </a:p>
+          <a:p>
+            <a:pPr>
+              <a:buNone/>
+            </a:pPr>
+            <a:r>
+              <a:rPr lang="en-BR" sz="2800" dirty="0">
+                <a:latin typeface="Courier New" panose="02070309020205020404" pitchFamily="49" charset="0"/>
+              </a:rPr>
+              <a:t>😀</a:t>
+            </a:r>
+            <a:r>
+              <a:rPr lang="en-BR" sz="2800" dirty="0"/>
+              <a:t> → </a:t>
+            </a:r>
+            <a:r>
+              <a:rPr lang="en-BR" sz="2800" b="1" dirty="0"/>
+              <a:t>U+1F600</a:t>
+            </a:r>
+            <a:r>
+              <a:rPr lang="en-BR" sz="2800" dirty="0"/>
+              <a:t> → UTF-8: </a:t>
+            </a:r>
+            <a:r>
+              <a:rPr lang="en-BR" sz="2800" b="1" dirty="0"/>
+              <a:t>F0 9F 98 80</a:t>
+            </a:r>
+            <a:endParaRPr lang="en-BR" sz="2800" dirty="0"/>
+          </a:p>
+        </p:txBody>
+      </p:sp>
     </p:spTree>
     <p:extLst>
       <p:ext uri="{BB962C8B-B14F-4D97-AF65-F5344CB8AC3E}">
@@ -39132,13 +38988,13 @@
   <p:clrMapOvr>
     <a:masterClrMapping/>
   </p:clrMapOvr>
-  <mc:AlternateContent xmlns:mc="http://schemas.openxmlformats.org/markup-compatibility/2006">
-    <mc:Choice xmlns:p14="http://schemas.microsoft.com/office/powerpoint/2010/main" Requires="p14">
+  <mc:AlternateContent xmlns:mc="http://schemas.openxmlformats.org/markup-compatibility/2006" xmlns:p14="http://schemas.microsoft.com/office/powerpoint/2010/main">
+    <mc:Choice Requires="p14">
       <p:transition spd="slow" p14:dur="1200">
         <p14:prism/>
       </p:transition>
     </mc:Choice>
-    <mc:Fallback>
+    <mc:Fallback xmlns="">
       <p:transition spd="slow">
         <p:fade/>
       </p:transition>
@@ -39180,9 +39036,10 @@
           <a:lstStyle/>
           <a:p>
             <a:r>
-              <a:rPr lang="pt-BR" dirty="0"/>
-              <a:t>Arquivos de Imagens em Texto (ASCII)</a:t>
-            </a:r>
+              <a:rPr lang="en-BR" sz="2800" dirty="0"/>
+              <a:t>Representando imagens em arquivos-texto</a:t>
+            </a:r>
+            <a:endParaRPr lang="pt-BR" sz="2800" dirty="0"/>
           </a:p>
         </p:txBody>
       </p:sp>
@@ -39558,13 +39415,13 @@
   <p:clrMapOvr>
     <a:masterClrMapping/>
   </p:clrMapOvr>
-  <mc:AlternateContent xmlns:mc="http://schemas.openxmlformats.org/markup-compatibility/2006">
-    <mc:Choice xmlns:p14="http://schemas.microsoft.com/office/powerpoint/2010/main" Requires="p14">
+  <mc:AlternateContent xmlns:mc="http://schemas.openxmlformats.org/markup-compatibility/2006" xmlns:p14="http://schemas.microsoft.com/office/powerpoint/2010/main">
+    <mc:Choice Requires="p14">
       <p:transition spd="slow" p14:dur="1200">
         <p14:prism/>
       </p:transition>
     </mc:Choice>
-    <mc:Fallback>
+    <mc:Fallback xmlns="">
       <p:transition spd="slow">
         <p:fade/>
       </p:transition>
@@ -39606,9 +39463,10 @@
           <a:lstStyle/>
           <a:p>
             <a:r>
-              <a:rPr lang="pt-BR" dirty="0"/>
-              <a:t>Arquivos de Imagens em Texto (ASCII)</a:t>
-            </a:r>
+              <a:rPr lang="en-BR" sz="2800" dirty="0"/>
+              <a:t>Representando imagens em arquivos-texto</a:t>
+            </a:r>
+            <a:endParaRPr lang="pt-BR" sz="2800" dirty="0"/>
           </a:p>
         </p:txBody>
       </p:sp>
@@ -40052,13 +39910,13 @@
   <p:clrMapOvr>
     <a:masterClrMapping/>
   </p:clrMapOvr>
-  <mc:AlternateContent xmlns:mc="http://schemas.openxmlformats.org/markup-compatibility/2006">
-    <mc:Choice xmlns:p14="http://schemas.microsoft.com/office/powerpoint/2010/main" Requires="p14">
+  <mc:AlternateContent xmlns:mc="http://schemas.openxmlformats.org/markup-compatibility/2006" xmlns:p14="http://schemas.microsoft.com/office/powerpoint/2010/main">
+    <mc:Choice Requires="p14">
       <p:transition spd="slow" p14:dur="1200">
         <p14:prism/>
       </p:transition>
     </mc:Choice>
-    <mc:Fallback>
+    <mc:Fallback xmlns="">
       <p:transition spd="slow">
         <p:fade/>
       </p:transition>
@@ -40186,9 +40044,10 @@
           <a:lstStyle/>
           <a:p>
             <a:r>
-              <a:rPr lang="pt-BR" dirty="0"/>
-              <a:t>Arquivos de Imagens em Texto (ASCII)</a:t>
-            </a:r>
+              <a:rPr lang="en-BR" sz="2800" dirty="0"/>
+              <a:t>Representando imagens em arquivos-texto</a:t>
+            </a:r>
+            <a:endParaRPr lang="pt-BR" sz="2800" dirty="0"/>
           </a:p>
         </p:txBody>
       </p:sp>
@@ -40648,13 +40507,13 @@
   <p:clrMapOvr>
     <a:masterClrMapping/>
   </p:clrMapOvr>
-  <mc:AlternateContent xmlns:mc="http://schemas.openxmlformats.org/markup-compatibility/2006">
-    <mc:Choice xmlns:p14="http://schemas.microsoft.com/office/powerpoint/2010/main" Requires="p14">
+  <mc:AlternateContent xmlns:mc="http://schemas.openxmlformats.org/markup-compatibility/2006" xmlns:p14="http://schemas.microsoft.com/office/powerpoint/2010/main">
+    <mc:Choice Requires="p14">
       <p:transition spd="slow" p14:dur="1200">
         <p14:prism/>
       </p:transition>
     </mc:Choice>
-    <mc:Fallback>
+    <mc:Fallback xmlns="">
       <p:transition spd="slow">
         <p:fade/>
       </p:transition>
@@ -40813,13 +40672,13 @@
   <p:clrMapOvr>
     <a:masterClrMapping/>
   </p:clrMapOvr>
-  <mc:AlternateContent xmlns:mc="http://schemas.openxmlformats.org/markup-compatibility/2006">
-    <mc:Choice xmlns:p14="http://schemas.microsoft.com/office/powerpoint/2010/main" Requires="p14">
+  <mc:AlternateContent xmlns:mc="http://schemas.openxmlformats.org/markup-compatibility/2006" xmlns:p14="http://schemas.microsoft.com/office/powerpoint/2010/main">
+    <mc:Choice Requires="p14">
       <p:transition spd="slow" p14:dur="1200">
         <p14:prism/>
       </p:transition>
     </mc:Choice>
-    <mc:Fallback>
+    <mc:Fallback xmlns="">
       <p:transition spd="slow">
         <p:fade/>
       </p:transition>
@@ -41218,13 +41077,13 @@
   <p:clrMapOvr>
     <a:masterClrMapping/>
   </p:clrMapOvr>
-  <mc:AlternateContent xmlns:mc="http://schemas.openxmlformats.org/markup-compatibility/2006">
-    <mc:Choice xmlns:p14="http://schemas.microsoft.com/office/powerpoint/2010/main" Requires="p14">
+  <mc:AlternateContent xmlns:mc="http://schemas.openxmlformats.org/markup-compatibility/2006" xmlns:p14="http://schemas.microsoft.com/office/powerpoint/2010/main">
+    <mc:Choice Requires="p14">
       <p:transition spd="slow" p14:dur="1200">
         <p14:prism/>
       </p:transition>
     </mc:Choice>
-    <mc:Fallback>
+    <mc:Fallback xmlns="">
       <p:transition spd="slow">
         <p:fade/>
       </p:transition>
@@ -41533,7 +41392,7 @@
         <p:spPr>
           <a:xfrm>
             <a:off x="657226" y="1485900"/>
-            <a:ext cx="6279623" cy="4724400"/>
+            <a:ext cx="6341273" cy="4724400"/>
           </a:xfrm>
         </p:spPr>
         <p:txBody>
@@ -41543,12 +41402,16 @@
           <a:lstStyle/>
           <a:p>
             <a:r>
-              <a:rPr lang="pt-BR" sz="2000" dirty="0" err="1"/>
-              <a:t>Gottfried</a:t>
-            </a:r>
-            <a:r>
               <a:rPr lang="pt-BR" sz="2000" dirty="0"/>
-              <a:t> Wilhelm von Leibniz (1646-1716) é creditado como um dos inventores do cálculo diferencial e integral. Porém foi o primeiro a documentar e estudar profundamente o sistema binário de numeração (base 2). Em 1672 Leibniz começou a inventar uma máquina capaz de fazer as 4 operações aritméticas, o </a:t>
+              <a:t>Gottfried Wilhelm von Leibniz (1646-1716) é creditado como um dos inventores do cálculo diferencial e integral. </a:t>
+            </a:r>
+            <a:r>
+              <a:rPr lang="en-BR" sz="2000" dirty="0"/>
+              <a:t>Leibniz desenvolveu e publicou uma das primeiras exposições sistemáticas modernas da aritmética binária</a:t>
+            </a:r>
+            <a:r>
+              <a:rPr lang="pt-BR" sz="2000" dirty="0"/>
+              <a:t> (base 2). Em 1672 Leibniz começou a inventar uma máquina capaz de fazer as 4 operações aritméticas, o </a:t>
             </a:r>
             <a:r>
               <a:rPr lang="pt-BR" sz="2000" dirty="0" err="1"/>
@@ -41571,13 +41434,13 @@
   <p:clrMapOvr>
     <a:masterClrMapping/>
   </p:clrMapOvr>
-  <mc:AlternateContent xmlns:mc="http://schemas.openxmlformats.org/markup-compatibility/2006">
-    <mc:Choice xmlns:p14="http://schemas.microsoft.com/office/powerpoint/2010/main" Requires="p14">
+  <mc:AlternateContent xmlns:mc="http://schemas.openxmlformats.org/markup-compatibility/2006" xmlns:p14="http://schemas.microsoft.com/office/powerpoint/2010/main">
+    <mc:Choice Requires="p14">
       <p:transition spd="slow" p14:dur="1200">
         <p14:prism/>
       </p:transition>
     </mc:Choice>
-    <mc:Fallback>
+    <mc:Fallback xmlns="">
       <p:transition spd="slow">
         <p:fade/>
       </p:transition>
@@ -41885,10 +41748,10 @@
         </p:nvGrpSpPr>
         <p:grpSpPr>
           <a:xfrm>
-            <a:off x="5417025" y="1485900"/>
-            <a:ext cx="3514486" cy="3521786"/>
+            <a:off x="5378925" y="1485900"/>
+            <a:ext cx="3514486" cy="3798785"/>
             <a:chOff x="5417025" y="2272633"/>
-            <a:chExt cx="3514486" cy="3521786"/>
+            <a:chExt cx="3514486" cy="3798785"/>
           </a:xfrm>
         </p:grpSpPr>
         <p:pic>
@@ -41930,7 +41793,7 @@
           <p:spPr>
             <a:xfrm>
               <a:off x="5417025" y="5240421"/>
-              <a:ext cx="3514486" cy="553998"/>
+              <a:ext cx="3514486" cy="830997"/>
             </a:xfrm>
             <a:prstGeom prst="rect">
               <a:avLst/>
@@ -41942,9 +41805,14 @@
             </a:bodyPr>
             <a:lstStyle/>
             <a:p>
+              <a:pPr algn="ctr"/>
+              <a:r>
+                <a:rPr lang="en-BR" sz="1600" dirty="0"/>
+                <a:t>Marcações em madeira, ossos e outros materiais estão entre as formas mais antigas de registro de quantidades</a:t>
+              </a:r>
               <a:r>
                 <a:rPr lang="pt-BR" sz="1500" dirty="0"/>
-                <a:t>Marcações em pedaços de madeira foram as primeiras formas de numeração.</a:t>
+                <a:t>.</a:t>
               </a:r>
             </a:p>
           </p:txBody>
@@ -41960,13 +41828,13 @@
   <p:clrMapOvr>
     <a:masterClrMapping/>
   </p:clrMapOvr>
-  <mc:AlternateContent xmlns:mc="http://schemas.openxmlformats.org/markup-compatibility/2006">
-    <mc:Choice xmlns:p14="http://schemas.microsoft.com/office/powerpoint/2010/main" Requires="p14">
+  <mc:AlternateContent xmlns:mc="http://schemas.openxmlformats.org/markup-compatibility/2006" xmlns:p14="http://schemas.microsoft.com/office/powerpoint/2010/main">
+    <mc:Choice Requires="p14">
       <p:transition spd="slow" p14:dur="1200">
         <p14:prism/>
       </p:transition>
     </mc:Choice>
-    <mc:Fallback>
+    <mc:Fallback xmlns="">
       <p:transition spd="slow">
         <p:fade/>
       </p:transition>
@@ -42009,7 +41877,7 @@
           <a:p>
             <a:r>
               <a:rPr lang="pt-BR" dirty="0"/>
-              <a:t>Algarismos indo-arábicos</a:t>
+              <a:t>Como os algarismos chegaram a nós</a:t>
             </a:r>
           </a:p>
         </p:txBody>
@@ -42024,55 +41892,22 @@
             <p:ph idx="1"/>
           </p:nvPr>
         </p:nvSpPr>
-        <p:spPr>
-          <a:xfrm>
-            <a:off x="657225" y="1485900"/>
-            <a:ext cx="8256153" cy="4724400"/>
-          </a:xfrm>
-        </p:spPr>
+        <p:spPr/>
         <p:txBody>
           <a:bodyPr/>
           <a:lstStyle/>
           <a:p>
             <a:r>
               <a:rPr lang="pt-BR" dirty="0"/>
-              <a:t>O sistema de numeração hindu como a conhecemos hoje, pode ser atribuído a dois homens: o astrônomo </a:t>
-            </a:r>
-            <a:r>
-              <a:rPr lang="en-US" b="1" dirty="0" err="1"/>
-              <a:t>Ariabata</a:t>
-            </a:r>
-            <a:r>
-              <a:rPr lang="en-US" dirty="0"/>
-              <a:t> (</a:t>
-            </a:r>
-            <a:r>
-              <a:rPr lang="sa-IN" dirty="0"/>
-              <a:t>आर्यभट</a:t>
-            </a:r>
-            <a:r>
-              <a:rPr lang="en-US" dirty="0"/>
-              <a:t>) </a:t>
+              <a:t>No Liber </a:t>
+            </a:r>
+            <a:r>
+              <a:rPr lang="pt-BR" dirty="0" err="1"/>
+              <a:t>Abaci</a:t>
             </a:r>
             <a:r>
               <a:rPr lang="pt-BR" dirty="0"/>
-              <a:t>e seu pupilo </a:t>
-            </a:r>
-            <a:r>
-              <a:rPr lang="pt-BR" b="1" dirty="0" err="1"/>
-              <a:t>Bhāskara</a:t>
-            </a:r>
-            <a:r>
-              <a:rPr lang="pt-BR" b="1" dirty="0"/>
-              <a:t> </a:t>
-            </a:r>
-            <a:r>
-              <a:rPr lang="pt-BR" b="1" dirty="0" err="1"/>
-              <a:t>I</a:t>
-            </a:r>
-            <a:r>
-              <a:rPr lang="pt-BR" dirty="0"/>
-              <a:t>, durante 499-522 ac. Eles inventaram um sistema que se baseia na utilização da combinação de sílabas para formar os números, em um sistema incluindo a notação do zero.</a:t>
+              <a:t> (1202), Leonardo Fibonacci ajudou a difundir na Europa a numeração indo-arábica. </a:t>
             </a:r>
           </a:p>
         </p:txBody>
@@ -42115,181 +41950,6 @@
               <a:rPr lang="pt-BR" smtClean="0"/>
               <a:pPr/>
               <a:t>6</a:t>
-            </a:fld>
-            <a:endParaRPr lang="pt-BR" dirty="0"/>
-          </a:p>
-        </p:txBody>
-      </p:sp>
-      <p:pic>
-        <p:nvPicPr>
-          <p:cNvPr id="9" name="Picture 8" descr="91960-034-0E4CB8F9.gif"/>
-          <p:cNvPicPr>
-            <a:picLocks noChangeAspect="1"/>
-          </p:cNvPicPr>
-          <p:nvPr/>
-        </p:nvPicPr>
-        <p:blipFill>
-          <a:blip r:embed="rId3">
-            <a:extLst>
-              <a:ext uri="{28A0092B-C50C-407E-A947-70E740481C1C}">
-                <a14:useLocalDpi xmlns:a14="http://schemas.microsoft.com/office/drawing/2010/main" val="0"/>
-              </a:ext>
-            </a:extLst>
-          </a:blip>
-          <a:stretch>
-            <a:fillRect/>
-          </a:stretch>
-        </p:blipFill>
-        <p:spPr>
-          <a:xfrm>
-            <a:off x="819268" y="2995289"/>
-            <a:ext cx="7308732" cy="3697502"/>
-          </a:xfrm>
-          <a:prstGeom prst="rect">
-            <a:avLst/>
-          </a:prstGeom>
-        </p:spPr>
-      </p:pic>
-    </p:spTree>
-    <p:extLst>
-      <p:ext uri="{BB962C8B-B14F-4D97-AF65-F5344CB8AC3E}">
-        <p14:creationId xmlns:p14="http://schemas.microsoft.com/office/powerpoint/2010/main" val="1473815033"/>
-      </p:ext>
-    </p:extLst>
-  </p:cSld>
-  <p:clrMapOvr>
-    <a:masterClrMapping/>
-  </p:clrMapOvr>
-  <mc:AlternateContent xmlns:mc="http://schemas.openxmlformats.org/markup-compatibility/2006">
-    <mc:Choice xmlns:p14="http://schemas.microsoft.com/office/powerpoint/2010/main" Requires="p14">
-      <p:transition spd="slow" p14:dur="1200">
-        <p14:prism/>
-      </p:transition>
-    </mc:Choice>
-    <mc:Fallback>
-      <p:transition spd="slow">
-        <p:fade/>
-      </p:transition>
-    </mc:Fallback>
-  </mc:AlternateContent>
-</p:sld>
-</file>
-
-<file path=ppt/slides/slide7.xml><?xml version="1.0" encoding="utf-8"?>
-<p:sld xmlns:a="http://schemas.openxmlformats.org/drawingml/2006/main" xmlns:r="http://schemas.openxmlformats.org/officeDocument/2006/relationships" xmlns:p="http://schemas.openxmlformats.org/presentationml/2006/main">
-  <p:cSld>
-    <p:spTree>
-      <p:nvGrpSpPr>
-        <p:cNvPr id="1" name=""/>
-        <p:cNvGrpSpPr/>
-        <p:nvPr/>
-      </p:nvGrpSpPr>
-      <p:grpSpPr>
-        <a:xfrm>
-          <a:off x="0" y="0"/>
-          <a:ext cx="0" cy="0"/>
-          <a:chOff x="0" y="0"/>
-          <a:chExt cx="0" cy="0"/>
-        </a:xfrm>
-      </p:grpSpPr>
-      <p:sp>
-        <p:nvSpPr>
-          <p:cNvPr id="2" name="Title 1"/>
-          <p:cNvSpPr>
-            <a:spLocks noGrp="1"/>
-          </p:cNvSpPr>
-          <p:nvPr>
-            <p:ph type="title"/>
-          </p:nvPr>
-        </p:nvSpPr>
-        <p:spPr/>
-        <p:txBody>
-          <a:bodyPr/>
-          <a:lstStyle/>
-          <a:p>
-            <a:r>
-              <a:rPr lang="pt-BR" dirty="0"/>
-              <a:t>Como os algarismos chegaram a nós</a:t>
-            </a:r>
-          </a:p>
-        </p:txBody>
-      </p:sp>
-      <p:sp>
-        <p:nvSpPr>
-          <p:cNvPr id="3" name="Content Placeholder 2"/>
-          <p:cNvSpPr>
-            <a:spLocks noGrp="1"/>
-          </p:cNvSpPr>
-          <p:nvPr>
-            <p:ph idx="1"/>
-          </p:nvPr>
-        </p:nvSpPr>
-        <p:spPr/>
-        <p:txBody>
-          <a:bodyPr/>
-          <a:lstStyle/>
-          <a:p>
-            <a:r>
-              <a:rPr lang="pt-BR" dirty="0"/>
-              <a:t>No </a:t>
-            </a:r>
-            <a:r>
-              <a:rPr lang="pt-BR" dirty="0" err="1"/>
-              <a:t>Liber</a:t>
-            </a:r>
-            <a:r>
-              <a:rPr lang="pt-BR" dirty="0"/>
-              <a:t> </a:t>
-            </a:r>
-            <a:r>
-              <a:rPr lang="pt-BR" dirty="0" err="1"/>
-              <a:t>Abaci</a:t>
-            </a:r>
-            <a:r>
-              <a:rPr lang="pt-BR" dirty="0"/>
-              <a:t> (1202), Leonardo Fibonacci introduziu na Europa a numeração indo-arábica. </a:t>
-            </a:r>
-          </a:p>
-        </p:txBody>
-      </p:sp>
-      <p:sp>
-        <p:nvSpPr>
-          <p:cNvPr id="4" name="Text Placeholder 3"/>
-          <p:cNvSpPr>
-            <a:spLocks noGrp="1"/>
-          </p:cNvSpPr>
-          <p:nvPr>
-            <p:ph type="body" sz="quarter" idx="13"/>
-          </p:nvPr>
-        </p:nvSpPr>
-        <p:spPr/>
-        <p:txBody>
-          <a:bodyPr/>
-          <a:lstStyle/>
-          <a:p>
-            <a:endParaRPr lang="pt-BR"/>
-          </a:p>
-        </p:txBody>
-      </p:sp>
-      <p:sp>
-        <p:nvSpPr>
-          <p:cNvPr id="5" name="Slide Number Placeholder 4"/>
-          <p:cNvSpPr>
-            <a:spLocks noGrp="1"/>
-          </p:cNvSpPr>
-          <p:nvPr>
-            <p:ph type="sldNum" sz="quarter" idx="4"/>
-          </p:nvPr>
-        </p:nvSpPr>
-        <p:spPr/>
-        <p:txBody>
-          <a:bodyPr/>
-          <a:lstStyle/>
-          <a:p>
-            <a:fld id="{7FFE5E5C-C80A-4D8D-A711-3102A7BA9258}" type="slidenum">
-              <a:rPr lang="pt-BR" smtClean="0"/>
-              <a:pPr/>
-              <a:t>7</a:t>
             </a:fld>
             <a:endParaRPr lang="pt-BR" dirty="0"/>
           </a:p>
@@ -42494,13 +42154,13 @@
   <p:clrMapOvr>
     <a:masterClrMapping/>
   </p:clrMapOvr>
-  <mc:AlternateContent xmlns:mc="http://schemas.openxmlformats.org/markup-compatibility/2006">
-    <mc:Choice xmlns:p14="http://schemas.microsoft.com/office/powerpoint/2010/main" Requires="p14">
+  <mc:AlternateContent xmlns:mc="http://schemas.openxmlformats.org/markup-compatibility/2006" xmlns:p14="http://schemas.microsoft.com/office/powerpoint/2010/main">
+    <mc:Choice Requires="p14">
       <p:transition spd="slow" p14:dur="1200">
         <p14:prism/>
       </p:transition>
     </mc:Choice>
-    <mc:Fallback>
+    <mc:Fallback xmlns="">
       <p:transition spd="slow">
         <p:fade/>
       </p:transition>
@@ -42745,7 +42405,7 @@
 </p:sld>
 </file>
 
-<file path=ppt/slides/slide8.xml><?xml version="1.0" encoding="utf-8"?>
+<file path=ppt/slides/slide7.xml><?xml version="1.0" encoding="utf-8"?>
 <p:sld xmlns:a="http://schemas.openxmlformats.org/drawingml/2006/main" xmlns:r="http://schemas.openxmlformats.org/officeDocument/2006/relationships" xmlns:p="http://schemas.openxmlformats.org/presentationml/2006/main">
   <p:cSld>
     <p:spTree>
@@ -42803,7 +42463,7 @@
           <a:p>
             <a:r>
               <a:rPr lang="pt-BR" sz="2200" dirty="0"/>
-              <a:t>Os sistemas numéricos atuais, como o decimal indo-arábico, são chamados de sistemas de posicionamento, o que significa que a posição de um símbolo tem influência sobre o valor do símbolo, no caso múltiplos de 10. A explicação da base 10 é termos 10 dedos.</a:t>
+              <a:t>Os sistemas numéricos atuais, como o decimal indo-arábico, são chamados de sistemas posicionais, o que significa que a posição de um símbolo tem influência sobre o valor do símbolo, no caso múltiplos de 10. A prevalência histórica da base 10 é geralmente associada ao fato de termos dez dedos.</a:t>
             </a:r>
           </a:p>
           <a:p>
@@ -42848,7 +42508,7 @@
             <a:fld id="{7FFE5E5C-C80A-4D8D-A711-3102A7BA9258}" type="slidenum">
               <a:rPr lang="pt-BR" smtClean="0"/>
               <a:pPr/>
-              <a:t>8</a:t>
+              <a:t>7</a:t>
             </a:fld>
             <a:endParaRPr lang="pt-BR" dirty="0"/>
           </a:p>
@@ -42870,7 +42530,7 @@
         </p:blipFill>
         <p:spPr>
           <a:xfrm>
-            <a:off x="1390315" y="3414780"/>
+            <a:off x="1115644" y="3710522"/>
             <a:ext cx="3318779" cy="2691652"/>
           </a:xfrm>
           <a:prstGeom prst="rect">
@@ -42894,7 +42554,7 @@
         </p:blipFill>
         <p:spPr>
           <a:xfrm>
-            <a:off x="4892842" y="4064253"/>
+            <a:off x="4824379" y="4246815"/>
             <a:ext cx="3112168" cy="2337921"/>
           </a:xfrm>
           <a:prstGeom prst="rect">
@@ -42912,13 +42572,13 @@
   <p:clrMapOvr>
     <a:masterClrMapping/>
   </p:clrMapOvr>
-  <mc:AlternateContent xmlns:mc="http://schemas.openxmlformats.org/markup-compatibility/2006">
-    <mc:Choice xmlns:p14="http://schemas.microsoft.com/office/powerpoint/2010/main" Requires="p14">
+  <mc:AlternateContent xmlns:mc="http://schemas.openxmlformats.org/markup-compatibility/2006" xmlns:p14="http://schemas.microsoft.com/office/powerpoint/2010/main">
+    <mc:Choice Requires="p14">
       <p:transition spd="slow" p14:dur="1200">
         <p14:prism/>
       </p:transition>
     </mc:Choice>
-    <mc:Fallback>
+    <mc:Fallback xmlns="">
       <p:transition spd="slow">
         <p:fade/>
       </p:transition>
@@ -43168,7 +42828,7 @@
 </p:sld>
 </file>
 
-<file path=ppt/slides/slide9.xml><?xml version="1.0" encoding="utf-8"?>
+<file path=ppt/slides/slide8.xml><?xml version="1.0" encoding="utf-8"?>
 <p:sld xmlns:a="http://schemas.openxmlformats.org/drawingml/2006/main" xmlns:r="http://schemas.openxmlformats.org/officeDocument/2006/relationships" xmlns:p="http://schemas.openxmlformats.org/presentationml/2006/main">
   <p:cSld>
     <p:spTree>
@@ -43219,8 +42879,8 @@
         </p:nvSpPr>
         <p:spPr>
           <a:xfrm>
-            <a:off x="3946141" y="1485900"/>
-            <a:ext cx="5086734" cy="4724400"/>
+            <a:off x="3835017" y="1485900"/>
+            <a:ext cx="5197858" cy="4724400"/>
           </a:xfrm>
         </p:spPr>
         <p:txBody>
@@ -43230,29 +42890,37 @@
           <a:lstStyle/>
           <a:p>
             <a:r>
-              <a:rPr lang="pt-BR" sz="2400" dirty="0"/>
+              <a:rPr lang="pt-BR" sz="2300" dirty="0"/>
               <a:t>Além do </a:t>
             </a:r>
             <a:r>
-              <a:rPr lang="pt-BR" sz="2400" dirty="0" err="1"/>
+              <a:rPr lang="pt-BR" sz="2300" dirty="0" err="1"/>
               <a:t>radix</a:t>
             </a:r>
             <a:r>
-              <a:rPr lang="pt-BR" sz="2400" dirty="0"/>
-              <a:t> (base) decimal, qualquer outra base pode ser usada. Por exemplo a base 12 tem uma vantagem pois seria divisível por 1, 2, 3, 4, e 6. </a:t>
-            </a:r>
-          </a:p>
-          <a:p>
-            <a:endParaRPr lang="pt-BR" sz="2400" dirty="0"/>
-          </a:p>
-          <a:p>
-            <a:r>
-              <a:rPr lang="pt-BR" sz="2400" dirty="0"/>
-              <a:t>Internamente os computadores funcionam com o sistema binário, porém é mais comum usar base 8 e 16 para se programar computadores.</a:t>
-            </a:r>
-          </a:p>
-          <a:p>
-            <a:endParaRPr lang="pt-BR" sz="2400" dirty="0"/>
+              <a:rPr lang="pt-BR" sz="2300" dirty="0"/>
+              <a:t> (base) decimal, qualquer outra base pode ser usada. Por exemplo a base 12 tem a vantagem de ser divisível por 1, 2, 3, 4, e 6. </a:t>
+            </a:r>
+          </a:p>
+          <a:p>
+            <a:endParaRPr lang="pt-BR" sz="2300" dirty="0"/>
+          </a:p>
+          <a:p>
+            <a:r>
+              <a:rPr lang="pt-BR" sz="2300" dirty="0"/>
+              <a:t>Internamente os computadores funcionam com o sistema binário, porém é mais comum usarmos base 10 no dia a dia, e eventualmente a base 16 </a:t>
+            </a:r>
+            <a:r>
+              <a:rPr lang="en-BR" sz="2300" dirty="0"/>
+              <a:t>como representação compacta </a:t>
+            </a:r>
+            <a:r>
+              <a:rPr lang="pt-BR" sz="2300" dirty="0"/>
+              <a:t>de dados digitais.</a:t>
+            </a:r>
+          </a:p>
+          <a:p>
+            <a:endParaRPr lang="pt-BR" sz="2300" dirty="0"/>
           </a:p>
         </p:txBody>
       </p:sp>
@@ -43293,7 +42961,7 @@
             <a:fld id="{7FFE5E5C-C80A-4D8D-A711-3102A7BA9258}" type="slidenum">
               <a:rPr lang="pt-BR" smtClean="0"/>
               <a:pPr/>
-              <a:t>9</a:t>
+              <a:t>8</a:t>
             </a:fld>
             <a:endParaRPr lang="pt-BR" dirty="0"/>
           </a:p>
@@ -44633,18 +44301,1578 @@
   <p:clrMapOvr>
     <a:masterClrMapping/>
   </p:clrMapOvr>
-  <mc:AlternateContent xmlns:mc="http://schemas.openxmlformats.org/markup-compatibility/2006">
-    <mc:Choice xmlns:p14="http://schemas.microsoft.com/office/powerpoint/2010/main" Requires="p14">
+  <mc:AlternateContent xmlns:mc="http://schemas.openxmlformats.org/markup-compatibility/2006" xmlns:p14="http://schemas.microsoft.com/office/powerpoint/2010/main">
+    <mc:Choice Requires="p14">
       <p:transition spd="slow" p14:dur="1200">
         <p14:prism/>
       </p:transition>
     </mc:Choice>
-    <mc:Fallback>
+    <mc:Fallback xmlns="">
       <p:transition spd="slow">
         <p:fade/>
       </p:transition>
     </mc:Fallback>
   </mc:AlternateContent>
+</p:sld>
+</file>
+
+<file path=ppt/slides/slide9.xml><?xml version="1.0" encoding="utf-8"?>
+<p:sld xmlns:a="http://schemas.openxmlformats.org/drawingml/2006/main" xmlns:r="http://schemas.openxmlformats.org/officeDocument/2006/relationships" xmlns:p="http://schemas.openxmlformats.org/presentationml/2006/main">
+  <p:cSld>
+    <p:spTree>
+      <p:nvGrpSpPr>
+        <p:cNvPr id="1" name=""/>
+        <p:cNvGrpSpPr/>
+        <p:nvPr/>
+      </p:nvGrpSpPr>
+      <p:grpSpPr>
+        <a:xfrm>
+          <a:off x="0" y="0"/>
+          <a:ext cx="0" cy="0"/>
+          <a:chOff x="0" y="0"/>
+          <a:chExt cx="0" cy="0"/>
+        </a:xfrm>
+      </p:grpSpPr>
+      <p:sp>
+        <p:nvSpPr>
+          <p:cNvPr id="2" name="Title 1"/>
+          <p:cNvSpPr>
+            <a:spLocks noGrp="1"/>
+          </p:cNvSpPr>
+          <p:nvPr>
+            <p:ph type="title"/>
+          </p:nvPr>
+        </p:nvSpPr>
+        <p:spPr/>
+        <p:txBody>
+          <a:bodyPr/>
+          <a:lstStyle/>
+          <a:p>
+            <a:r>
+              <a:rPr lang="pt-BR" dirty="0"/>
+              <a:t>Dados Binários (e Hexadecimais)</a:t>
+            </a:r>
+          </a:p>
+        </p:txBody>
+      </p:sp>
+      <p:sp>
+        <p:nvSpPr>
+          <p:cNvPr id="3" name="Content Placeholder 2"/>
+          <p:cNvSpPr>
+            <a:spLocks noGrp="1"/>
+          </p:cNvSpPr>
+          <p:nvPr>
+            <p:ph idx="1"/>
+          </p:nvPr>
+        </p:nvSpPr>
+        <p:spPr/>
+        <p:txBody>
+          <a:bodyPr/>
+          <a:lstStyle/>
+          <a:p>
+            <a:r>
+              <a:rPr lang="pt-BR" dirty="0"/>
+              <a:t>Cada dígito binário representa um bit. </a:t>
+            </a:r>
+            <a:r>
+              <a:rPr lang="en-BR" dirty="0"/>
+              <a:t>Um byte possui 8 bits. Dados são frequentemente organizados em grupos de 1, 2, 4 ou 8 bytes (8, 16, 32 ou 64 bits).</a:t>
+            </a:r>
+            <a:endParaRPr lang="pt-BR" dirty="0"/>
+          </a:p>
+          <a:p>
+            <a:endParaRPr lang="pt-BR" dirty="0"/>
+          </a:p>
+          <a:p>
+            <a:endParaRPr lang="pt-BR" dirty="0"/>
+          </a:p>
+          <a:p>
+            <a:endParaRPr lang="pt-BR" dirty="0"/>
+          </a:p>
+          <a:p>
+            <a:endParaRPr lang="pt-BR" dirty="0"/>
+          </a:p>
+          <a:p>
+            <a:endParaRPr lang="pt-BR" dirty="0"/>
+          </a:p>
+          <a:p>
+            <a:endParaRPr lang="pt-BR" dirty="0"/>
+          </a:p>
+          <a:p>
+            <a:endParaRPr lang="pt-BR" dirty="0"/>
+          </a:p>
+          <a:p>
+            <a:endParaRPr lang="pt-BR" dirty="0"/>
+          </a:p>
+          <a:p>
+            <a:endParaRPr lang="pt-BR" dirty="0"/>
+          </a:p>
+        </p:txBody>
+      </p:sp>
+      <p:sp>
+        <p:nvSpPr>
+          <p:cNvPr id="4" name="Text Placeholder 3"/>
+          <p:cNvSpPr>
+            <a:spLocks noGrp="1"/>
+          </p:cNvSpPr>
+          <p:nvPr>
+            <p:ph type="body" sz="quarter" idx="13"/>
+          </p:nvPr>
+        </p:nvSpPr>
+        <p:spPr/>
+        <p:txBody>
+          <a:bodyPr/>
+          <a:lstStyle/>
+          <a:p>
+            <a:endParaRPr lang="pt-BR"/>
+          </a:p>
+        </p:txBody>
+      </p:sp>
+      <p:sp>
+        <p:nvSpPr>
+          <p:cNvPr id="5" name="Slide Number Placeholder 4"/>
+          <p:cNvSpPr>
+            <a:spLocks noGrp="1"/>
+          </p:cNvSpPr>
+          <p:nvPr>
+            <p:ph type="sldNum" sz="quarter" idx="4"/>
+          </p:nvPr>
+        </p:nvSpPr>
+        <p:spPr/>
+        <p:txBody>
+          <a:bodyPr/>
+          <a:lstStyle/>
+          <a:p>
+            <a:fld id="{7FFE5E5C-C80A-4D8D-A711-3102A7BA9258}" type="slidenum">
+              <a:rPr lang="pt-BR" smtClean="0"/>
+              <a:pPr/>
+              <a:t>9</a:t>
+            </a:fld>
+            <a:endParaRPr lang="pt-BR" dirty="0"/>
+          </a:p>
+        </p:txBody>
+      </p:sp>
+      <p:grpSp>
+        <p:nvGrpSpPr>
+          <p:cNvPr id="6" name="Group 17"/>
+          <p:cNvGrpSpPr>
+            <a:grpSpLocks/>
+          </p:cNvGrpSpPr>
+          <p:nvPr/>
+        </p:nvGrpSpPr>
+        <p:grpSpPr bwMode="auto">
+          <a:xfrm>
+            <a:off x="2085975" y="3746814"/>
+            <a:ext cx="4648200" cy="508000"/>
+            <a:chOff x="1905000" y="3886200"/>
+            <a:chExt cx="7086600" cy="773723"/>
+          </a:xfrm>
+        </p:grpSpPr>
+        <p:sp>
+          <p:nvSpPr>
+            <p:cNvPr id="7" name="Rectangle 6"/>
+            <p:cNvSpPr/>
+            <p:nvPr/>
+          </p:nvSpPr>
+          <p:spPr bwMode="auto">
+            <a:xfrm>
+              <a:off x="1905000" y="3886200"/>
+              <a:ext cx="837419" cy="773723"/>
+            </a:xfrm>
+            <a:prstGeom prst="rect">
+              <a:avLst/>
+            </a:prstGeom>
+            <a:solidFill>
+              <a:schemeClr val="bg1">
+                <a:lumMod val="65000"/>
+                <a:lumOff val="35000"/>
+              </a:schemeClr>
+            </a:solidFill>
+            <a:ln w="9525" cap="flat" cmpd="sng" algn="ctr">
+              <a:solidFill>
+                <a:schemeClr val="tx1"/>
+              </a:solidFill>
+              <a:prstDash val="solid"/>
+              <a:round/>
+              <a:headEnd type="none" w="med" len="med"/>
+              <a:tailEnd type="none" w="med" len="med"/>
+            </a:ln>
+            <a:effectLst/>
+          </p:spPr>
+          <p:txBody>
+            <a:bodyPr tIns="91440" bIns="91440" anchor="ctr"/>
+            <a:lstStyle/>
+            <a:p>
+              <a:pPr algn="ctr" defTabSz="669925" eaLnBrk="0" hangingPunct="0">
+                <a:spcBef>
+                  <a:spcPct val="50000"/>
+                </a:spcBef>
+                <a:defRPr/>
+              </a:pPr>
+              <a:r>
+                <a:rPr lang="pt-BR" sz="2800">
+                  <a:solidFill>
+                    <a:srgbClr val="000000"/>
+                  </a:solidFill>
+                  <a:latin typeface="+mn-lt"/>
+                </a:rPr>
+                <a:t>1</a:t>
+              </a:r>
+              <a:endParaRPr lang="en-US" sz="2800">
+                <a:solidFill>
+                  <a:srgbClr val="000000"/>
+                </a:solidFill>
+                <a:latin typeface="+mn-lt"/>
+              </a:endParaRPr>
+            </a:p>
+          </p:txBody>
+        </p:sp>
+        <p:sp>
+          <p:nvSpPr>
+            <p:cNvPr id="8" name="Rectangle 7"/>
+            <p:cNvSpPr/>
+            <p:nvPr/>
+          </p:nvSpPr>
+          <p:spPr bwMode="auto">
+            <a:xfrm>
+              <a:off x="2798087" y="3886200"/>
+              <a:ext cx="837419" cy="773723"/>
+            </a:xfrm>
+            <a:prstGeom prst="rect">
+              <a:avLst/>
+            </a:prstGeom>
+            <a:solidFill>
+              <a:schemeClr val="bg1">
+                <a:lumMod val="65000"/>
+                <a:lumOff val="35000"/>
+              </a:schemeClr>
+            </a:solidFill>
+            <a:ln w="9525" cap="flat" cmpd="sng" algn="ctr">
+              <a:solidFill>
+                <a:schemeClr val="tx1"/>
+              </a:solidFill>
+              <a:prstDash val="solid"/>
+              <a:round/>
+              <a:headEnd type="none" w="med" len="med"/>
+              <a:tailEnd type="none" w="med" len="med"/>
+            </a:ln>
+            <a:effectLst/>
+          </p:spPr>
+          <p:txBody>
+            <a:bodyPr tIns="91440" bIns="91440" anchor="ctr"/>
+            <a:lstStyle/>
+            <a:p>
+              <a:pPr algn="ctr" defTabSz="669925" eaLnBrk="0" hangingPunct="0">
+                <a:spcBef>
+                  <a:spcPct val="50000"/>
+                </a:spcBef>
+                <a:defRPr/>
+              </a:pPr>
+              <a:r>
+                <a:rPr lang="pt-BR" sz="2800">
+                  <a:solidFill>
+                    <a:srgbClr val="000000"/>
+                  </a:solidFill>
+                  <a:latin typeface="+mn-lt"/>
+                </a:rPr>
+                <a:t>1</a:t>
+              </a:r>
+              <a:endParaRPr lang="en-US" sz="2800">
+                <a:solidFill>
+                  <a:srgbClr val="000000"/>
+                </a:solidFill>
+                <a:latin typeface="+mn-lt"/>
+              </a:endParaRPr>
+            </a:p>
+          </p:txBody>
+        </p:sp>
+        <p:sp>
+          <p:nvSpPr>
+            <p:cNvPr id="9" name="Rectangle 8"/>
+            <p:cNvSpPr/>
+            <p:nvPr/>
+          </p:nvSpPr>
+          <p:spPr bwMode="auto">
+            <a:xfrm>
+              <a:off x="3691172" y="3886200"/>
+              <a:ext cx="837419" cy="773723"/>
+            </a:xfrm>
+            <a:prstGeom prst="rect">
+              <a:avLst/>
+            </a:prstGeom>
+            <a:solidFill>
+              <a:schemeClr val="bg1">
+                <a:lumMod val="65000"/>
+                <a:lumOff val="35000"/>
+              </a:schemeClr>
+            </a:solidFill>
+            <a:ln w="9525" cap="flat" cmpd="sng" algn="ctr">
+              <a:solidFill>
+                <a:schemeClr val="tx1"/>
+              </a:solidFill>
+              <a:prstDash val="solid"/>
+              <a:round/>
+              <a:headEnd type="none" w="med" len="med"/>
+              <a:tailEnd type="none" w="med" len="med"/>
+            </a:ln>
+            <a:effectLst/>
+          </p:spPr>
+          <p:txBody>
+            <a:bodyPr tIns="91440" bIns="91440" anchor="ctr"/>
+            <a:lstStyle/>
+            <a:p>
+              <a:pPr algn="ctr" defTabSz="669925" eaLnBrk="0" hangingPunct="0">
+                <a:spcBef>
+                  <a:spcPct val="50000"/>
+                </a:spcBef>
+                <a:defRPr/>
+              </a:pPr>
+              <a:r>
+                <a:rPr lang="pt-BR" sz="2800">
+                  <a:solidFill>
+                    <a:srgbClr val="000000"/>
+                  </a:solidFill>
+                  <a:latin typeface="+mn-lt"/>
+                </a:rPr>
+                <a:t>1</a:t>
+              </a:r>
+              <a:endParaRPr lang="en-US" sz="2800">
+                <a:solidFill>
+                  <a:srgbClr val="000000"/>
+                </a:solidFill>
+                <a:latin typeface="+mn-lt"/>
+              </a:endParaRPr>
+            </a:p>
+          </p:txBody>
+        </p:sp>
+        <p:sp>
+          <p:nvSpPr>
+            <p:cNvPr id="10" name="Rectangle 9"/>
+            <p:cNvSpPr/>
+            <p:nvPr/>
+          </p:nvSpPr>
+          <p:spPr bwMode="auto">
+            <a:xfrm>
+              <a:off x="4581837" y="3886200"/>
+              <a:ext cx="839840" cy="773723"/>
+            </a:xfrm>
+            <a:prstGeom prst="rect">
+              <a:avLst/>
+            </a:prstGeom>
+            <a:solidFill>
+              <a:schemeClr val="bg1">
+                <a:lumMod val="65000"/>
+                <a:lumOff val="35000"/>
+              </a:schemeClr>
+            </a:solidFill>
+            <a:ln w="9525" cap="flat" cmpd="sng" algn="ctr">
+              <a:solidFill>
+                <a:schemeClr val="tx1"/>
+              </a:solidFill>
+              <a:prstDash val="solid"/>
+              <a:round/>
+              <a:headEnd type="none" w="med" len="med"/>
+              <a:tailEnd type="none" w="med" len="med"/>
+            </a:ln>
+            <a:effectLst/>
+          </p:spPr>
+          <p:txBody>
+            <a:bodyPr tIns="91440" bIns="91440" anchor="ctr"/>
+            <a:lstStyle/>
+            <a:p>
+              <a:pPr algn="ctr" defTabSz="669925" eaLnBrk="0" hangingPunct="0">
+                <a:spcBef>
+                  <a:spcPct val="50000"/>
+                </a:spcBef>
+                <a:defRPr/>
+              </a:pPr>
+              <a:r>
+                <a:rPr lang="pt-BR" sz="2800" dirty="0">
+                  <a:solidFill>
+                    <a:srgbClr val="000000"/>
+                  </a:solidFill>
+                  <a:latin typeface="+mn-lt"/>
+                </a:rPr>
+                <a:t>1</a:t>
+              </a:r>
+              <a:endParaRPr lang="en-US" sz="2800" dirty="0">
+                <a:solidFill>
+                  <a:srgbClr val="000000"/>
+                </a:solidFill>
+                <a:latin typeface="+mn-lt"/>
+              </a:endParaRPr>
+            </a:p>
+          </p:txBody>
+        </p:sp>
+        <p:sp>
+          <p:nvSpPr>
+            <p:cNvPr id="11" name="Rectangle 10"/>
+            <p:cNvSpPr/>
+            <p:nvPr/>
+          </p:nvSpPr>
+          <p:spPr bwMode="auto">
+            <a:xfrm>
+              <a:off x="5474924" y="3886200"/>
+              <a:ext cx="839839" cy="773723"/>
+            </a:xfrm>
+            <a:prstGeom prst="rect">
+              <a:avLst/>
+            </a:prstGeom>
+            <a:solidFill>
+              <a:schemeClr val="bg1">
+                <a:lumMod val="65000"/>
+                <a:lumOff val="35000"/>
+              </a:schemeClr>
+            </a:solidFill>
+            <a:ln w="9525" cap="flat" cmpd="sng" algn="ctr">
+              <a:solidFill>
+                <a:schemeClr val="tx1"/>
+              </a:solidFill>
+              <a:prstDash val="solid"/>
+              <a:round/>
+              <a:headEnd type="none" w="med" len="med"/>
+              <a:tailEnd type="none" w="med" len="med"/>
+            </a:ln>
+            <a:effectLst/>
+          </p:spPr>
+          <p:txBody>
+            <a:bodyPr tIns="91440" bIns="91440" anchor="ctr"/>
+            <a:lstStyle/>
+            <a:p>
+              <a:pPr algn="ctr" defTabSz="669925" eaLnBrk="0" hangingPunct="0">
+                <a:spcBef>
+                  <a:spcPct val="50000"/>
+                </a:spcBef>
+                <a:defRPr/>
+              </a:pPr>
+              <a:r>
+                <a:rPr lang="pt-BR" sz="2800">
+                  <a:solidFill>
+                    <a:srgbClr val="000000"/>
+                  </a:solidFill>
+                  <a:latin typeface="+mn-lt"/>
+                </a:rPr>
+                <a:t>1</a:t>
+              </a:r>
+              <a:endParaRPr lang="en-US" sz="2800">
+                <a:solidFill>
+                  <a:srgbClr val="000000"/>
+                </a:solidFill>
+                <a:latin typeface="+mn-lt"/>
+              </a:endParaRPr>
+            </a:p>
+          </p:txBody>
+        </p:sp>
+        <p:sp>
+          <p:nvSpPr>
+            <p:cNvPr id="12" name="Rectangle 11"/>
+            <p:cNvSpPr/>
+            <p:nvPr/>
+          </p:nvSpPr>
+          <p:spPr bwMode="auto">
+            <a:xfrm>
+              <a:off x="6368009" y="3886200"/>
+              <a:ext cx="837419" cy="773723"/>
+            </a:xfrm>
+            <a:prstGeom prst="rect">
+              <a:avLst/>
+            </a:prstGeom>
+            <a:solidFill>
+              <a:schemeClr val="bg1">
+                <a:lumMod val="65000"/>
+                <a:lumOff val="35000"/>
+              </a:schemeClr>
+            </a:solidFill>
+            <a:ln w="9525" cap="flat" cmpd="sng" algn="ctr">
+              <a:solidFill>
+                <a:schemeClr val="tx1"/>
+              </a:solidFill>
+              <a:prstDash val="solid"/>
+              <a:round/>
+              <a:headEnd type="none" w="med" len="med"/>
+              <a:tailEnd type="none" w="med" len="med"/>
+            </a:ln>
+            <a:effectLst/>
+          </p:spPr>
+          <p:txBody>
+            <a:bodyPr tIns="91440" bIns="91440" anchor="ctr"/>
+            <a:lstStyle/>
+            <a:p>
+              <a:pPr algn="ctr" defTabSz="669925" eaLnBrk="0" hangingPunct="0">
+                <a:spcBef>
+                  <a:spcPct val="50000"/>
+                </a:spcBef>
+                <a:defRPr/>
+              </a:pPr>
+              <a:r>
+                <a:rPr lang="pt-BR" sz="2800">
+                  <a:solidFill>
+                    <a:srgbClr val="000000"/>
+                  </a:solidFill>
+                  <a:latin typeface="+mn-lt"/>
+                </a:rPr>
+                <a:t>1</a:t>
+              </a:r>
+              <a:endParaRPr lang="en-US" sz="2800">
+                <a:solidFill>
+                  <a:srgbClr val="000000"/>
+                </a:solidFill>
+                <a:latin typeface="+mn-lt"/>
+              </a:endParaRPr>
+            </a:p>
+          </p:txBody>
+        </p:sp>
+        <p:sp>
+          <p:nvSpPr>
+            <p:cNvPr id="13" name="Rectangle 12"/>
+            <p:cNvSpPr/>
+            <p:nvPr/>
+          </p:nvSpPr>
+          <p:spPr bwMode="auto">
+            <a:xfrm>
+              <a:off x="7261096" y="3886200"/>
+              <a:ext cx="837419" cy="773723"/>
+            </a:xfrm>
+            <a:prstGeom prst="rect">
+              <a:avLst/>
+            </a:prstGeom>
+            <a:solidFill>
+              <a:schemeClr val="bg1">
+                <a:lumMod val="65000"/>
+                <a:lumOff val="35000"/>
+              </a:schemeClr>
+            </a:solidFill>
+            <a:ln w="9525" cap="flat" cmpd="sng" algn="ctr">
+              <a:solidFill>
+                <a:schemeClr val="tx1"/>
+              </a:solidFill>
+              <a:prstDash val="solid"/>
+              <a:round/>
+              <a:headEnd type="none" w="med" len="med"/>
+              <a:tailEnd type="none" w="med" len="med"/>
+            </a:ln>
+            <a:effectLst/>
+          </p:spPr>
+          <p:txBody>
+            <a:bodyPr tIns="91440" bIns="91440" anchor="ctr"/>
+            <a:lstStyle/>
+            <a:p>
+              <a:pPr algn="ctr" defTabSz="669925" eaLnBrk="0" hangingPunct="0">
+                <a:spcBef>
+                  <a:spcPct val="50000"/>
+                </a:spcBef>
+                <a:defRPr/>
+              </a:pPr>
+              <a:r>
+                <a:rPr lang="pt-BR" sz="2800">
+                  <a:solidFill>
+                    <a:srgbClr val="000000"/>
+                  </a:solidFill>
+                  <a:latin typeface="+mn-lt"/>
+                </a:rPr>
+                <a:t>1</a:t>
+              </a:r>
+              <a:endParaRPr lang="en-US" sz="2800">
+                <a:solidFill>
+                  <a:srgbClr val="000000"/>
+                </a:solidFill>
+                <a:latin typeface="+mn-lt"/>
+              </a:endParaRPr>
+            </a:p>
+          </p:txBody>
+        </p:sp>
+        <p:sp>
+          <p:nvSpPr>
+            <p:cNvPr id="14" name="Rectangle 13"/>
+            <p:cNvSpPr/>
+            <p:nvPr/>
+          </p:nvSpPr>
+          <p:spPr bwMode="auto">
+            <a:xfrm>
+              <a:off x="8154181" y="3886200"/>
+              <a:ext cx="837419" cy="773723"/>
+            </a:xfrm>
+            <a:prstGeom prst="rect">
+              <a:avLst/>
+            </a:prstGeom>
+            <a:solidFill>
+              <a:schemeClr val="bg1">
+                <a:lumMod val="65000"/>
+                <a:lumOff val="35000"/>
+              </a:schemeClr>
+            </a:solidFill>
+            <a:ln w="9525" cap="flat" cmpd="sng" algn="ctr">
+              <a:solidFill>
+                <a:schemeClr val="tx1"/>
+              </a:solidFill>
+              <a:prstDash val="solid"/>
+              <a:round/>
+              <a:headEnd type="none" w="med" len="med"/>
+              <a:tailEnd type="none" w="med" len="med"/>
+            </a:ln>
+            <a:effectLst/>
+          </p:spPr>
+          <p:txBody>
+            <a:bodyPr tIns="91440" bIns="91440" anchor="ctr"/>
+            <a:lstStyle/>
+            <a:p>
+              <a:pPr algn="ctr" defTabSz="669925" eaLnBrk="0" hangingPunct="0">
+                <a:spcBef>
+                  <a:spcPct val="50000"/>
+                </a:spcBef>
+                <a:defRPr/>
+              </a:pPr>
+              <a:r>
+                <a:rPr lang="pt-BR" sz="2800">
+                  <a:solidFill>
+                    <a:srgbClr val="000000"/>
+                  </a:solidFill>
+                  <a:latin typeface="+mn-lt"/>
+                </a:rPr>
+                <a:t>1</a:t>
+              </a:r>
+              <a:endParaRPr lang="en-US" sz="2800">
+                <a:solidFill>
+                  <a:srgbClr val="000000"/>
+                </a:solidFill>
+                <a:latin typeface="+mn-lt"/>
+              </a:endParaRPr>
+            </a:p>
+          </p:txBody>
+        </p:sp>
+      </p:grpSp>
+      <p:grpSp>
+        <p:nvGrpSpPr>
+          <p:cNvPr id="25" name="Group 24"/>
+          <p:cNvGrpSpPr/>
+          <p:nvPr/>
+        </p:nvGrpSpPr>
+        <p:grpSpPr>
+          <a:xfrm>
+            <a:off x="352153" y="4313418"/>
+            <a:ext cx="3036138" cy="1297536"/>
+            <a:chOff x="352153" y="4313418"/>
+            <a:chExt cx="3036138" cy="1297536"/>
+          </a:xfrm>
+        </p:grpSpPr>
+        <p:sp>
+          <p:nvSpPr>
+            <p:cNvPr id="15" name="Rectangle 14"/>
+            <p:cNvSpPr/>
+            <p:nvPr/>
+          </p:nvSpPr>
+          <p:spPr>
+            <a:xfrm>
+              <a:off x="352153" y="4697884"/>
+              <a:ext cx="3036138" cy="913070"/>
+            </a:xfrm>
+            <a:prstGeom prst="rect">
+              <a:avLst/>
+            </a:prstGeom>
+            <a:ln>
+              <a:solidFill>
+                <a:srgbClr val="000000"/>
+              </a:solidFill>
+              <a:prstDash val="sysDash"/>
+            </a:ln>
+          </p:spPr>
+          <p:txBody>
+            <a:bodyPr wrap="none">
+              <a:spAutoFit/>
+            </a:bodyPr>
+            <a:lstStyle/>
+            <a:p>
+              <a:pPr algn="ctr"/>
+              <a:r>
+                <a:rPr lang="pt-BR" sz="3200" baseline="30000" dirty="0"/>
+                <a:t>bit</a:t>
+              </a:r>
+              <a:r>
+                <a:rPr lang="pt-BR" sz="3200" dirty="0"/>
+                <a:t> </a:t>
+              </a:r>
+              <a:r>
+                <a:rPr lang="pt-BR" sz="3200" baseline="30000" dirty="0"/>
+                <a:t>mais significativo</a:t>
+              </a:r>
+            </a:p>
+            <a:p>
+              <a:pPr algn="ctr"/>
+              <a:r>
+                <a:rPr lang="en-US" sz="3200" baseline="30000" dirty="0"/>
+                <a:t>(MSB) most significant bit</a:t>
+              </a:r>
+              <a:endParaRPr lang="en-US" sz="3200" dirty="0"/>
+            </a:p>
+          </p:txBody>
+        </p:sp>
+        <p:cxnSp>
+          <p:nvCxnSpPr>
+            <p:cNvPr id="16" name="Straight Arrow Connector 15"/>
+            <p:cNvCxnSpPr>
+              <a:stCxn id="15" idx="0"/>
+            </p:cNvCxnSpPr>
+            <p:nvPr/>
+          </p:nvCxnSpPr>
+          <p:spPr>
+            <a:xfrm flipV="1">
+              <a:off x="1870222" y="4313418"/>
+              <a:ext cx="215753" cy="384466"/>
+            </a:xfrm>
+            <a:prstGeom prst="straightConnector1">
+              <a:avLst/>
+            </a:prstGeom>
+            <a:ln>
+              <a:solidFill>
+                <a:srgbClr val="000000"/>
+              </a:solidFill>
+              <a:tailEnd type="arrow"/>
+            </a:ln>
+          </p:spPr>
+          <p:style>
+            <a:lnRef idx="2">
+              <a:schemeClr val="accent1"/>
+            </a:lnRef>
+            <a:fillRef idx="0">
+              <a:schemeClr val="accent1"/>
+            </a:fillRef>
+            <a:effectRef idx="1">
+              <a:schemeClr val="accent1"/>
+            </a:effectRef>
+            <a:fontRef idx="minor">
+              <a:schemeClr val="tx1"/>
+            </a:fontRef>
+          </p:style>
+        </p:cxnSp>
+      </p:grpSp>
+      <p:grpSp>
+        <p:nvGrpSpPr>
+          <p:cNvPr id="26" name="Group 25"/>
+          <p:cNvGrpSpPr/>
+          <p:nvPr/>
+        </p:nvGrpSpPr>
+        <p:grpSpPr>
+          <a:xfrm>
+            <a:off x="5685599" y="4289460"/>
+            <a:ext cx="2990237" cy="1297536"/>
+            <a:chOff x="5685599" y="4289460"/>
+            <a:chExt cx="2990237" cy="1297536"/>
+          </a:xfrm>
+        </p:grpSpPr>
+        <p:sp>
+          <p:nvSpPr>
+            <p:cNvPr id="19" name="Rectangle 18"/>
+            <p:cNvSpPr/>
+            <p:nvPr/>
+          </p:nvSpPr>
+          <p:spPr>
+            <a:xfrm>
+              <a:off x="5685599" y="4673926"/>
+              <a:ext cx="2990237" cy="913070"/>
+            </a:xfrm>
+            <a:prstGeom prst="rect">
+              <a:avLst/>
+            </a:prstGeom>
+            <a:ln>
+              <a:solidFill>
+                <a:srgbClr val="000000"/>
+              </a:solidFill>
+              <a:prstDash val="sysDash"/>
+            </a:ln>
+          </p:spPr>
+          <p:txBody>
+            <a:bodyPr wrap="square">
+              <a:spAutoFit/>
+            </a:bodyPr>
+            <a:lstStyle/>
+            <a:p>
+              <a:pPr algn="ctr"/>
+              <a:r>
+                <a:rPr lang="pt-BR" sz="3200" baseline="30000" dirty="0"/>
+                <a:t>bit</a:t>
+              </a:r>
+              <a:r>
+                <a:rPr lang="pt-BR" sz="3200" dirty="0"/>
+                <a:t> </a:t>
+              </a:r>
+              <a:r>
+                <a:rPr lang="pt-BR" sz="3200" baseline="30000" dirty="0"/>
+                <a:t>menos significativo</a:t>
+              </a:r>
+            </a:p>
+            <a:p>
+              <a:pPr algn="ctr"/>
+              <a:r>
+                <a:rPr lang="en-US" sz="3200" baseline="30000" dirty="0"/>
+                <a:t>(LSB) least significant bit</a:t>
+              </a:r>
+              <a:endParaRPr lang="en-US" sz="3200" dirty="0"/>
+            </a:p>
+          </p:txBody>
+        </p:sp>
+        <p:cxnSp>
+          <p:nvCxnSpPr>
+            <p:cNvPr id="20" name="Straight Arrow Connector 19"/>
+            <p:cNvCxnSpPr>
+              <a:stCxn id="19" idx="0"/>
+            </p:cNvCxnSpPr>
+            <p:nvPr/>
+          </p:nvCxnSpPr>
+          <p:spPr>
+            <a:xfrm flipH="1" flipV="1">
+              <a:off x="6758136" y="4289460"/>
+              <a:ext cx="422582" cy="384466"/>
+            </a:xfrm>
+            <a:prstGeom prst="straightConnector1">
+              <a:avLst/>
+            </a:prstGeom>
+            <a:ln>
+              <a:solidFill>
+                <a:srgbClr val="000000"/>
+              </a:solidFill>
+              <a:tailEnd type="arrow"/>
+            </a:ln>
+          </p:spPr>
+          <p:style>
+            <a:lnRef idx="2">
+              <a:schemeClr val="accent1"/>
+            </a:lnRef>
+            <a:fillRef idx="0">
+              <a:schemeClr val="accent1"/>
+            </a:fillRef>
+            <a:effectRef idx="1">
+              <a:schemeClr val="accent1"/>
+            </a:effectRef>
+            <a:fontRef idx="minor">
+              <a:schemeClr val="tx1"/>
+            </a:fontRef>
+          </p:style>
+        </p:cxnSp>
+      </p:grpSp>
+      <p:sp>
+        <p:nvSpPr>
+          <p:cNvPr id="17" name="Left Brace 16"/>
+          <p:cNvSpPr/>
+          <p:nvPr/>
+        </p:nvSpPr>
+        <p:spPr>
+          <a:xfrm rot="5400000">
+            <a:off x="3052349" y="2299295"/>
+            <a:ext cx="373890" cy="2306638"/>
+          </a:xfrm>
+          <a:prstGeom prst="leftBrace">
+            <a:avLst/>
+          </a:prstGeom>
+        </p:spPr>
+        <p:style>
+          <a:lnRef idx="1">
+            <a:schemeClr val="accent1"/>
+          </a:lnRef>
+          <a:fillRef idx="0">
+            <a:schemeClr val="accent1"/>
+          </a:fillRef>
+          <a:effectRef idx="0">
+            <a:schemeClr val="accent1"/>
+          </a:effectRef>
+          <a:fontRef idx="minor">
+            <a:schemeClr val="tx1"/>
+          </a:fontRef>
+        </p:style>
+        <p:txBody>
+          <a:bodyPr rtlCol="0" anchor="ctr"/>
+          <a:lstStyle/>
+          <a:p>
+            <a:pPr algn="ctr"/>
+            <a:endParaRPr lang="pt-BR"/>
+          </a:p>
+        </p:txBody>
+      </p:sp>
+      <p:sp>
+        <p:nvSpPr>
+          <p:cNvPr id="22" name="Left Brace 21"/>
+          <p:cNvSpPr/>
+          <p:nvPr/>
+        </p:nvSpPr>
+        <p:spPr>
+          <a:xfrm rot="5400000">
+            <a:off x="5393912" y="2299295"/>
+            <a:ext cx="373890" cy="2306638"/>
+          </a:xfrm>
+          <a:prstGeom prst="leftBrace">
+            <a:avLst/>
+          </a:prstGeom>
+        </p:spPr>
+        <p:style>
+          <a:lnRef idx="1">
+            <a:schemeClr val="accent1"/>
+          </a:lnRef>
+          <a:fillRef idx="0">
+            <a:schemeClr val="accent1"/>
+          </a:fillRef>
+          <a:effectRef idx="0">
+            <a:schemeClr val="accent1"/>
+          </a:effectRef>
+          <a:fontRef idx="minor">
+            <a:schemeClr val="tx1"/>
+          </a:fontRef>
+        </p:style>
+        <p:txBody>
+          <a:bodyPr rtlCol="0" anchor="ctr"/>
+          <a:lstStyle/>
+          <a:p>
+            <a:pPr algn="ctr"/>
+            <a:endParaRPr lang="pt-BR"/>
+          </a:p>
+        </p:txBody>
+      </p:sp>
+      <p:sp>
+        <p:nvSpPr>
+          <p:cNvPr id="18" name="Rectangle 17"/>
+          <p:cNvSpPr/>
+          <p:nvPr/>
+        </p:nvSpPr>
+        <p:spPr>
+          <a:xfrm>
+            <a:off x="2390379" y="2590849"/>
+            <a:ext cx="4341999" cy="707886"/>
+          </a:xfrm>
+          <a:prstGeom prst="rect">
+            <a:avLst/>
+          </a:prstGeom>
+        </p:spPr>
+        <p:txBody>
+          <a:bodyPr wrap="square">
+            <a:spAutoFit/>
+          </a:bodyPr>
+          <a:lstStyle/>
+          <a:p>
+            <a:r>
+              <a:rPr lang="pt-BR" sz="4000" noProof="1"/>
+              <a:t>0 x F              </a:t>
+            </a:r>
+            <a:r>
+              <a:rPr lang="pt-BR" sz="2000" noProof="1"/>
+              <a:t> </a:t>
+            </a:r>
+            <a:r>
+              <a:rPr lang="pt-BR" sz="4000" noProof="1"/>
+              <a:t>    F</a:t>
+            </a:r>
+          </a:p>
+        </p:txBody>
+      </p:sp>
+      <p:sp>
+        <p:nvSpPr>
+          <p:cNvPr id="23" name="Rectangle 22"/>
+          <p:cNvSpPr/>
+          <p:nvPr/>
+        </p:nvSpPr>
+        <p:spPr>
+          <a:xfrm>
+            <a:off x="524893" y="3799390"/>
+            <a:ext cx="846707" cy="369332"/>
+          </a:xfrm>
+          <a:prstGeom prst="rect">
+            <a:avLst/>
+          </a:prstGeom>
+        </p:spPr>
+        <p:txBody>
+          <a:bodyPr wrap="none">
+            <a:spAutoFit/>
+          </a:bodyPr>
+          <a:lstStyle/>
+          <a:p>
+            <a:r>
+              <a:rPr lang="pt-BR" dirty="0">
+                <a:solidFill>
+                  <a:srgbClr val="002060"/>
+                </a:solidFill>
+              </a:rPr>
+              <a:t>binário</a:t>
+            </a:r>
+          </a:p>
+        </p:txBody>
+      </p:sp>
+      <p:sp>
+        <p:nvSpPr>
+          <p:cNvPr id="24" name="Rectangle 23"/>
+          <p:cNvSpPr/>
+          <p:nvPr/>
+        </p:nvSpPr>
+        <p:spPr>
+          <a:xfrm>
+            <a:off x="524892" y="2823504"/>
+            <a:ext cx="1360052" cy="369332"/>
+          </a:xfrm>
+          <a:prstGeom prst="rect">
+            <a:avLst/>
+          </a:prstGeom>
+        </p:spPr>
+        <p:txBody>
+          <a:bodyPr wrap="none">
+            <a:spAutoFit/>
+          </a:bodyPr>
+          <a:lstStyle/>
+          <a:p>
+            <a:r>
+              <a:rPr lang="pt-BR" dirty="0">
+                <a:solidFill>
+                  <a:srgbClr val="002060"/>
+                </a:solidFill>
+              </a:rPr>
+              <a:t>hexadecimal</a:t>
+            </a:r>
+          </a:p>
+        </p:txBody>
+      </p:sp>
+    </p:spTree>
+    <p:custDataLst>
+      <p:tags r:id="rId1"/>
+    </p:custDataLst>
+    <p:extLst>
+      <p:ext uri="{BB962C8B-B14F-4D97-AF65-F5344CB8AC3E}">
+        <p14:creationId xmlns:p14="http://schemas.microsoft.com/office/powerpoint/2010/main" val="849212017"/>
+      </p:ext>
+    </p:extLst>
+  </p:cSld>
+  <p:clrMapOvr>
+    <a:masterClrMapping/>
+  </p:clrMapOvr>
+  <mc:AlternateContent xmlns:mc="http://schemas.openxmlformats.org/markup-compatibility/2006" xmlns:p14="http://schemas.microsoft.com/office/powerpoint/2010/main">
+    <mc:Choice Requires="p14">
+      <p:transition spd="slow" p14:dur="1200">
+        <p14:prism/>
+      </p:transition>
+    </mc:Choice>
+    <mc:Fallback xmlns="">
+      <p:transition spd="slow">
+        <p:fade/>
+      </p:transition>
+    </mc:Fallback>
+  </mc:AlternateContent>
+  <p:timing>
+    <p:tnLst>
+      <p:par>
+        <p:cTn id="1" dur="indefinite" restart="never" nodeType="tmRoot">
+          <p:childTnLst>
+            <p:seq concurrent="1" nextAc="seek">
+              <p:cTn id="2" dur="indefinite" nodeType="mainSeq">
+                <p:childTnLst>
+                  <p:par>
+                    <p:cTn id="3" fill="hold">
+                      <p:stCondLst>
+                        <p:cond delay="indefinite"/>
+                      </p:stCondLst>
+                      <p:childTnLst>
+                        <p:par>
+                          <p:cTn id="4" fill="hold">
+                            <p:stCondLst>
+                              <p:cond delay="0"/>
+                            </p:stCondLst>
+                            <p:childTnLst>
+                              <p:par>
+                                <p:cTn id="5" presetID="42" presetClass="entr" presetSubtype="0" fill="hold" nodeType="clickEffect">
+                                  <p:stCondLst>
+                                    <p:cond delay="0"/>
+                                  </p:stCondLst>
+                                  <p:childTnLst>
+                                    <p:set>
+                                      <p:cBhvr>
+                                        <p:cTn id="6" dur="1" fill="hold">
+                                          <p:stCondLst>
+                                            <p:cond delay="0"/>
+                                          </p:stCondLst>
+                                        </p:cTn>
+                                        <p:tgtEl>
+                                          <p:spTgt spid="26"/>
+                                        </p:tgtEl>
+                                        <p:attrNameLst>
+                                          <p:attrName>style.visibility</p:attrName>
+                                        </p:attrNameLst>
+                                      </p:cBhvr>
+                                      <p:to>
+                                        <p:strVal val="visible"/>
+                                      </p:to>
+                                    </p:set>
+                                    <p:animEffect transition="in" filter="fade">
+                                      <p:cBhvr>
+                                        <p:cTn id="7" dur="1000"/>
+                                        <p:tgtEl>
+                                          <p:spTgt spid="26"/>
+                                        </p:tgtEl>
+                                      </p:cBhvr>
+                                    </p:animEffect>
+                                    <p:anim calcmode="lin" valueType="num">
+                                      <p:cBhvr>
+                                        <p:cTn id="8" dur="1000" fill="hold"/>
+                                        <p:tgtEl>
+                                          <p:spTgt spid="26"/>
+                                        </p:tgtEl>
+                                        <p:attrNameLst>
+                                          <p:attrName>ppt_x</p:attrName>
+                                        </p:attrNameLst>
+                                      </p:cBhvr>
+                                      <p:tavLst>
+                                        <p:tav tm="0">
+                                          <p:val>
+                                            <p:strVal val="#ppt_x"/>
+                                          </p:val>
+                                        </p:tav>
+                                        <p:tav tm="100000">
+                                          <p:val>
+                                            <p:strVal val="#ppt_x"/>
+                                          </p:val>
+                                        </p:tav>
+                                      </p:tavLst>
+                                    </p:anim>
+                                    <p:anim calcmode="lin" valueType="num">
+                                      <p:cBhvr>
+                                        <p:cTn id="9" dur="1000" fill="hold"/>
+                                        <p:tgtEl>
+                                          <p:spTgt spid="26"/>
+                                        </p:tgtEl>
+                                        <p:attrNameLst>
+                                          <p:attrName>ppt_y</p:attrName>
+                                        </p:attrNameLst>
+                                      </p:cBhvr>
+                                      <p:tavLst>
+                                        <p:tav tm="0">
+                                          <p:val>
+                                            <p:strVal val="#ppt_y+.1"/>
+                                          </p:val>
+                                        </p:tav>
+                                        <p:tav tm="100000">
+                                          <p:val>
+                                            <p:strVal val="#ppt_y"/>
+                                          </p:val>
+                                        </p:tav>
+                                      </p:tavLst>
+                                    </p:anim>
+                                  </p:childTnLst>
+                                </p:cTn>
+                              </p:par>
+                            </p:childTnLst>
+                          </p:cTn>
+                        </p:par>
+                      </p:childTnLst>
+                    </p:cTn>
+                  </p:par>
+                  <p:par>
+                    <p:cTn id="10" fill="hold">
+                      <p:stCondLst>
+                        <p:cond delay="indefinite"/>
+                      </p:stCondLst>
+                      <p:childTnLst>
+                        <p:par>
+                          <p:cTn id="11" fill="hold">
+                            <p:stCondLst>
+                              <p:cond delay="0"/>
+                            </p:stCondLst>
+                            <p:childTnLst>
+                              <p:par>
+                                <p:cTn id="12" presetID="42" presetClass="entr" presetSubtype="0" fill="hold" nodeType="clickEffect">
+                                  <p:stCondLst>
+                                    <p:cond delay="0"/>
+                                  </p:stCondLst>
+                                  <p:childTnLst>
+                                    <p:set>
+                                      <p:cBhvr>
+                                        <p:cTn id="13" dur="1" fill="hold">
+                                          <p:stCondLst>
+                                            <p:cond delay="0"/>
+                                          </p:stCondLst>
+                                        </p:cTn>
+                                        <p:tgtEl>
+                                          <p:spTgt spid="25"/>
+                                        </p:tgtEl>
+                                        <p:attrNameLst>
+                                          <p:attrName>style.visibility</p:attrName>
+                                        </p:attrNameLst>
+                                      </p:cBhvr>
+                                      <p:to>
+                                        <p:strVal val="visible"/>
+                                      </p:to>
+                                    </p:set>
+                                    <p:animEffect transition="in" filter="fade">
+                                      <p:cBhvr>
+                                        <p:cTn id="14" dur="1000"/>
+                                        <p:tgtEl>
+                                          <p:spTgt spid="25"/>
+                                        </p:tgtEl>
+                                      </p:cBhvr>
+                                    </p:animEffect>
+                                    <p:anim calcmode="lin" valueType="num">
+                                      <p:cBhvr>
+                                        <p:cTn id="15" dur="1000" fill="hold"/>
+                                        <p:tgtEl>
+                                          <p:spTgt spid="25"/>
+                                        </p:tgtEl>
+                                        <p:attrNameLst>
+                                          <p:attrName>ppt_x</p:attrName>
+                                        </p:attrNameLst>
+                                      </p:cBhvr>
+                                      <p:tavLst>
+                                        <p:tav tm="0">
+                                          <p:val>
+                                            <p:strVal val="#ppt_x"/>
+                                          </p:val>
+                                        </p:tav>
+                                        <p:tav tm="100000">
+                                          <p:val>
+                                            <p:strVal val="#ppt_x"/>
+                                          </p:val>
+                                        </p:tav>
+                                      </p:tavLst>
+                                    </p:anim>
+                                    <p:anim calcmode="lin" valueType="num">
+                                      <p:cBhvr>
+                                        <p:cTn id="16" dur="1000" fill="hold"/>
+                                        <p:tgtEl>
+                                          <p:spTgt spid="25"/>
+                                        </p:tgtEl>
+                                        <p:attrNameLst>
+                                          <p:attrName>ppt_y</p:attrName>
+                                        </p:attrNameLst>
+                                      </p:cBhvr>
+                                      <p:tavLst>
+                                        <p:tav tm="0">
+                                          <p:val>
+                                            <p:strVal val="#ppt_y+.1"/>
+                                          </p:val>
+                                        </p:tav>
+                                        <p:tav tm="100000">
+                                          <p:val>
+                                            <p:strVal val="#ppt_y"/>
+                                          </p:val>
+                                        </p:tav>
+                                      </p:tavLst>
+                                    </p:anim>
+                                  </p:childTnLst>
+                                </p:cTn>
+                              </p:par>
+                            </p:childTnLst>
+                          </p:cTn>
+                        </p:par>
+                      </p:childTnLst>
+                    </p:cTn>
+                  </p:par>
+                  <p:par>
+                    <p:cTn id="17" fill="hold">
+                      <p:stCondLst>
+                        <p:cond delay="indefinite"/>
+                      </p:stCondLst>
+                      <p:childTnLst>
+                        <p:par>
+                          <p:cTn id="18" fill="hold">
+                            <p:stCondLst>
+                              <p:cond delay="0"/>
+                            </p:stCondLst>
+                            <p:childTnLst>
+                              <p:par>
+                                <p:cTn id="19" presetID="47" presetClass="entr" presetSubtype="0" fill="hold" grpId="0" nodeType="clickEffect">
+                                  <p:stCondLst>
+                                    <p:cond delay="0"/>
+                                  </p:stCondLst>
+                                  <p:childTnLst>
+                                    <p:set>
+                                      <p:cBhvr>
+                                        <p:cTn id="20" dur="1" fill="hold">
+                                          <p:stCondLst>
+                                            <p:cond delay="0"/>
+                                          </p:stCondLst>
+                                        </p:cTn>
+                                        <p:tgtEl>
+                                          <p:spTgt spid="17"/>
+                                        </p:tgtEl>
+                                        <p:attrNameLst>
+                                          <p:attrName>style.visibility</p:attrName>
+                                        </p:attrNameLst>
+                                      </p:cBhvr>
+                                      <p:to>
+                                        <p:strVal val="visible"/>
+                                      </p:to>
+                                    </p:set>
+                                    <p:animEffect transition="in" filter="fade">
+                                      <p:cBhvr>
+                                        <p:cTn id="21" dur="500"/>
+                                        <p:tgtEl>
+                                          <p:spTgt spid="17"/>
+                                        </p:tgtEl>
+                                      </p:cBhvr>
+                                    </p:animEffect>
+                                    <p:anim calcmode="lin" valueType="num">
+                                      <p:cBhvr>
+                                        <p:cTn id="22" dur="500" fill="hold"/>
+                                        <p:tgtEl>
+                                          <p:spTgt spid="17"/>
+                                        </p:tgtEl>
+                                        <p:attrNameLst>
+                                          <p:attrName>ppt_x</p:attrName>
+                                        </p:attrNameLst>
+                                      </p:cBhvr>
+                                      <p:tavLst>
+                                        <p:tav tm="0">
+                                          <p:val>
+                                            <p:strVal val="#ppt_x"/>
+                                          </p:val>
+                                        </p:tav>
+                                        <p:tav tm="100000">
+                                          <p:val>
+                                            <p:strVal val="#ppt_x"/>
+                                          </p:val>
+                                        </p:tav>
+                                      </p:tavLst>
+                                    </p:anim>
+                                    <p:anim calcmode="lin" valueType="num">
+                                      <p:cBhvr>
+                                        <p:cTn id="23" dur="500" fill="hold"/>
+                                        <p:tgtEl>
+                                          <p:spTgt spid="17"/>
+                                        </p:tgtEl>
+                                        <p:attrNameLst>
+                                          <p:attrName>ppt_y</p:attrName>
+                                        </p:attrNameLst>
+                                      </p:cBhvr>
+                                      <p:tavLst>
+                                        <p:tav tm="0">
+                                          <p:val>
+                                            <p:strVal val="#ppt_y-.1"/>
+                                          </p:val>
+                                        </p:tav>
+                                        <p:tav tm="100000">
+                                          <p:val>
+                                            <p:strVal val="#ppt_y"/>
+                                          </p:val>
+                                        </p:tav>
+                                      </p:tavLst>
+                                    </p:anim>
+                                  </p:childTnLst>
+                                </p:cTn>
+                              </p:par>
+                              <p:par>
+                                <p:cTn id="24" presetID="47" presetClass="entr" presetSubtype="0" fill="hold" grpId="0" nodeType="withEffect">
+                                  <p:stCondLst>
+                                    <p:cond delay="300"/>
+                                  </p:stCondLst>
+                                  <p:childTnLst>
+                                    <p:set>
+                                      <p:cBhvr>
+                                        <p:cTn id="25" dur="1" fill="hold">
+                                          <p:stCondLst>
+                                            <p:cond delay="0"/>
+                                          </p:stCondLst>
+                                        </p:cTn>
+                                        <p:tgtEl>
+                                          <p:spTgt spid="22"/>
+                                        </p:tgtEl>
+                                        <p:attrNameLst>
+                                          <p:attrName>style.visibility</p:attrName>
+                                        </p:attrNameLst>
+                                      </p:cBhvr>
+                                      <p:to>
+                                        <p:strVal val="visible"/>
+                                      </p:to>
+                                    </p:set>
+                                    <p:animEffect transition="in" filter="fade">
+                                      <p:cBhvr>
+                                        <p:cTn id="26" dur="500"/>
+                                        <p:tgtEl>
+                                          <p:spTgt spid="22"/>
+                                        </p:tgtEl>
+                                      </p:cBhvr>
+                                    </p:animEffect>
+                                    <p:anim calcmode="lin" valueType="num">
+                                      <p:cBhvr>
+                                        <p:cTn id="27" dur="500" fill="hold"/>
+                                        <p:tgtEl>
+                                          <p:spTgt spid="22"/>
+                                        </p:tgtEl>
+                                        <p:attrNameLst>
+                                          <p:attrName>ppt_x</p:attrName>
+                                        </p:attrNameLst>
+                                      </p:cBhvr>
+                                      <p:tavLst>
+                                        <p:tav tm="0">
+                                          <p:val>
+                                            <p:strVal val="#ppt_x"/>
+                                          </p:val>
+                                        </p:tav>
+                                        <p:tav tm="100000">
+                                          <p:val>
+                                            <p:strVal val="#ppt_x"/>
+                                          </p:val>
+                                        </p:tav>
+                                      </p:tavLst>
+                                    </p:anim>
+                                    <p:anim calcmode="lin" valueType="num">
+                                      <p:cBhvr>
+                                        <p:cTn id="28" dur="500" fill="hold"/>
+                                        <p:tgtEl>
+                                          <p:spTgt spid="22"/>
+                                        </p:tgtEl>
+                                        <p:attrNameLst>
+                                          <p:attrName>ppt_y</p:attrName>
+                                        </p:attrNameLst>
+                                      </p:cBhvr>
+                                      <p:tavLst>
+                                        <p:tav tm="0">
+                                          <p:val>
+                                            <p:strVal val="#ppt_y-.1"/>
+                                          </p:val>
+                                        </p:tav>
+                                        <p:tav tm="100000">
+                                          <p:val>
+                                            <p:strVal val="#ppt_y"/>
+                                          </p:val>
+                                        </p:tav>
+                                      </p:tavLst>
+                                    </p:anim>
+                                  </p:childTnLst>
+                                </p:cTn>
+                              </p:par>
+                            </p:childTnLst>
+                          </p:cTn>
+                        </p:par>
+                        <p:par>
+                          <p:cTn id="29" fill="hold">
+                            <p:stCondLst>
+                              <p:cond delay="800"/>
+                            </p:stCondLst>
+                            <p:childTnLst>
+                              <p:par>
+                                <p:cTn id="30" presetID="1" presetClass="entr" presetSubtype="0" fill="hold" grpId="0" nodeType="afterEffect">
+                                  <p:stCondLst>
+                                    <p:cond delay="0"/>
+                                  </p:stCondLst>
+                                  <p:childTnLst>
+                                    <p:set>
+                                      <p:cBhvr>
+                                        <p:cTn id="31" dur="1" fill="hold">
+                                          <p:stCondLst>
+                                            <p:cond delay="0"/>
+                                          </p:stCondLst>
+                                        </p:cTn>
+                                        <p:tgtEl>
+                                          <p:spTgt spid="18"/>
+                                        </p:tgtEl>
+                                        <p:attrNameLst>
+                                          <p:attrName>style.visibility</p:attrName>
+                                        </p:attrNameLst>
+                                      </p:cBhvr>
+                                      <p:to>
+                                        <p:strVal val="visible"/>
+                                      </p:to>
+                                    </p:set>
+                                  </p:childTnLst>
+                                </p:cTn>
+                              </p:par>
+                            </p:childTnLst>
+                          </p:cTn>
+                        </p:par>
+                      </p:childTnLst>
+                    </p:cTn>
+                  </p:par>
+                  <p:par>
+                    <p:cTn id="32" fill="hold">
+                      <p:stCondLst>
+                        <p:cond delay="indefinite"/>
+                      </p:stCondLst>
+                      <p:childTnLst>
+                        <p:par>
+                          <p:cTn id="33" fill="hold">
+                            <p:stCondLst>
+                              <p:cond delay="0"/>
+                            </p:stCondLst>
+                            <p:childTnLst>
+                              <p:par>
+                                <p:cTn id="34" presetID="1" presetClass="entr" presetSubtype="0" fill="hold" grpId="0" nodeType="clickEffect">
+                                  <p:stCondLst>
+                                    <p:cond delay="0"/>
+                                  </p:stCondLst>
+                                  <p:childTnLst>
+                                    <p:set>
+                                      <p:cBhvr>
+                                        <p:cTn id="35" dur="1" fill="hold">
+                                          <p:stCondLst>
+                                            <p:cond delay="0"/>
+                                          </p:stCondLst>
+                                        </p:cTn>
+                                        <p:tgtEl>
+                                          <p:spTgt spid="23"/>
+                                        </p:tgtEl>
+                                        <p:attrNameLst>
+                                          <p:attrName>style.visibility</p:attrName>
+                                        </p:attrNameLst>
+                                      </p:cBhvr>
+                                      <p:to>
+                                        <p:strVal val="visible"/>
+                                      </p:to>
+                                    </p:set>
+                                  </p:childTnLst>
+                                </p:cTn>
+                              </p:par>
+                              <p:par>
+                                <p:cTn id="36" presetID="1" presetClass="entr" presetSubtype="0" fill="hold" grpId="0" nodeType="withEffect">
+                                  <p:stCondLst>
+                                    <p:cond delay="0"/>
+                                  </p:stCondLst>
+                                  <p:childTnLst>
+                                    <p:set>
+                                      <p:cBhvr>
+                                        <p:cTn id="37" dur="1" fill="hold">
+                                          <p:stCondLst>
+                                            <p:cond delay="0"/>
+                                          </p:stCondLst>
+                                        </p:cTn>
+                                        <p:tgtEl>
+                                          <p:spTgt spid="24"/>
+                                        </p:tgtEl>
+                                        <p:attrNameLst>
+                                          <p:attrName>style.visibility</p:attrName>
+                                        </p:attrNameLst>
+                                      </p:cBhvr>
+                                      <p:to>
+                                        <p:strVal val="visible"/>
+                                      </p:to>
+                                    </p:set>
+                                  </p:childTnLst>
+                                </p:cTn>
+                              </p:par>
+                            </p:childTnLst>
+                          </p:cTn>
+                        </p:par>
+                      </p:childTnLst>
+                    </p:cTn>
+                  </p:par>
+                </p:childTnLst>
+              </p:cTn>
+              <p:prevCondLst>
+                <p:cond evt="onPrev" delay="0">
+                  <p:tgtEl>
+                    <p:sldTgt/>
+                  </p:tgtEl>
+                </p:cond>
+              </p:prevCondLst>
+              <p:nextCondLst>
+                <p:cond evt="onNext" delay="0">
+                  <p:tgtEl>
+                    <p:sldTgt/>
+                  </p:tgtEl>
+                </p:cond>
+              </p:nextCondLst>
+            </p:seq>
+          </p:childTnLst>
+        </p:cTn>
+      </p:par>
+    </p:tnLst>
+    <p:bldLst>
+      <p:bldP spid="17" grpId="0" animBg="1"/>
+      <p:bldP spid="22" grpId="0" animBg="1"/>
+      <p:bldP spid="18" grpId="0"/>
+      <p:bldP spid="23" grpId="0"/>
+      <p:bldP spid="24" grpId="0"/>
+    </p:bldLst>
+  </p:timing>
 </p:sld>
 </file>
 
@@ -44662,35 +45890,41 @@
 
 <file path=ppt/tags/tag3.xml><?xml version="1.0" encoding="utf-8"?>
 <p:tagLst xmlns:a="http://schemas.openxmlformats.org/drawingml/2006/main" xmlns:r="http://schemas.openxmlformats.org/officeDocument/2006/relationships" xmlns:p="http://schemas.openxmlformats.org/presentationml/2006/main">
-  <p:tag name="TIMING" val="|23.15|4.818001|2.413|1.035|6.744999|4.553001|4.791|7.578999|13.073|1.368004|6.891998|1.051003|8.410995|2.069|22.95|3.291|6.792|5.611"/>
+  <p:tag name="TIMING" val="|9.641|18.719|4.757|5.902|3.006001|12.689|7.256001"/>
 </p:tagLst>
 </file>
 
 <file path=ppt/tags/tag4.xml><?xml version="1.0" encoding="utf-8"?>
 <p:tagLst xmlns:a="http://schemas.openxmlformats.org/drawingml/2006/main" xmlns:r="http://schemas.openxmlformats.org/officeDocument/2006/relationships" xmlns:p="http://schemas.openxmlformats.org/presentationml/2006/main">
-  <p:tag name="TIMING" val="|183.57"/>
+  <p:tag name="TIMING" val="|23.15|4.818001|2.413|1.035|6.744999|4.553001|4.791|7.578999|13.073|1.368004|6.891998|1.051003|8.410995|2.069|22.95|3.291|6.792|5.611"/>
 </p:tagLst>
 </file>
 
 <file path=ppt/tags/tag5.xml><?xml version="1.0" encoding="utf-8"?>
 <p:tagLst xmlns:a="http://schemas.openxmlformats.org/drawingml/2006/main" xmlns:r="http://schemas.openxmlformats.org/officeDocument/2006/relationships" xmlns:p="http://schemas.openxmlformats.org/presentationml/2006/main">
-  <p:tag name="TIMING" val="|9.647|12.239|6.853001|9.101999|9.351002|5.514|5.600998|15.544"/>
+  <p:tag name="TIMING" val="|183.57"/>
 </p:tagLst>
 </file>
 
 <file path=ppt/tags/tag6.xml><?xml version="1.0" encoding="utf-8"?>
 <p:tagLst xmlns:a="http://schemas.openxmlformats.org/drawingml/2006/main" xmlns:r="http://schemas.openxmlformats.org/officeDocument/2006/relationships" xmlns:p="http://schemas.openxmlformats.org/presentationml/2006/main">
-  <p:tag name="TIMING" val="|33.788|24.445"/>
+  <p:tag name="TIMING" val="|9.647|12.239|6.853001|9.101999|9.351002|5.514|5.600998|15.544"/>
 </p:tagLst>
 </file>
 
 <file path=ppt/tags/tag7.xml><?xml version="1.0" encoding="utf-8"?>
 <p:tagLst xmlns:a="http://schemas.openxmlformats.org/drawingml/2006/main" xmlns:r="http://schemas.openxmlformats.org/officeDocument/2006/relationships" xmlns:p="http://schemas.openxmlformats.org/presentationml/2006/main">
+  <p:tag name="TIMING" val="|33.788|24.445"/>
+</p:tagLst>
+</file>
+
+<file path=ppt/tags/tag8.xml><?xml version="1.0" encoding="utf-8"?>
+<p:tagLst xmlns:a="http://schemas.openxmlformats.org/drawingml/2006/main" xmlns:r="http://schemas.openxmlformats.org/officeDocument/2006/relationships" xmlns:p="http://schemas.openxmlformats.org/presentationml/2006/main">
   <p:tag name="TIMING" val="|41.72"/>
 </p:tagLst>
 </file>
 
-<file path=ppt/tags/tag8.xml><?xml version="1.0" encoding="utf-8"?>
+<file path=ppt/tags/tag9.xml><?xml version="1.0" encoding="utf-8"?>
 <p:tagLst xmlns:a="http://schemas.openxmlformats.org/drawingml/2006/main" xmlns:r="http://schemas.openxmlformats.org/officeDocument/2006/relationships" xmlns:p="http://schemas.openxmlformats.org/presentationml/2006/main">
   <p:tag name="ATHENA.MIXSHAPE" val="AAEAAAD/////AQAAAAAAAAAMAgAAAE9BdXRob3JQUFQsIFZlcnNpb249MC4xLjU3MjAuMCwgQ3VsdHVyZT1uZXV0cmFsLCBQdWJsaWNLZXlUb2tlbj0zMWJmMzg1NmFkMzY0ZTM1BQEAAAALSW5rTWF0dGVyVjEEAAAABVNjYWxlDUxpc3RgMStfaXRlbXMMTGlzdGAxK19zaXplD0xpc3RgMStfdmVyc2lvbgAEAAALF1NoYXJlZC5JbmtpbmcuSW5rQXRvbVtdAgAAAAgIAgAAAP5hMD8JAwAAAAYAAAAMAAAABwMAAAAAAQAAAAgAAAAECUlua0F0b21WMQIAAAAJBAAAAAkFAAAACQYAAAAJBwAAAAkIAAAACQkAAAANAgUEAAAAC1BlblN0cm9rZVYxBAAAAApBdHRyaWJ1dGVzBVRyYWNlCVN0YXJ0VGltZQRUeXBlBAQABA9QZW5BdHRyaWJ1dGVzVjECAAAACklua1RyYWNlVjECAAAAEAxBY3Rpb25UeXBlVjECAAAAAgAAAAkKAAAACQsAAAC2LAAAAAAAAAX0////DEFjdGlvblR5cGVWMQEAAAAHdmFsdWVfXwAIAgAAAAAAAAABBQAAAAQAAAAJDQAAAAkOAAAAATMAAAAAAAAB8f////T///8AAAAAAQYAAAAEAAAACRAAAAAJEQAAAEE4AAAAAAAAAe7////0////AAAAAAEHAAAABAAAAAkTAAAACRQAAACwYwAAAAAAAAHr////9P///wAAAAABCAAAAAQAAAAJFgAAAAkXAAAA83QAAAAAAAAB6P////T///8AAAAAAQkAAAAEAAAACRkAAAAJGgAAAN+CAAAAAAAAAeX////0////AAAAAAUKAAAAD1BlbkF0dHJpYnV0ZXNWMQoAAAAHX2NvbG9yQQdfY29sb3JSB19jb2xvckcHX2NvbG9yQgpGaXRUb0N1cnZlBkhlaWdodA5JZ25vcmVQcmVzc3VyZQ1Jc0hpZ2hsaWdodGVyBVNoYXBlBVdpZHRoAAAAAAAAAAAEAAICAgIBBgEBDEJydXNoU2hhcGVWMQIAAAAGAgAAAP//AAAAAAAAAAAACEAAAAXk////DEJydXNoU2hhcGVWMQEAAAAHdmFsdWVfXwAIAgAAAAEAAAAAAAAAAAAIQAULAAAACklua1RyYWNlVjEDAAAADUxpc3RgMStfaXRlbXMMTGlzdGAxK19zaXplD0xpc3RgMStfdmVyc2lvbgQAABhTaGFyZWQuSW5raW5nLklua1BvaW50W10CAAAACAgCAAAACR0AAAABAAAAAQAAAAENAAAACgAAAP//AAAAAAAAAAAACEAAAAHi////5P///wEAAAAAAAAAAAAIQAEOAAAACwAAAAkfAAAAAQAAAAEAAAABEAAAAAoAAAD//wAAAAAAAAAAAAhAAAAB4P///+T///8BAAAAAAAAAAAACEABEQAAAAsAAAAJIQAAAAEAAAABAAAAARMAAAAKAAAA//8AAAAAAAAAAAAIQAAAAd7////k////AQAAAAAAAAAAAAhAARQAAAALAAAACSMAAAABAAAAAQAAAAEWAAAACgAAAP//AAAAAAAAAAAACEAAAAHc////5P///wEAAAAAAAAAAAAIQAEXAAAACwAAAAklAAAAAQAAAAEAAAABGQAAAAoAAAD//wAAAAAAAAAAAAhAAAAB2v///+T///8BAAAAAAAAAAAACEABGgAAAAsAAAAJJwAAAAEAAAABAAAABx0AAAAAAQAAAAQAAAAECklua1BvaW50VjECAAAACSgAAAANAwcfAAAAAAEAAAAEAAAABApJbmtQb2ludFYxAgAAAAkpAAAADQMHIQAAAAABAAAABAAAAAQKSW5rUG9pbnRWMQIAAAAJKgAAAA0DByMAAAAAAQAAAAQAAAAECklua1BvaW50VjECAAAACSsAAAANAwclAAAAAAEAAAAEAAAABApJbmtQb2ludFYxAgAAAAksAAAADQMHJwAAAAABAAAABAAAAAQKSW5rUG9pbnRWMQIAAAAJLQAAAA0DBSgAAAAKSW5rUG9pbnRWMQQAAAABWAFZDlByZXNzdXJlRmFjdG9yCVRpbWVTdGFtcAAAAAAGBgsQAgAAAABBSp5lRG8/AEN5DeU1lD8AAAA/AAAAAAAAAAABKQAAACgAAADwA6pjb224P4jyGsprKNc/AAAAPwAAAAAAAAAAASoAAAAoAAAAYMUJKXmWoT8EAAAAAADkPwAAAD8AAAAAAAAAAAErAAAAKAAAAABBSp5lRG8/7DWU11Be7z8AAAA/AAAAAAAAAAABLAAAACgAAABkb22Y5i7YPyyvobyG8u4/AAAAPwAAAAAAAAAAAS0AAAAoAAAAvLVhmrvg7z/0GsprKK/tPwAAAD8AAAAAAAAAAAs="/>
 </p:tagLst>

--- a/docs-src/slides/conteudoDadosDigitais.pptx
+++ b/docs-src/slides/conteudoDadosDigitais.pptx
@@ -252,7 +252,7 @@
           <a:p>
             <a:fld id="{17B2933F-D0FD-7240-A363-4A10A64C6792}" type="datetimeFigureOut">
               <a:rPr lang="en-US" smtClean="0"/>
-              <a:t>8/17/26</a:t>
+              <a:t>8/28/2026</a:t>
             </a:fld>
             <a:endParaRPr lang="en-US"/>
           </a:p>
@@ -498,7 +498,7 @@
           <a:p>
             <a:fld id="{8E9F3387-6852-4167-A065-1B417E5289FE}" type="datetimeFigureOut">
               <a:rPr lang="pt-BR" smtClean="0"/>
-              <a:t>17/08/2026</a:t>
+              <a:t>28/08/2026</a:t>
             </a:fld>
             <a:endParaRPr lang="pt-BR"/>
           </a:p>
@@ -1998,7 +1998,7 @@
             </a:pPr>
             <a:fld id="{3A7F20AB-37B1-478F-A742-7A1AA2173FAD}" type="datetime1">
               <a:rPr lang="pt-BR" smtClean="0"/>
-              <a:t>17/08/2026</a:t>
+              <a:t>28/08/2026</a:t>
             </a:fld>
             <a:endParaRPr lang="en-US"/>
           </a:p>
@@ -6456,7 +6456,7 @@
           <a:p>
             <a:fld id="{CC8788FA-9D8F-3C45-9A7B-393163C83DF0}" type="datetime1">
               <a:rPr lang="en-US" smtClean="0"/>
-              <a:t>8/17/26</a:t>
+              <a:t>8/28/2026</a:t>
             </a:fld>
             <a:endParaRPr lang="pt-BR" dirty="0"/>
           </a:p>
@@ -6989,7 +6989,7 @@
           <a:p>
             <a:fld id="{AB1C2149-89A1-2143-B6CB-10E4BD2D3370}" type="datetime1">
               <a:rPr lang="en-US" smtClean="0"/>
-              <a:t>8/17/26</a:t>
+              <a:t>8/28/2026</a:t>
             </a:fld>
             <a:endParaRPr lang="pt-BR"/>
           </a:p>
@@ -7537,7 +7537,7 @@
           <a:p>
             <a:fld id="{372D7956-45FE-0B43-9FB1-4BE9D905D684}" type="datetime1">
               <a:rPr lang="en-US" smtClean="0"/>
-              <a:t>8/17/26</a:t>
+              <a:t>8/28/2026</a:t>
             </a:fld>
             <a:endParaRPr lang="pt-BR"/>
           </a:p>
@@ -7862,7 +7862,7 @@
           <a:p>
             <a:fld id="{2316C89B-46A1-944B-8294-819B08567B54}" type="datetime1">
               <a:rPr lang="en-US" smtClean="0"/>
-              <a:t>8/17/26</a:t>
+              <a:t>8/28/2026</a:t>
             </a:fld>
             <a:endParaRPr lang="pt-BR"/>
           </a:p>
@@ -8388,7 +8388,7 @@
           <a:p>
             <a:fld id="{02FE0B43-6A8C-D94C-A4F4-9A1865BE9A40}" type="datetime1">
               <a:rPr lang="en-US" smtClean="0"/>
-              <a:t>8/17/26</a:t>
+              <a:t>8/28/2026</a:t>
             </a:fld>
             <a:endParaRPr lang="pt-BR"/>
           </a:p>
@@ -9006,7 +9006,7 @@
             </a:pPr>
             <a:fld id="{EF6ED924-9D16-4A38-9B8F-043BDA0BE473}" type="datetime1">
               <a:rPr lang="pt-BR" smtClean="0"/>
-              <a:t>17/08/2026</a:t>
+              <a:t>28/08/2026</a:t>
             </a:fld>
             <a:endParaRPr lang="en-US"/>
           </a:p>
@@ -9148,7 +9148,7 @@
           <a:p>
             <a:fld id="{A8EA56D1-9008-324A-AE78-6F3716B85DF9}" type="datetime1">
               <a:rPr lang="en-US" smtClean="0"/>
-              <a:t>8/17/26</a:t>
+              <a:t>8/28/2026</a:t>
             </a:fld>
             <a:endParaRPr lang="pt-BR" dirty="0"/>
           </a:p>
@@ -18223,95 +18223,6 @@
           </a:graphicData>
         </a:graphic>
       </p:graphicFrame>
-      <p:grpSp>
-        <p:nvGrpSpPr>
-          <p:cNvPr id="41" name="Group 40"/>
-          <p:cNvGrpSpPr/>
-          <p:nvPr/>
-        </p:nvGrpSpPr>
-        <p:grpSpPr>
-          <a:xfrm>
-            <a:off x="5199790" y="2319700"/>
-            <a:ext cx="1098160" cy="490922"/>
-            <a:chOff x="5537590" y="2319700"/>
-            <a:chExt cx="1098160" cy="490922"/>
-          </a:xfrm>
-        </p:grpSpPr>
-        <p:sp>
-          <p:nvSpPr>
-            <p:cNvPr id="36" name="Rectangle 35"/>
-            <p:cNvSpPr/>
-            <p:nvPr/>
-          </p:nvSpPr>
-          <p:spPr>
-            <a:xfrm>
-              <a:off x="5537590" y="2319700"/>
-              <a:ext cx="897040" cy="461665"/>
-            </a:xfrm>
-            <a:prstGeom prst="rect">
-              <a:avLst/>
-            </a:prstGeom>
-          </p:spPr>
-          <p:txBody>
-            <a:bodyPr wrap="none" anchor="t">
-              <a:spAutoFit/>
-            </a:bodyPr>
-            <a:lstStyle/>
-            <a:p>
-              <a:pPr algn="r"/>
-              <a:r>
-                <a:rPr lang="en-US" dirty="0"/>
-                <a:t>carry-in</a:t>
-              </a:r>
-              <a:endParaRPr lang="en-US" sz="600" dirty="0"/>
-            </a:p>
-            <a:p>
-              <a:pPr algn="r"/>
-              <a:endParaRPr lang="en-US" sz="600" dirty="0"/>
-            </a:p>
-          </p:txBody>
-        </p:sp>
-        <p:cxnSp>
-          <p:nvCxnSpPr>
-            <p:cNvPr id="38" name="Curved Connector 37"/>
-            <p:cNvCxnSpPr>
-              <a:stCxn id="36" idx="3"/>
-              <a:endCxn id="33" idx="0"/>
-            </p:cNvCxnSpPr>
-            <p:nvPr/>
-          </p:nvCxnSpPr>
-          <p:spPr>
-            <a:xfrm>
-              <a:off x="6434630" y="2550533"/>
-              <a:ext cx="201120" cy="260089"/>
-            </a:xfrm>
-            <a:prstGeom prst="curvedConnector2">
-              <a:avLst/>
-            </a:prstGeom>
-            <a:ln w="28575" cmpd="sng">
-              <a:solidFill>
-                <a:srgbClr val="000000"/>
-              </a:solidFill>
-              <a:headEnd type="none"/>
-              <a:tailEnd type="triangle"/>
-            </a:ln>
-          </p:spPr>
-          <p:style>
-            <a:lnRef idx="2">
-              <a:schemeClr val="accent1"/>
-            </a:lnRef>
-            <a:fillRef idx="0">
-              <a:schemeClr val="accent1"/>
-            </a:fillRef>
-            <a:effectRef idx="1">
-              <a:schemeClr val="accent1"/>
-            </a:effectRef>
-            <a:fontRef idx="minor">
-              <a:schemeClr val="tx1"/>
-            </a:fontRef>
-          </p:style>
-        </p:cxnSp>
-      </p:grpSp>
       <p:grpSp>
         <p:nvGrpSpPr>
           <p:cNvPr id="42" name="Group 41"/>
@@ -19585,7 +19496,7 @@
                             </p:stCondLst>
                             <p:childTnLst>
                               <p:par>
-                                <p:cTn id="68" presetID="1" presetClass="entr" presetSubtype="0" fill="hold" nodeType="clickEffect">
+                                <p:cTn id="68" presetID="12" presetClass="entr" presetSubtype="1" fill="hold" nodeType="clickEffect">
                                   <p:stCondLst>
                                     <p:cond delay="0"/>
                                   </p:stCondLst>
@@ -19593,51 +19504,6 @@
                                     <p:set>
                                       <p:cBhvr>
                                         <p:cTn id="69" dur="1" fill="hold">
-                                          <p:stCondLst>
-                                            <p:cond delay="0"/>
-                                          </p:stCondLst>
-                                        </p:cTn>
-                                        <p:tgtEl>
-                                          <p:spTgt spid="41"/>
-                                        </p:tgtEl>
-                                        <p:attrNameLst>
-                                          <p:attrName>style.visibility</p:attrName>
-                                        </p:attrNameLst>
-                                      </p:cBhvr>
-                                      <p:to>
-                                        <p:strVal val="visible"/>
-                                      </p:to>
-                                    </p:set>
-                                  </p:childTnLst>
-                                </p:cTn>
-                              </p:par>
-                            </p:childTnLst>
-                          </p:cTn>
-                        </p:par>
-                      </p:childTnLst>
-                    </p:cTn>
-                  </p:par>
-                  <p:par>
-                    <p:cTn id="70" fill="hold">
-                      <p:stCondLst>
-                        <p:cond delay="indefinite"/>
-                      </p:stCondLst>
-                      <p:childTnLst>
-                        <p:par>
-                          <p:cTn id="71" fill="hold">
-                            <p:stCondLst>
-                              <p:cond delay="0"/>
-                            </p:stCondLst>
-                            <p:childTnLst>
-                              <p:par>
-                                <p:cTn id="72" presetID="12" presetClass="entr" presetSubtype="1" fill="hold" nodeType="clickEffect">
-                                  <p:stCondLst>
-                                    <p:cond delay="0"/>
-                                  </p:stCondLst>
-                                  <p:childTnLst>
-                                    <p:set>
-                                      <p:cBhvr>
-                                        <p:cTn id="73" dur="1" fill="hold">
                                           <p:stCondLst>
                                             <p:cond delay="0"/>
                                           </p:stCondLst>
@@ -19655,7 +19521,7 @@
                                     </p:set>
                                     <p:anim calcmode="lin" valueType="num">
                                       <p:cBhvr additive="base">
-                                        <p:cTn id="74" dur="500"/>
+                                        <p:cTn id="70" dur="500"/>
                                         <p:tgtEl>
                                           <p:spTgt spid="30"/>
                                         </p:tgtEl>
@@ -19678,7 +19544,7 @@
                                     </p:anim>
                                     <p:animEffect transition="in" filter="wipe(down)">
                                       <p:cBhvr>
-                                        <p:cTn id="75" dur="500"/>
+                                        <p:cTn id="71" dur="500"/>
                                         <p:tgtEl>
                                           <p:spTgt spid="30"/>
                                         </p:tgtEl>
@@ -19694,26 +19560,26 @@
                     </p:cTn>
                   </p:par>
                   <p:par>
-                    <p:cTn id="76" fill="hold">
+                    <p:cTn id="72" fill="hold">
                       <p:stCondLst>
                         <p:cond delay="indefinite"/>
                       </p:stCondLst>
                       <p:childTnLst>
                         <p:par>
-                          <p:cTn id="77" fill="hold">
+                          <p:cTn id="73" fill="hold">
                             <p:stCondLst>
                               <p:cond delay="0"/>
                             </p:stCondLst>
                             <p:childTnLst>
                               <p:par>
-                                <p:cTn id="78" presetID="12" presetClass="entr" presetSubtype="1" fill="hold" nodeType="clickEffect">
+                                <p:cTn id="74" presetID="12" presetClass="entr" presetSubtype="1" fill="hold" nodeType="clickEffect">
                                   <p:stCondLst>
                                     <p:cond delay="0"/>
                                   </p:stCondLst>
                                   <p:childTnLst>
                                     <p:set>
                                       <p:cBhvr>
-                                        <p:cTn id="79" dur="1" fill="hold">
+                                        <p:cTn id="75" dur="1" fill="hold">
                                           <p:stCondLst>
                                             <p:cond delay="0"/>
                                           </p:stCondLst>
@@ -19731,7 +19597,7 @@
                                     </p:set>
                                     <p:anim calcmode="lin" valueType="num">
                                       <p:cBhvr additive="base">
-                                        <p:cTn id="80" dur="500"/>
+                                        <p:cTn id="76" dur="500"/>
                                         <p:tgtEl>
                                           <p:spTgt spid="31"/>
                                         </p:tgtEl>
@@ -19754,7 +19620,7 @@
                                     </p:anim>
                                     <p:animEffect transition="in" filter="wipe(down)">
                                       <p:cBhvr>
-                                        <p:cTn id="81" dur="500"/>
+                                        <p:cTn id="77" dur="500"/>
                                         <p:tgtEl>
                                           <p:spTgt spid="31"/>
                                         </p:tgtEl>
@@ -19770,26 +19636,26 @@
                     </p:cTn>
                   </p:par>
                   <p:par>
-                    <p:cTn id="82" fill="hold">
+                    <p:cTn id="78" fill="hold">
                       <p:stCondLst>
                         <p:cond delay="indefinite"/>
                       </p:stCondLst>
                       <p:childTnLst>
                         <p:par>
-                          <p:cTn id="83" fill="hold">
+                          <p:cTn id="79" fill="hold">
                             <p:stCondLst>
                               <p:cond delay="0"/>
                             </p:stCondLst>
                             <p:childTnLst>
                               <p:par>
-                                <p:cTn id="84" presetID="22" presetClass="entr" presetSubtype="4" fill="hold" nodeType="clickEffect">
+                                <p:cTn id="80" presetID="22" presetClass="entr" presetSubtype="4" fill="hold" nodeType="clickEffect">
                                   <p:stCondLst>
                                     <p:cond delay="0"/>
                                   </p:stCondLst>
                                   <p:childTnLst>
                                     <p:set>
                                       <p:cBhvr>
-                                        <p:cTn id="85" dur="1" fill="hold">
+                                        <p:cTn id="81" dur="1" fill="hold">
                                           <p:stCondLst>
                                             <p:cond delay="0"/>
                                           </p:stCondLst>
@@ -19807,12 +19673,57 @@
                                     </p:set>
                                     <p:animEffect transition="in" filter="wipe(down)">
                                       <p:cBhvr>
-                                        <p:cTn id="86" dur="500"/>
+                                        <p:cTn id="82" dur="500"/>
                                         <p:tgtEl>
                                           <p:spTgt spid="32"/>
                                         </p:tgtEl>
                                       </p:cBhvr>
                                     </p:animEffect>
+                                  </p:childTnLst>
+                                </p:cTn>
+                              </p:par>
+                            </p:childTnLst>
+                          </p:cTn>
+                        </p:par>
+                      </p:childTnLst>
+                    </p:cTn>
+                  </p:par>
+                  <p:par>
+                    <p:cTn id="83" fill="hold">
+                      <p:stCondLst>
+                        <p:cond delay="indefinite"/>
+                      </p:stCondLst>
+                      <p:childTnLst>
+                        <p:par>
+                          <p:cTn id="84" fill="hold">
+                            <p:stCondLst>
+                              <p:cond delay="0"/>
+                            </p:stCondLst>
+                            <p:childTnLst>
+                              <p:par>
+                                <p:cTn id="85" presetID="1" presetClass="entr" presetSubtype="0" fill="hold" nodeType="clickEffect">
+                                  <p:stCondLst>
+                                    <p:cond delay="0"/>
+                                  </p:stCondLst>
+                                  <p:childTnLst>
+                                    <p:set>
+                                      <p:cBhvr>
+                                        <p:cTn id="86" dur="1" fill="hold">
+                                          <p:stCondLst>
+                                            <p:cond delay="0"/>
+                                          </p:stCondLst>
+                                        </p:cTn>
+                                        <p:tgtEl>
+                                          <p:spTgt spid="42"/>
+                                        </p:tgtEl>
+                                        <p:attrNameLst>
+                                          <p:attrName>style.visibility</p:attrName>
+                                        </p:attrNameLst>
+                                      </p:cBhvr>
+                                      <p:to>
+                                        <p:strVal val="visible"/>
+                                      </p:to>
+                                    </p:set>
                                   </p:childTnLst>
                                 </p:cTn>
                               </p:par>
@@ -19835,7 +19746,7 @@
                             </p:stCondLst>
                             <p:childTnLst>
                               <p:par>
-                                <p:cTn id="89" presetID="1" presetClass="entr" presetSubtype="0" fill="hold" nodeType="clickEffect">
+                                <p:cTn id="89" presetID="1" presetClass="entr" presetSubtype="0" fill="hold" grpId="0" nodeType="clickEffect">
                                   <p:stCondLst>
                                     <p:cond delay="0"/>
                                   </p:stCondLst>
@@ -19848,7 +19759,7 @@
                                           </p:stCondLst>
                                         </p:cTn>
                                         <p:tgtEl>
-                                          <p:spTgt spid="42"/>
+                                          <p:spTgt spid="8"/>
                                         </p:tgtEl>
                                         <p:attrNameLst>
                                           <p:attrName>style.visibility</p:attrName>
@@ -19880,7 +19791,7 @@
                             </p:stCondLst>
                             <p:childTnLst>
                               <p:par>
-                                <p:cTn id="93" presetID="1" presetClass="entr" presetSubtype="0" fill="hold" grpId="0" nodeType="clickEffect">
+                                <p:cTn id="93" presetID="9" presetClass="entr" presetSubtype="0" fill="hold" nodeType="clickEffect">
                                   <p:stCondLst>
                                     <p:cond delay="0"/>
                                   </p:stCondLst>
@@ -19888,51 +19799,6 @@
                                     <p:set>
                                       <p:cBhvr>
                                         <p:cTn id="94" dur="1" fill="hold">
-                                          <p:stCondLst>
-                                            <p:cond delay="0"/>
-                                          </p:stCondLst>
-                                        </p:cTn>
-                                        <p:tgtEl>
-                                          <p:spTgt spid="8"/>
-                                        </p:tgtEl>
-                                        <p:attrNameLst>
-                                          <p:attrName>style.visibility</p:attrName>
-                                        </p:attrNameLst>
-                                      </p:cBhvr>
-                                      <p:to>
-                                        <p:strVal val="visible"/>
-                                      </p:to>
-                                    </p:set>
-                                  </p:childTnLst>
-                                </p:cTn>
-                              </p:par>
-                            </p:childTnLst>
-                          </p:cTn>
-                        </p:par>
-                      </p:childTnLst>
-                    </p:cTn>
-                  </p:par>
-                  <p:par>
-                    <p:cTn id="95" fill="hold">
-                      <p:stCondLst>
-                        <p:cond delay="indefinite"/>
-                      </p:stCondLst>
-                      <p:childTnLst>
-                        <p:par>
-                          <p:cTn id="96" fill="hold">
-                            <p:stCondLst>
-                              <p:cond delay="0"/>
-                            </p:stCondLst>
-                            <p:childTnLst>
-                              <p:par>
-                                <p:cTn id="97" presetID="9" presetClass="entr" presetSubtype="0" fill="hold" nodeType="clickEffect">
-                                  <p:stCondLst>
-                                    <p:cond delay="0"/>
-                                  </p:stCondLst>
-                                  <p:childTnLst>
-                                    <p:set>
-                                      <p:cBhvr>
-                                        <p:cTn id="98" dur="1" fill="hold">
                                           <p:stCondLst>
                                             <p:cond delay="0"/>
                                           </p:stCondLst>
@@ -19950,7 +19816,7 @@
                                     </p:set>
                                     <p:animEffect transition="in" filter="dissolve">
                                       <p:cBhvr>
-                                        <p:cTn id="99" dur="500"/>
+                                        <p:cTn id="95" dur="500"/>
                                         <p:tgtEl>
                                           <p:spTgt spid="35"/>
                                         </p:tgtEl>
@@ -19966,26 +19832,26 @@
                     </p:cTn>
                   </p:par>
                   <p:par>
-                    <p:cTn id="100" fill="hold">
+                    <p:cTn id="96" fill="hold">
                       <p:stCondLst>
                         <p:cond delay="indefinite"/>
                       </p:stCondLst>
                       <p:childTnLst>
                         <p:par>
-                          <p:cTn id="101" fill="hold">
+                          <p:cTn id="97" fill="hold">
                             <p:stCondLst>
                               <p:cond delay="0"/>
                             </p:stCondLst>
                             <p:childTnLst>
                               <p:par>
-                                <p:cTn id="102" presetID="30" presetClass="entr" presetSubtype="0" fill="hold" nodeType="clickEffect">
+                                <p:cTn id="98" presetID="30" presetClass="entr" presetSubtype="0" fill="hold" nodeType="clickEffect">
                                   <p:stCondLst>
                                     <p:cond delay="0"/>
                                   </p:stCondLst>
                                   <p:childTnLst>
                                     <p:set>
                                       <p:cBhvr>
-                                        <p:cTn id="103" dur="1" fill="hold">
+                                        <p:cTn id="99" dur="1" fill="hold">
                                           <p:stCondLst>
                                             <p:cond delay="0"/>
                                           </p:stCondLst>
@@ -20003,7 +19869,7 @@
                                     </p:set>
                                     <p:animEffect transition="in" filter="fade">
                                       <p:cBhvr>
-                                        <p:cTn id="104" dur="800" decel="100000"/>
+                                        <p:cTn id="100" dur="800" decel="100000"/>
                                         <p:tgtEl>
                                           <p:spTgt spid="47"/>
                                         </p:tgtEl>
@@ -20011,7 +19877,7 @@
                                     </p:animEffect>
                                     <p:anim calcmode="lin" valueType="num">
                                       <p:cBhvr>
-                                        <p:cTn id="105" dur="800" decel="100000" fill="hold"/>
+                                        <p:cTn id="101" dur="800" decel="100000" fill="hold"/>
                                         <p:tgtEl>
                                           <p:spTgt spid="47"/>
                                         </p:tgtEl>
@@ -20034,7 +19900,7 @@
                                     </p:anim>
                                     <p:anim calcmode="lin" valueType="num">
                                       <p:cBhvr>
-                                        <p:cTn id="106" dur="800" decel="100000" fill="hold"/>
+                                        <p:cTn id="102" dur="800" decel="100000" fill="hold"/>
                                         <p:tgtEl>
                                           <p:spTgt spid="47"/>
                                         </p:tgtEl>
@@ -20057,7 +19923,7 @@
                                     </p:anim>
                                     <p:anim calcmode="lin" valueType="num">
                                       <p:cBhvr>
-                                        <p:cTn id="107" dur="800" decel="100000" fill="hold"/>
+                                        <p:cTn id="103" dur="800" decel="100000" fill="hold"/>
                                         <p:tgtEl>
                                           <p:spTgt spid="47"/>
                                         </p:tgtEl>
@@ -20080,7 +19946,7 @@
                                     </p:anim>
                                     <p:anim calcmode="lin" valueType="num">
                                       <p:cBhvr>
-                                        <p:cTn id="108" dur="200" accel="100000" fill="hold">
+                                        <p:cTn id="104" dur="200" accel="100000" fill="hold">
                                           <p:stCondLst>
                                             <p:cond delay="800"/>
                                           </p:stCondLst>
@@ -20107,7 +19973,7 @@
                                     </p:anim>
                                     <p:anim calcmode="lin" valueType="num">
                                       <p:cBhvr>
-                                        <p:cTn id="109" dur="200" accel="100000" fill="hold">
+                                        <p:cTn id="105" dur="200" accel="100000" fill="hold">
                                           <p:stCondLst>
                                             <p:cond delay="800"/>
                                           </p:stCondLst>
@@ -20142,26 +20008,26 @@
                     </p:cTn>
                   </p:par>
                   <p:par>
-                    <p:cTn id="110" fill="hold">
+                    <p:cTn id="106" fill="hold">
                       <p:stCondLst>
                         <p:cond delay="indefinite"/>
                       </p:stCondLst>
                       <p:childTnLst>
                         <p:par>
-                          <p:cTn id="111" fill="hold">
+                          <p:cTn id="107" fill="hold">
                             <p:stCondLst>
                               <p:cond delay="0"/>
                             </p:stCondLst>
                             <p:childTnLst>
                               <p:par>
-                                <p:cTn id="112" presetID="1" presetClass="entr" presetSubtype="0" fill="hold" grpId="0" nodeType="clickEffect">
+                                <p:cTn id="108" presetID="1" presetClass="entr" presetSubtype="0" fill="hold" grpId="0" nodeType="clickEffect">
                                   <p:stCondLst>
                                     <p:cond delay="0"/>
                                   </p:stCondLst>
                                   <p:childTnLst>
                                     <p:set>
                                       <p:cBhvr>
-                                        <p:cTn id="113" dur="1" fill="hold">
+                                        <p:cTn id="109" dur="1" fill="hold">
                                           <p:stCondLst>
                                             <p:cond delay="0"/>
                                           </p:stCondLst>
